--- a/construct.pptx
+++ b/construct.pptx
@@ -4,8 +4,12 @@
   <p:sldMasterIdLst>
     <p:sldMasterId id="2147483648" r:id="rId1"/>
   </p:sldMasterIdLst>
+  <p:notesMasterIdLst>
+    <p:notesMasterId r:id="rId4"/>
+  </p:notesMasterIdLst>
   <p:sldIdLst>
     <p:sldId id="256" r:id="rId2"/>
+    <p:sldId id="257" r:id="rId3"/>
   </p:sldIdLst>
   <p:sldSz cx="12192000" cy="6858000"/>
   <p:notesSz cx="6858000" cy="9144000"/>
@@ -104,7 +108,445 @@
       </a:defRPr>
     </a:lvl9pPr>
   </p:defaultTextStyle>
+  <p:extLst>
+    <p:ext uri="{EFAFB233-063F-42B5-8137-9DF3F51BA10A}">
+      <p15:sldGuideLst xmlns:p15="http://schemas.microsoft.com/office/powerpoint/2012/main"/>
+    </p:ext>
+  </p:extLst>
 </p:presentation>
+</file>
+
+<file path=ppt/notesMasters/notesMaster1.xml><?xml version="1.0" encoding="utf-8"?>
+<p:notesMaster xmlns:a="http://schemas.openxmlformats.org/drawingml/2006/main" xmlns:r="http://schemas.openxmlformats.org/officeDocument/2006/relationships" xmlns:p="http://schemas.openxmlformats.org/presentationml/2006/main">
+  <p:cSld>
+    <p:bg>
+      <p:bgRef idx="1001">
+        <a:schemeClr val="bg1"/>
+      </p:bgRef>
+    </p:bg>
+    <p:spTree>
+      <p:nvGrpSpPr>
+        <p:cNvPr id="1" name=""/>
+        <p:cNvGrpSpPr/>
+        <p:nvPr/>
+      </p:nvGrpSpPr>
+      <p:grpSpPr>
+        <a:xfrm>
+          <a:off x="0" y="0"/>
+          <a:ext cx="0" cy="0"/>
+          <a:chOff x="0" y="0"/>
+          <a:chExt cx="0" cy="0"/>
+        </a:xfrm>
+      </p:grpSpPr>
+      <p:sp>
+        <p:nvSpPr>
+          <p:cNvPr id="2" name="页眉占位符 1"/>
+          <p:cNvSpPr>
+            <a:spLocks noGrp="1"/>
+          </p:cNvSpPr>
+          <p:nvPr>
+            <p:ph type="hdr" sz="quarter"/>
+          </p:nvPr>
+        </p:nvSpPr>
+        <p:spPr>
+          <a:xfrm>
+            <a:off x="0" y="0"/>
+            <a:ext cx="2971800" cy="458788"/>
+          </a:xfrm>
+          <a:prstGeom prst="rect">
+            <a:avLst/>
+          </a:prstGeom>
+        </p:spPr>
+        <p:txBody>
+          <a:bodyPr vert="horz" lIns="91440" tIns="45720" rIns="91440" bIns="45720" rtlCol="0"/>
+          <a:lstStyle>
+            <a:lvl1pPr algn="l">
+              <a:defRPr sz="1200"/>
+            </a:lvl1pPr>
+          </a:lstStyle>
+          <a:p>
+            <a:endParaRPr lang="zh-CN" altLang="en-US"/>
+          </a:p>
+        </p:txBody>
+      </p:sp>
+      <p:sp>
+        <p:nvSpPr>
+          <p:cNvPr id="3" name="日期占位符 2"/>
+          <p:cNvSpPr>
+            <a:spLocks noGrp="1"/>
+          </p:cNvSpPr>
+          <p:nvPr>
+            <p:ph type="dt" idx="1"/>
+          </p:nvPr>
+        </p:nvSpPr>
+        <p:spPr>
+          <a:xfrm>
+            <a:off x="3884613" y="0"/>
+            <a:ext cx="2971800" cy="458788"/>
+          </a:xfrm>
+          <a:prstGeom prst="rect">
+            <a:avLst/>
+          </a:prstGeom>
+        </p:spPr>
+        <p:txBody>
+          <a:bodyPr vert="horz" lIns="91440" tIns="45720" rIns="91440" bIns="45720" rtlCol="0"/>
+          <a:lstStyle>
+            <a:lvl1pPr algn="r">
+              <a:defRPr sz="1200"/>
+            </a:lvl1pPr>
+          </a:lstStyle>
+          <a:p>
+            <a:fld id="{95BED5AB-465E-4E70-8B4C-8410F2278A90}" type="datetimeFigureOut">
+              <a:rPr lang="zh-CN" altLang="en-US" smtClean="0"/>
+              <a:t>2025/11/10</a:t>
+            </a:fld>
+            <a:endParaRPr lang="zh-CN" altLang="en-US"/>
+          </a:p>
+        </p:txBody>
+      </p:sp>
+      <p:sp>
+        <p:nvSpPr>
+          <p:cNvPr id="4" name="幻灯片图像占位符 3"/>
+          <p:cNvSpPr>
+            <a:spLocks noGrp="1" noRot="1" noChangeAspect="1"/>
+          </p:cNvSpPr>
+          <p:nvPr>
+            <p:ph type="sldImg" idx="2"/>
+          </p:nvPr>
+        </p:nvSpPr>
+        <p:spPr>
+          <a:xfrm>
+            <a:off x="685800" y="1143000"/>
+            <a:ext cx="5486400" cy="3086100"/>
+          </a:xfrm>
+          <a:prstGeom prst="rect">
+            <a:avLst/>
+          </a:prstGeom>
+          <a:noFill/>
+          <a:ln w="12700">
+            <a:solidFill>
+              <a:prstClr val="black"/>
+            </a:solidFill>
+          </a:ln>
+        </p:spPr>
+        <p:txBody>
+          <a:bodyPr vert="horz" lIns="91440" tIns="45720" rIns="91440" bIns="45720" rtlCol="0" anchor="ctr"/>
+          <a:lstStyle/>
+          <a:p>
+            <a:endParaRPr lang="zh-CN" altLang="en-US"/>
+          </a:p>
+        </p:txBody>
+      </p:sp>
+      <p:sp>
+        <p:nvSpPr>
+          <p:cNvPr id="5" name="备注占位符 4"/>
+          <p:cNvSpPr>
+            <a:spLocks noGrp="1"/>
+          </p:cNvSpPr>
+          <p:nvPr>
+            <p:ph type="body" sz="quarter" idx="3"/>
+          </p:nvPr>
+        </p:nvSpPr>
+        <p:spPr>
+          <a:xfrm>
+            <a:off x="685800" y="4400550"/>
+            <a:ext cx="5486400" cy="3600450"/>
+          </a:xfrm>
+          <a:prstGeom prst="rect">
+            <a:avLst/>
+          </a:prstGeom>
+        </p:spPr>
+        <p:txBody>
+          <a:bodyPr vert="horz" lIns="91440" tIns="45720" rIns="91440" bIns="45720" rtlCol="0"/>
+          <a:lstStyle/>
+          <a:p>
+            <a:pPr lvl="0"/>
+            <a:r>
+              <a:rPr lang="zh-CN" altLang="en-US"/>
+              <a:t>单击此处编辑母版文本样式</a:t>
+            </a:r>
+          </a:p>
+          <a:p>
+            <a:pPr lvl="1"/>
+            <a:r>
+              <a:rPr lang="zh-CN" altLang="en-US"/>
+              <a:t>二级</a:t>
+            </a:r>
+          </a:p>
+          <a:p>
+            <a:pPr lvl="2"/>
+            <a:r>
+              <a:rPr lang="zh-CN" altLang="en-US"/>
+              <a:t>三级</a:t>
+            </a:r>
+          </a:p>
+          <a:p>
+            <a:pPr lvl="3"/>
+            <a:r>
+              <a:rPr lang="zh-CN" altLang="en-US"/>
+              <a:t>四级</a:t>
+            </a:r>
+          </a:p>
+          <a:p>
+            <a:pPr lvl="4"/>
+            <a:r>
+              <a:rPr lang="zh-CN" altLang="en-US"/>
+              <a:t>五级</a:t>
+            </a:r>
+          </a:p>
+        </p:txBody>
+      </p:sp>
+      <p:sp>
+        <p:nvSpPr>
+          <p:cNvPr id="6" name="页脚占位符 5"/>
+          <p:cNvSpPr>
+            <a:spLocks noGrp="1"/>
+          </p:cNvSpPr>
+          <p:nvPr>
+            <p:ph type="ftr" sz="quarter" idx="4"/>
+          </p:nvPr>
+        </p:nvSpPr>
+        <p:spPr>
+          <a:xfrm>
+            <a:off x="0" y="8685213"/>
+            <a:ext cx="2971800" cy="458787"/>
+          </a:xfrm>
+          <a:prstGeom prst="rect">
+            <a:avLst/>
+          </a:prstGeom>
+        </p:spPr>
+        <p:txBody>
+          <a:bodyPr vert="horz" lIns="91440" tIns="45720" rIns="91440" bIns="45720" rtlCol="0" anchor="b"/>
+          <a:lstStyle>
+            <a:lvl1pPr algn="l">
+              <a:defRPr sz="1200"/>
+            </a:lvl1pPr>
+          </a:lstStyle>
+          <a:p>
+            <a:endParaRPr lang="zh-CN" altLang="en-US"/>
+          </a:p>
+        </p:txBody>
+      </p:sp>
+      <p:sp>
+        <p:nvSpPr>
+          <p:cNvPr id="7" name="灯片编号占位符 6"/>
+          <p:cNvSpPr>
+            <a:spLocks noGrp="1"/>
+          </p:cNvSpPr>
+          <p:nvPr>
+            <p:ph type="sldNum" sz="quarter" idx="5"/>
+          </p:nvPr>
+        </p:nvSpPr>
+        <p:spPr>
+          <a:xfrm>
+            <a:off x="3884613" y="8685213"/>
+            <a:ext cx="2971800" cy="458787"/>
+          </a:xfrm>
+          <a:prstGeom prst="rect">
+            <a:avLst/>
+          </a:prstGeom>
+        </p:spPr>
+        <p:txBody>
+          <a:bodyPr vert="horz" lIns="91440" tIns="45720" rIns="91440" bIns="45720" rtlCol="0" anchor="b"/>
+          <a:lstStyle>
+            <a:lvl1pPr algn="r">
+              <a:defRPr sz="1200"/>
+            </a:lvl1pPr>
+          </a:lstStyle>
+          <a:p>
+            <a:fld id="{50F91C08-419E-435B-89FC-920B728238CC}" type="slidenum">
+              <a:rPr lang="zh-CN" altLang="en-US" smtClean="0"/>
+              <a:t>‹#›</a:t>
+            </a:fld>
+            <a:endParaRPr lang="zh-CN" altLang="en-US"/>
+          </a:p>
+        </p:txBody>
+      </p:sp>
+    </p:spTree>
+    <p:extLst>
+      <p:ext uri="{BB962C8B-B14F-4D97-AF65-F5344CB8AC3E}">
+        <p14:creationId xmlns:p14="http://schemas.microsoft.com/office/powerpoint/2010/main" val="1176541123"/>
+      </p:ext>
+    </p:extLst>
+  </p:cSld>
+  <p:clrMap bg1="lt1" tx1="dk1" bg2="lt2" tx2="dk2" accent1="accent1" accent2="accent2" accent3="accent3" accent4="accent4" accent5="accent5" accent6="accent6" hlink="hlink" folHlink="folHlink"/>
+  <p:notesStyle>
+    <a:lvl1pPr marL="0" algn="l" defTabSz="914400" rtl="0" eaLnBrk="1" latinLnBrk="0" hangingPunct="1">
+      <a:defRPr sz="1200" kern="1200">
+        <a:solidFill>
+          <a:schemeClr val="tx1"/>
+        </a:solidFill>
+        <a:latin typeface="+mn-lt"/>
+        <a:ea typeface="+mn-ea"/>
+        <a:cs typeface="+mn-cs"/>
+      </a:defRPr>
+    </a:lvl1pPr>
+    <a:lvl2pPr marL="457200" algn="l" defTabSz="914400" rtl="0" eaLnBrk="1" latinLnBrk="0" hangingPunct="1">
+      <a:defRPr sz="1200" kern="1200">
+        <a:solidFill>
+          <a:schemeClr val="tx1"/>
+        </a:solidFill>
+        <a:latin typeface="+mn-lt"/>
+        <a:ea typeface="+mn-ea"/>
+        <a:cs typeface="+mn-cs"/>
+      </a:defRPr>
+    </a:lvl2pPr>
+    <a:lvl3pPr marL="914400" algn="l" defTabSz="914400" rtl="0" eaLnBrk="1" latinLnBrk="0" hangingPunct="1">
+      <a:defRPr sz="1200" kern="1200">
+        <a:solidFill>
+          <a:schemeClr val="tx1"/>
+        </a:solidFill>
+        <a:latin typeface="+mn-lt"/>
+        <a:ea typeface="+mn-ea"/>
+        <a:cs typeface="+mn-cs"/>
+      </a:defRPr>
+    </a:lvl3pPr>
+    <a:lvl4pPr marL="1371600" algn="l" defTabSz="914400" rtl="0" eaLnBrk="1" latinLnBrk="0" hangingPunct="1">
+      <a:defRPr sz="1200" kern="1200">
+        <a:solidFill>
+          <a:schemeClr val="tx1"/>
+        </a:solidFill>
+        <a:latin typeface="+mn-lt"/>
+        <a:ea typeface="+mn-ea"/>
+        <a:cs typeface="+mn-cs"/>
+      </a:defRPr>
+    </a:lvl4pPr>
+    <a:lvl5pPr marL="1828800" algn="l" defTabSz="914400" rtl="0" eaLnBrk="1" latinLnBrk="0" hangingPunct="1">
+      <a:defRPr sz="1200" kern="1200">
+        <a:solidFill>
+          <a:schemeClr val="tx1"/>
+        </a:solidFill>
+        <a:latin typeface="+mn-lt"/>
+        <a:ea typeface="+mn-ea"/>
+        <a:cs typeface="+mn-cs"/>
+      </a:defRPr>
+    </a:lvl5pPr>
+    <a:lvl6pPr marL="2286000" algn="l" defTabSz="914400" rtl="0" eaLnBrk="1" latinLnBrk="0" hangingPunct="1">
+      <a:defRPr sz="1200" kern="1200">
+        <a:solidFill>
+          <a:schemeClr val="tx1"/>
+        </a:solidFill>
+        <a:latin typeface="+mn-lt"/>
+        <a:ea typeface="+mn-ea"/>
+        <a:cs typeface="+mn-cs"/>
+      </a:defRPr>
+    </a:lvl6pPr>
+    <a:lvl7pPr marL="2743200" algn="l" defTabSz="914400" rtl="0" eaLnBrk="1" latinLnBrk="0" hangingPunct="1">
+      <a:defRPr sz="1200" kern="1200">
+        <a:solidFill>
+          <a:schemeClr val="tx1"/>
+        </a:solidFill>
+        <a:latin typeface="+mn-lt"/>
+        <a:ea typeface="+mn-ea"/>
+        <a:cs typeface="+mn-cs"/>
+      </a:defRPr>
+    </a:lvl7pPr>
+    <a:lvl8pPr marL="3200400" algn="l" defTabSz="914400" rtl="0" eaLnBrk="1" latinLnBrk="0" hangingPunct="1">
+      <a:defRPr sz="1200" kern="1200">
+        <a:solidFill>
+          <a:schemeClr val="tx1"/>
+        </a:solidFill>
+        <a:latin typeface="+mn-lt"/>
+        <a:ea typeface="+mn-ea"/>
+        <a:cs typeface="+mn-cs"/>
+      </a:defRPr>
+    </a:lvl8pPr>
+    <a:lvl9pPr marL="3657600" algn="l" defTabSz="914400" rtl="0" eaLnBrk="1" latinLnBrk="0" hangingPunct="1">
+      <a:defRPr sz="1200" kern="1200">
+        <a:solidFill>
+          <a:schemeClr val="tx1"/>
+        </a:solidFill>
+        <a:latin typeface="+mn-lt"/>
+        <a:ea typeface="+mn-ea"/>
+        <a:cs typeface="+mn-cs"/>
+      </a:defRPr>
+    </a:lvl9pPr>
+  </p:notesStyle>
+</p:notesMaster>
+</file>
+
+<file path=ppt/notesSlides/notesSlide1.xml><?xml version="1.0" encoding="utf-8"?>
+<p:notes xmlns:a="http://schemas.openxmlformats.org/drawingml/2006/main" xmlns:r="http://schemas.openxmlformats.org/officeDocument/2006/relationships" xmlns:p="http://schemas.openxmlformats.org/presentationml/2006/main">
+  <p:cSld>
+    <p:spTree>
+      <p:nvGrpSpPr>
+        <p:cNvPr id="1" name=""/>
+        <p:cNvGrpSpPr/>
+        <p:nvPr/>
+      </p:nvGrpSpPr>
+      <p:grpSpPr>
+        <a:xfrm>
+          <a:off x="0" y="0"/>
+          <a:ext cx="0" cy="0"/>
+          <a:chOff x="0" y="0"/>
+          <a:chExt cx="0" cy="0"/>
+        </a:xfrm>
+      </p:grpSpPr>
+      <p:sp>
+        <p:nvSpPr>
+          <p:cNvPr id="2" name="幻灯片图像占位符 1"/>
+          <p:cNvSpPr>
+            <a:spLocks noGrp="1" noRot="1" noChangeAspect="1"/>
+          </p:cNvSpPr>
+          <p:nvPr>
+            <p:ph type="sldImg"/>
+          </p:nvPr>
+        </p:nvSpPr>
+        <p:spPr/>
+      </p:sp>
+      <p:sp>
+        <p:nvSpPr>
+          <p:cNvPr id="3" name="备注占位符 2"/>
+          <p:cNvSpPr>
+            <a:spLocks noGrp="1"/>
+          </p:cNvSpPr>
+          <p:nvPr>
+            <p:ph type="body" idx="1"/>
+          </p:nvPr>
+        </p:nvSpPr>
+        <p:spPr/>
+        <p:txBody>
+          <a:bodyPr/>
+          <a:lstStyle/>
+          <a:p>
+            <a:endParaRPr lang="zh-CN" altLang="en-US" dirty="0"/>
+          </a:p>
+        </p:txBody>
+      </p:sp>
+      <p:sp>
+        <p:nvSpPr>
+          <p:cNvPr id="4" name="灯片编号占位符 3"/>
+          <p:cNvSpPr>
+            <a:spLocks noGrp="1"/>
+          </p:cNvSpPr>
+          <p:nvPr>
+            <p:ph type="sldNum" sz="quarter" idx="5"/>
+          </p:nvPr>
+        </p:nvSpPr>
+        <p:spPr/>
+        <p:txBody>
+          <a:bodyPr/>
+          <a:lstStyle/>
+          <a:p>
+            <a:fld id="{50F91C08-419E-435B-89FC-920B728238CC}" type="slidenum">
+              <a:rPr lang="zh-CN" altLang="en-US" smtClean="0"/>
+              <a:t>1</a:t>
+            </a:fld>
+            <a:endParaRPr lang="zh-CN" altLang="en-US"/>
+          </a:p>
+        </p:txBody>
+      </p:sp>
+    </p:spTree>
+    <p:extLst>
+      <p:ext uri="{BB962C8B-B14F-4D97-AF65-F5344CB8AC3E}">
+        <p14:creationId xmlns:p14="http://schemas.microsoft.com/office/powerpoint/2010/main" val="2477020253"/>
+      </p:ext>
+    </p:extLst>
+  </p:cSld>
+  <p:clrMapOvr>
+    <a:masterClrMapping/>
+  </p:clrMapOvr>
+</p:notes>
 </file>
 
 <file path=ppt/slideLayouts/slideLayout1.xml><?xml version="1.0" encoding="utf-8"?>
@@ -254,7 +696,7 @@
           <a:p>
             <a:fld id="{A69F80EA-AFE6-4570-883F-20D9B728F631}" type="datetimeFigureOut">
               <a:rPr lang="zh-CN" altLang="en-US" smtClean="0"/>
-              <a:t>2025/11/6</a:t>
+              <a:t>2025/11/10</a:t>
             </a:fld>
             <a:endParaRPr lang="zh-CN" altLang="en-US"/>
           </a:p>
@@ -452,7 +894,7 @@
           <a:p>
             <a:fld id="{A69F80EA-AFE6-4570-883F-20D9B728F631}" type="datetimeFigureOut">
               <a:rPr lang="zh-CN" altLang="en-US" smtClean="0"/>
-              <a:t>2025/11/6</a:t>
+              <a:t>2025/11/10</a:t>
             </a:fld>
             <a:endParaRPr lang="zh-CN" altLang="en-US"/>
           </a:p>
@@ -660,7 +1102,7 @@
           <a:p>
             <a:fld id="{A69F80EA-AFE6-4570-883F-20D9B728F631}" type="datetimeFigureOut">
               <a:rPr lang="zh-CN" altLang="en-US" smtClean="0"/>
-              <a:t>2025/11/6</a:t>
+              <a:t>2025/11/10</a:t>
             </a:fld>
             <a:endParaRPr lang="zh-CN" altLang="en-US"/>
           </a:p>
@@ -858,7 +1300,7 @@
           <a:p>
             <a:fld id="{A69F80EA-AFE6-4570-883F-20D9B728F631}" type="datetimeFigureOut">
               <a:rPr lang="zh-CN" altLang="en-US" smtClean="0"/>
-              <a:t>2025/11/6</a:t>
+              <a:t>2025/11/10</a:t>
             </a:fld>
             <a:endParaRPr lang="zh-CN" altLang="en-US"/>
           </a:p>
@@ -1133,7 +1575,7 @@
           <a:p>
             <a:fld id="{A69F80EA-AFE6-4570-883F-20D9B728F631}" type="datetimeFigureOut">
               <a:rPr lang="zh-CN" altLang="en-US" smtClean="0"/>
-              <a:t>2025/11/6</a:t>
+              <a:t>2025/11/10</a:t>
             </a:fld>
             <a:endParaRPr lang="zh-CN" altLang="en-US"/>
           </a:p>
@@ -1398,7 +1840,7 @@
           <a:p>
             <a:fld id="{A69F80EA-AFE6-4570-883F-20D9B728F631}" type="datetimeFigureOut">
               <a:rPr lang="zh-CN" altLang="en-US" smtClean="0"/>
-              <a:t>2025/11/6</a:t>
+              <a:t>2025/11/10</a:t>
             </a:fld>
             <a:endParaRPr lang="zh-CN" altLang="en-US"/>
           </a:p>
@@ -1810,7 +2252,7 @@
           <a:p>
             <a:fld id="{A69F80EA-AFE6-4570-883F-20D9B728F631}" type="datetimeFigureOut">
               <a:rPr lang="zh-CN" altLang="en-US" smtClean="0"/>
-              <a:t>2025/11/6</a:t>
+              <a:t>2025/11/10</a:t>
             </a:fld>
             <a:endParaRPr lang="zh-CN" altLang="en-US"/>
           </a:p>
@@ -1951,7 +2393,7 @@
           <a:p>
             <a:fld id="{A69F80EA-AFE6-4570-883F-20D9B728F631}" type="datetimeFigureOut">
               <a:rPr lang="zh-CN" altLang="en-US" smtClean="0"/>
-              <a:t>2025/11/6</a:t>
+              <a:t>2025/11/10</a:t>
             </a:fld>
             <a:endParaRPr lang="zh-CN" altLang="en-US"/>
           </a:p>
@@ -2064,7 +2506,7 @@
           <a:p>
             <a:fld id="{A69F80EA-AFE6-4570-883F-20D9B728F631}" type="datetimeFigureOut">
               <a:rPr lang="zh-CN" altLang="en-US" smtClean="0"/>
-              <a:t>2025/11/6</a:t>
+              <a:t>2025/11/10</a:t>
             </a:fld>
             <a:endParaRPr lang="zh-CN" altLang="en-US"/>
           </a:p>
@@ -2375,7 +2817,7 @@
           <a:p>
             <a:fld id="{A69F80EA-AFE6-4570-883F-20D9B728F631}" type="datetimeFigureOut">
               <a:rPr lang="zh-CN" altLang="en-US" smtClean="0"/>
-              <a:t>2025/11/6</a:t>
+              <a:t>2025/11/10</a:t>
             </a:fld>
             <a:endParaRPr lang="zh-CN" altLang="en-US"/>
           </a:p>
@@ -2663,7 +3105,7 @@
           <a:p>
             <a:fld id="{A69F80EA-AFE6-4570-883F-20D9B728F631}" type="datetimeFigureOut">
               <a:rPr lang="zh-CN" altLang="en-US" smtClean="0"/>
-              <a:t>2025/11/6</a:t>
+              <a:t>2025/11/10</a:t>
             </a:fld>
             <a:endParaRPr lang="zh-CN" altLang="en-US"/>
           </a:p>
@@ -2904,7 +3346,7 @@
           <a:p>
             <a:fld id="{A69F80EA-AFE6-4570-883F-20D9B728F631}" type="datetimeFigureOut">
               <a:rPr lang="zh-CN" altLang="en-US" smtClean="0"/>
-              <a:t>2025/11/6</a:t>
+              <a:t>2025/11/10</a:t>
             </a:fld>
             <a:endParaRPr lang="zh-CN" altLang="en-US"/>
           </a:p>
@@ -3371,7 +3813,7 @@
         </p:nvSpPr>
         <p:spPr>
           <a:xfrm>
-            <a:off x="2128520" y="96520"/>
+            <a:off x="1747520" y="96520"/>
             <a:ext cx="2467342" cy="369332"/>
           </a:xfrm>
           <a:prstGeom prst="rect">
@@ -3443,8 +3885,68 @@
         </p:nvSpPr>
         <p:spPr>
           <a:xfrm>
-            <a:off x="5582920" y="96520"/>
-            <a:ext cx="3836307" cy="369332"/>
+            <a:off x="4909820" y="96520"/>
+            <a:ext cx="7254930" cy="369332"/>
+          </a:xfrm>
+          <a:prstGeom prst="rect">
+            <a:avLst/>
+          </a:prstGeom>
+          <a:noFill/>
+        </p:spPr>
+        <p:txBody>
+          <a:bodyPr wrap="square" rtlCol="0">
+            <a:spAutoFit/>
+          </a:bodyPr>
+          <a:lstStyle/>
+          <a:p>
+            <a:r>
+              <a:rPr lang="en-US" altLang="zh-CN" dirty="0"/>
+              <a:t>0,0,cos(yaw),sin(yaw),speed(-2,20</a:t>
+            </a:r>
+            <a:r>
+              <a:rPr lang="zh-CN" altLang="en-US" dirty="0"/>
+              <a:t>→</a:t>
+            </a:r>
+            <a:r>
+              <a:rPr lang="en-US" altLang="zh-CN" dirty="0"/>
+              <a:t>-1,1),w(0.8,3)</a:t>
+            </a:r>
+            <a:r>
+              <a:rPr lang="zh-CN" altLang="en-US" dirty="0"/>
+              <a:t> →</a:t>
+            </a:r>
+            <a:r>
+              <a:rPr lang="en-US" altLang="zh-CN" dirty="0"/>
+              <a:t>0,1,l (0.8,7)</a:t>
+            </a:r>
+            <a:r>
+              <a:rPr lang="zh-CN" altLang="en-US" dirty="0"/>
+              <a:t> →</a:t>
+            </a:r>
+            <a:r>
+              <a:rPr lang="en-US" altLang="zh-CN" dirty="0"/>
+              <a:t>0,1 | 1</a:t>
+            </a:r>
+            <a:endParaRPr lang="zh-CN" altLang="en-US" dirty="0"/>
+          </a:p>
+        </p:txBody>
+      </p:sp>
+      <p:sp>
+        <p:nvSpPr>
+          <p:cNvPr id="8" name="文本框 7">
+            <a:extLst>
+              <a:ext uri="{FF2B5EF4-FFF2-40B4-BE49-F238E27FC236}">
+                <a16:creationId xmlns:a16="http://schemas.microsoft.com/office/drawing/2014/main" id="{F5676D12-4941-44F5-B7B9-6150D46F31F8}"/>
+              </a:ext>
+            </a:extLst>
+          </p:cNvPr>
+          <p:cNvSpPr txBox="1"/>
+          <p:nvPr/>
+        </p:nvSpPr>
+        <p:spPr>
+          <a:xfrm>
+            <a:off x="1747520" y="665480"/>
+            <a:ext cx="2440092" cy="369332"/>
           </a:xfrm>
           <a:prstGeom prst="rect">
             <a:avLst/>
@@ -3458,8 +3960,44 @@
           <a:lstStyle/>
           <a:p>
             <a:r>
-              <a:rPr lang="en-US" altLang="zh-CN" dirty="0"/>
-              <a:t>0,cos(yaw),sin(yaw),speed(-2,20</a:t>
+              <a:rPr lang="en-US" altLang="zh-CN" dirty="0" err="1"/>
+              <a:t>dx,dy,dvx,dvy,w,l,active</a:t>
+            </a:r>
+            <a:endParaRPr lang="zh-CN" altLang="en-US" dirty="0"/>
+          </a:p>
+        </p:txBody>
+      </p:sp>
+      <p:sp>
+        <p:nvSpPr>
+          <p:cNvPr id="9" name="文本框 8">
+            <a:extLst>
+              <a:ext uri="{FF2B5EF4-FFF2-40B4-BE49-F238E27FC236}">
+                <a16:creationId xmlns:a16="http://schemas.microsoft.com/office/drawing/2014/main" id="{511FB6BE-5F59-4148-AE9F-38C322CA3556}"/>
+              </a:ext>
+            </a:extLst>
+          </p:cNvPr>
+          <p:cNvSpPr txBox="1"/>
+          <p:nvPr/>
+        </p:nvSpPr>
+        <p:spPr>
+          <a:xfrm>
+            <a:off x="4909818" y="665480"/>
+            <a:ext cx="7210215" cy="369332"/>
+          </a:xfrm>
+          <a:prstGeom prst="rect">
+            <a:avLst/>
+          </a:prstGeom>
+          <a:noFill/>
+        </p:spPr>
+        <p:txBody>
+          <a:bodyPr wrap="square" rtlCol="0">
+            <a:spAutoFit/>
+          </a:bodyPr>
+          <a:lstStyle/>
+          <a:p>
+            <a:r>
+              <a:rPr lang="en-US" altLang="zh-CN" dirty="0"/>
+              <a:t>dx(0,200</a:t>
             </a:r>
             <a:r>
               <a:rPr lang="zh-CN" altLang="en-US" dirty="0"/>
@@ -3467,9 +4005,2292 @@
             </a:r>
             <a:r>
               <a:rPr lang="en-US" altLang="zh-CN" dirty="0"/>
-              <a:t>-1)</a:t>
+              <a:t>0,1),dy (0,200</a:t>
+            </a:r>
+            <a:r>
+              <a:rPr lang="zh-CN" altLang="en-US" dirty="0"/>
+              <a:t>→</a:t>
+            </a:r>
+            <a:r>
+              <a:rPr lang="en-US" altLang="zh-CN" dirty="0"/>
+              <a:t>0,1),speed(same), speed same),w,l,1</a:t>
             </a:r>
             <a:endParaRPr lang="zh-CN" altLang="en-US" dirty="0"/>
+          </a:p>
+        </p:txBody>
+      </p:sp>
+      <p:sp>
+        <p:nvSpPr>
+          <p:cNvPr id="10" name="文本框 9">
+            <a:extLst>
+              <a:ext uri="{FF2B5EF4-FFF2-40B4-BE49-F238E27FC236}">
+                <a16:creationId xmlns:a16="http://schemas.microsoft.com/office/drawing/2014/main" id="{3AB7EFF7-B738-4F85-A06B-13D7757B9D64}"/>
+              </a:ext>
+            </a:extLst>
+          </p:cNvPr>
+          <p:cNvSpPr txBox="1"/>
+          <p:nvPr/>
+        </p:nvSpPr>
+        <p:spPr>
+          <a:xfrm>
+            <a:off x="259080" y="1898842"/>
+            <a:ext cx="904415" cy="369332"/>
+          </a:xfrm>
+          <a:prstGeom prst="rect">
+            <a:avLst/>
+          </a:prstGeom>
+          <a:noFill/>
+        </p:spPr>
+        <p:txBody>
+          <a:bodyPr wrap="none" rtlCol="0">
+            <a:spAutoFit/>
+          </a:bodyPr>
+          <a:lstStyle/>
+          <a:p>
+            <a:r>
+              <a:rPr lang="en-US" altLang="zh-CN" dirty="0"/>
+              <a:t>W_lane</a:t>
+            </a:r>
+            <a:endParaRPr lang="zh-CN" altLang="en-US" dirty="0"/>
+          </a:p>
+        </p:txBody>
+      </p:sp>
+      <p:sp>
+        <p:nvSpPr>
+          <p:cNvPr id="11" name="文本框 10">
+            <a:extLst>
+              <a:ext uri="{FF2B5EF4-FFF2-40B4-BE49-F238E27FC236}">
+                <a16:creationId xmlns:a16="http://schemas.microsoft.com/office/drawing/2014/main" id="{C821E84A-FC95-46EE-81F6-05D2CD3DA68B}"/>
+              </a:ext>
+            </a:extLst>
+          </p:cNvPr>
+          <p:cNvSpPr txBox="1"/>
+          <p:nvPr/>
+        </p:nvSpPr>
+        <p:spPr>
+          <a:xfrm>
+            <a:off x="4909819" y="1034812"/>
+            <a:ext cx="2849882" cy="369332"/>
+          </a:xfrm>
+          <a:prstGeom prst="rect">
+            <a:avLst/>
+          </a:prstGeom>
+          <a:noFill/>
+        </p:spPr>
+        <p:txBody>
+          <a:bodyPr wrap="square" rtlCol="0">
+            <a:spAutoFit/>
+          </a:bodyPr>
+          <a:lstStyle/>
+          <a:p>
+            <a:r>
+              <a:rPr lang="en-US" altLang="zh-CN" dirty="0"/>
+              <a:t>1,1,1,1,1,1,0</a:t>
+            </a:r>
+            <a:endParaRPr lang="zh-CN" altLang="en-US" dirty="0"/>
+          </a:p>
+        </p:txBody>
+      </p:sp>
+      <p:sp>
+        <p:nvSpPr>
+          <p:cNvPr id="3" name="文本框 2">
+            <a:extLst>
+              <a:ext uri="{FF2B5EF4-FFF2-40B4-BE49-F238E27FC236}">
+                <a16:creationId xmlns:a16="http://schemas.microsoft.com/office/drawing/2014/main" id="{98A57555-0182-45A8-A6B4-E5709A80A0B8}"/>
+              </a:ext>
+            </a:extLst>
+          </p:cNvPr>
+          <p:cNvSpPr txBox="1"/>
+          <p:nvPr/>
+        </p:nvSpPr>
+        <p:spPr>
+          <a:xfrm>
+            <a:off x="12192000" y="91440"/>
+            <a:ext cx="718466" cy="369332"/>
+          </a:xfrm>
+          <a:prstGeom prst="rect">
+            <a:avLst/>
+          </a:prstGeom>
+          <a:noFill/>
+        </p:spPr>
+        <p:txBody>
+          <a:bodyPr wrap="none" rtlCol="0">
+            <a:spAutoFit/>
+          </a:bodyPr>
+          <a:lstStyle/>
+          <a:p>
+            <a:r>
+              <a:rPr lang="en-US" altLang="zh-CN" b="1" dirty="0">
+                <a:solidFill>
+                  <a:srgbClr val="FF0000"/>
+                </a:solidFill>
+              </a:rPr>
+              <a:t>8dim</a:t>
+            </a:r>
+            <a:endParaRPr lang="zh-CN" altLang="en-US" b="1" dirty="0">
+              <a:solidFill>
+                <a:srgbClr val="FF0000"/>
+              </a:solidFill>
+            </a:endParaRPr>
+          </a:p>
+        </p:txBody>
+      </p:sp>
+      <p:sp>
+        <p:nvSpPr>
+          <p:cNvPr id="12" name="文本框 11">
+            <a:extLst>
+              <a:ext uri="{FF2B5EF4-FFF2-40B4-BE49-F238E27FC236}">
+                <a16:creationId xmlns:a16="http://schemas.microsoft.com/office/drawing/2014/main" id="{F7DAD76C-4679-4526-A614-4B755A195B8E}"/>
+              </a:ext>
+            </a:extLst>
+          </p:cNvPr>
+          <p:cNvSpPr txBox="1"/>
+          <p:nvPr/>
+        </p:nvSpPr>
+        <p:spPr>
+          <a:xfrm>
+            <a:off x="12188664" y="680581"/>
+            <a:ext cx="1090363" cy="369332"/>
+          </a:xfrm>
+          <a:prstGeom prst="rect">
+            <a:avLst/>
+          </a:prstGeom>
+          <a:noFill/>
+        </p:spPr>
+        <p:txBody>
+          <a:bodyPr wrap="none" rtlCol="0">
+            <a:spAutoFit/>
+          </a:bodyPr>
+          <a:lstStyle/>
+          <a:p>
+            <a:r>
+              <a:rPr lang="en-US" altLang="zh-CN" b="1" dirty="0">
+                <a:solidFill>
+                  <a:srgbClr val="FF0000"/>
+                </a:solidFill>
+              </a:rPr>
+              <a:t>7x20dim</a:t>
+            </a:r>
+            <a:endParaRPr lang="zh-CN" altLang="en-US" b="1" dirty="0">
+              <a:solidFill>
+                <a:srgbClr val="FF0000"/>
+              </a:solidFill>
+            </a:endParaRPr>
+          </a:p>
+        </p:txBody>
+      </p:sp>
+      <p:sp>
+        <p:nvSpPr>
+          <p:cNvPr id="18" name="文本框 17">
+            <a:extLst>
+              <a:ext uri="{FF2B5EF4-FFF2-40B4-BE49-F238E27FC236}">
+                <a16:creationId xmlns:a16="http://schemas.microsoft.com/office/drawing/2014/main" id="{244BC7BF-1FE9-4991-8A69-E3C4BE00DC01}"/>
+              </a:ext>
+            </a:extLst>
+          </p:cNvPr>
+          <p:cNvSpPr txBox="1"/>
+          <p:nvPr/>
+        </p:nvSpPr>
+        <p:spPr>
+          <a:xfrm>
+            <a:off x="1747520" y="1898842"/>
+            <a:ext cx="2087880" cy="369332"/>
+          </a:xfrm>
+          <a:prstGeom prst="rect">
+            <a:avLst/>
+          </a:prstGeom>
+          <a:noFill/>
+        </p:spPr>
+        <p:txBody>
+          <a:bodyPr wrap="square" rtlCol="0">
+            <a:spAutoFit/>
+          </a:bodyPr>
+          <a:lstStyle/>
+          <a:p>
+            <a:r>
+              <a:rPr lang="en-US" altLang="zh-CN" dirty="0"/>
+              <a:t>dx,dy,Δs(</a:t>
+            </a:r>
+            <a:r>
+              <a:rPr lang="zh-CN" altLang="en-US" dirty="0"/>
+              <a:t>剩余路径</a:t>
+            </a:r>
+            <a:r>
+              <a:rPr lang="en-US" altLang="zh-CN" dirty="0"/>
+              <a:t>)</a:t>
+            </a:r>
+            <a:endParaRPr lang="zh-CN" altLang="en-US" dirty="0"/>
+          </a:p>
+        </p:txBody>
+      </p:sp>
+      <p:sp>
+        <p:nvSpPr>
+          <p:cNvPr id="20" name="文本框 19">
+            <a:extLst>
+              <a:ext uri="{FF2B5EF4-FFF2-40B4-BE49-F238E27FC236}">
+                <a16:creationId xmlns:a16="http://schemas.microsoft.com/office/drawing/2014/main" id="{D0C6EC13-A858-4BAC-9B28-D6D7C9013B5F}"/>
+              </a:ext>
+            </a:extLst>
+          </p:cNvPr>
+          <p:cNvSpPr txBox="1"/>
+          <p:nvPr/>
+        </p:nvSpPr>
+        <p:spPr>
+          <a:xfrm>
+            <a:off x="4266693" y="83820"/>
+            <a:ext cx="643125" cy="369332"/>
+          </a:xfrm>
+          <a:prstGeom prst="rect">
+            <a:avLst/>
+          </a:prstGeom>
+          <a:noFill/>
+        </p:spPr>
+        <p:txBody>
+          <a:bodyPr wrap="none" rtlCol="0">
+            <a:spAutoFit/>
+          </a:bodyPr>
+          <a:lstStyle/>
+          <a:p>
+            <a:r>
+              <a:rPr lang="en-US" altLang="zh-CN" dirty="0"/>
+              <a:t>valid</a:t>
+            </a:r>
+            <a:endParaRPr lang="zh-CN" altLang="en-US" dirty="0"/>
+          </a:p>
+        </p:txBody>
+      </p:sp>
+      <p:sp>
+        <p:nvSpPr>
+          <p:cNvPr id="21" name="文本框 20">
+            <a:extLst>
+              <a:ext uri="{FF2B5EF4-FFF2-40B4-BE49-F238E27FC236}">
+                <a16:creationId xmlns:a16="http://schemas.microsoft.com/office/drawing/2014/main" id="{E7AEA65C-E032-44DA-9386-AC55516AF589}"/>
+              </a:ext>
+            </a:extLst>
+          </p:cNvPr>
+          <p:cNvSpPr txBox="1"/>
+          <p:nvPr/>
+        </p:nvSpPr>
+        <p:spPr>
+          <a:xfrm>
+            <a:off x="4266693" y="672961"/>
+            <a:ext cx="643125" cy="369332"/>
+          </a:xfrm>
+          <a:prstGeom prst="rect">
+            <a:avLst/>
+          </a:prstGeom>
+          <a:noFill/>
+        </p:spPr>
+        <p:txBody>
+          <a:bodyPr wrap="none" rtlCol="0">
+            <a:spAutoFit/>
+          </a:bodyPr>
+          <a:lstStyle/>
+          <a:p>
+            <a:r>
+              <a:rPr lang="en-US" altLang="zh-CN" dirty="0"/>
+              <a:t>valid</a:t>
+            </a:r>
+            <a:endParaRPr lang="zh-CN" altLang="en-US" dirty="0"/>
+          </a:p>
+        </p:txBody>
+      </p:sp>
+      <p:sp>
+        <p:nvSpPr>
+          <p:cNvPr id="22" name="文本框 21">
+            <a:extLst>
+              <a:ext uri="{FF2B5EF4-FFF2-40B4-BE49-F238E27FC236}">
+                <a16:creationId xmlns:a16="http://schemas.microsoft.com/office/drawing/2014/main" id="{0EAA1571-9682-471A-9F2B-1647EBDA4203}"/>
+              </a:ext>
+            </a:extLst>
+          </p:cNvPr>
+          <p:cNvSpPr txBox="1"/>
+          <p:nvPr/>
+        </p:nvSpPr>
+        <p:spPr>
+          <a:xfrm>
+            <a:off x="4088759" y="1064736"/>
+            <a:ext cx="821059" cy="369332"/>
+          </a:xfrm>
+          <a:prstGeom prst="rect">
+            <a:avLst/>
+          </a:prstGeom>
+          <a:noFill/>
+        </p:spPr>
+        <p:txBody>
+          <a:bodyPr wrap="none" rtlCol="0">
+            <a:spAutoFit/>
+          </a:bodyPr>
+          <a:lstStyle/>
+          <a:p>
+            <a:r>
+              <a:rPr lang="en-US" altLang="zh-CN" dirty="0"/>
+              <a:t>invalid</a:t>
+            </a:r>
+            <a:endParaRPr lang="zh-CN" altLang="en-US" dirty="0"/>
+          </a:p>
+        </p:txBody>
+      </p:sp>
+      <p:sp>
+        <p:nvSpPr>
+          <p:cNvPr id="23" name="文本框 22">
+            <a:extLst>
+              <a:ext uri="{FF2B5EF4-FFF2-40B4-BE49-F238E27FC236}">
+                <a16:creationId xmlns:a16="http://schemas.microsoft.com/office/drawing/2014/main" id="{5D4DEFC3-EAFC-448B-90B2-3873D0AD7037}"/>
+              </a:ext>
+            </a:extLst>
+          </p:cNvPr>
+          <p:cNvSpPr txBox="1"/>
+          <p:nvPr/>
+        </p:nvSpPr>
+        <p:spPr>
+          <a:xfrm>
+            <a:off x="4909818" y="1903923"/>
+            <a:ext cx="5880102" cy="369332"/>
+          </a:xfrm>
+          <a:prstGeom prst="rect">
+            <a:avLst/>
+          </a:prstGeom>
+          <a:noFill/>
+        </p:spPr>
+        <p:txBody>
+          <a:bodyPr wrap="square" rtlCol="0">
+            <a:spAutoFit/>
+          </a:bodyPr>
+          <a:lstStyle/>
+          <a:p>
+            <a:r>
+              <a:rPr lang="en-US" altLang="zh-CN" dirty="0"/>
+              <a:t>dx(0,200</a:t>
+            </a:r>
+            <a:r>
+              <a:rPr lang="zh-CN" altLang="en-US" dirty="0"/>
+              <a:t>→</a:t>
+            </a:r>
+            <a:r>
+              <a:rPr lang="en-US" altLang="zh-CN" dirty="0"/>
+              <a:t>0,1),dy (0,200</a:t>
+            </a:r>
+            <a:r>
+              <a:rPr lang="zh-CN" altLang="en-US" dirty="0"/>
+              <a:t>→</a:t>
+            </a:r>
+            <a:r>
+              <a:rPr lang="en-US" altLang="zh-CN" dirty="0"/>
+              <a:t>0,1),Δs (0,&gt;200</a:t>
+            </a:r>
+            <a:r>
+              <a:rPr lang="zh-CN" altLang="en-US" dirty="0"/>
+              <a:t>→</a:t>
+            </a:r>
+            <a:r>
+              <a:rPr lang="en-US" altLang="zh-CN" dirty="0"/>
+              <a:t>0,1),</a:t>
+            </a:r>
+            <a:endParaRPr lang="zh-CN" altLang="en-US" dirty="0"/>
+          </a:p>
+        </p:txBody>
+      </p:sp>
+      <p:sp>
+        <p:nvSpPr>
+          <p:cNvPr id="24" name="文本框 23">
+            <a:extLst>
+              <a:ext uri="{FF2B5EF4-FFF2-40B4-BE49-F238E27FC236}">
+                <a16:creationId xmlns:a16="http://schemas.microsoft.com/office/drawing/2014/main" id="{6DD91D78-2B44-488A-B271-B864D0E5C317}"/>
+              </a:ext>
+            </a:extLst>
+          </p:cNvPr>
+          <p:cNvSpPr txBox="1"/>
+          <p:nvPr/>
+        </p:nvSpPr>
+        <p:spPr>
+          <a:xfrm>
+            <a:off x="4266693" y="1892701"/>
+            <a:ext cx="643125" cy="369332"/>
+          </a:xfrm>
+          <a:prstGeom prst="rect">
+            <a:avLst/>
+          </a:prstGeom>
+          <a:noFill/>
+        </p:spPr>
+        <p:txBody>
+          <a:bodyPr wrap="none" rtlCol="0">
+            <a:spAutoFit/>
+          </a:bodyPr>
+          <a:lstStyle/>
+          <a:p>
+            <a:r>
+              <a:rPr lang="en-US" altLang="zh-CN" dirty="0"/>
+              <a:t>valid</a:t>
+            </a:r>
+            <a:endParaRPr lang="zh-CN" altLang="en-US" dirty="0"/>
+          </a:p>
+        </p:txBody>
+      </p:sp>
+      <p:sp>
+        <p:nvSpPr>
+          <p:cNvPr id="25" name="文本框 24">
+            <a:extLst>
+              <a:ext uri="{FF2B5EF4-FFF2-40B4-BE49-F238E27FC236}">
+                <a16:creationId xmlns:a16="http://schemas.microsoft.com/office/drawing/2014/main" id="{4C15A90A-2459-4046-9031-7DD6B5893A47}"/>
+              </a:ext>
+            </a:extLst>
+          </p:cNvPr>
+          <p:cNvSpPr txBox="1"/>
+          <p:nvPr/>
+        </p:nvSpPr>
+        <p:spPr>
+          <a:xfrm>
+            <a:off x="4088759" y="2284476"/>
+            <a:ext cx="821059" cy="369332"/>
+          </a:xfrm>
+          <a:prstGeom prst="rect">
+            <a:avLst/>
+          </a:prstGeom>
+          <a:noFill/>
+        </p:spPr>
+        <p:txBody>
+          <a:bodyPr wrap="none" rtlCol="0">
+            <a:spAutoFit/>
+          </a:bodyPr>
+          <a:lstStyle/>
+          <a:p>
+            <a:r>
+              <a:rPr lang="en-US" altLang="zh-CN" dirty="0"/>
+              <a:t>invalid</a:t>
+            </a:r>
+            <a:endParaRPr lang="zh-CN" altLang="en-US" dirty="0"/>
+          </a:p>
+        </p:txBody>
+      </p:sp>
+      <p:sp>
+        <p:nvSpPr>
+          <p:cNvPr id="26" name="文本框 25">
+            <a:extLst>
+              <a:ext uri="{FF2B5EF4-FFF2-40B4-BE49-F238E27FC236}">
+                <a16:creationId xmlns:a16="http://schemas.microsoft.com/office/drawing/2014/main" id="{008D24E6-1C4D-4905-BF00-3F8F67053238}"/>
+              </a:ext>
+            </a:extLst>
+          </p:cNvPr>
+          <p:cNvSpPr txBox="1"/>
+          <p:nvPr/>
+        </p:nvSpPr>
+        <p:spPr>
+          <a:xfrm>
+            <a:off x="4909818" y="2270525"/>
+            <a:ext cx="5880102" cy="369332"/>
+          </a:xfrm>
+          <a:prstGeom prst="rect">
+            <a:avLst/>
+          </a:prstGeom>
+          <a:noFill/>
+        </p:spPr>
+        <p:txBody>
+          <a:bodyPr wrap="square" rtlCol="0">
+            <a:spAutoFit/>
+          </a:bodyPr>
+          <a:lstStyle/>
+          <a:p>
+            <a:r>
+              <a:rPr lang="en-US" altLang="zh-CN" dirty="0"/>
+              <a:t>1</a:t>
+            </a:r>
+            <a:r>
+              <a:rPr lang="zh-CN" altLang="en-US" dirty="0"/>
+              <a:t>，</a:t>
+            </a:r>
+            <a:r>
+              <a:rPr lang="en-US" altLang="zh-CN" dirty="0"/>
+              <a:t>1</a:t>
+            </a:r>
+            <a:r>
+              <a:rPr lang="zh-CN" altLang="en-US" dirty="0"/>
+              <a:t>，</a:t>
+            </a:r>
+            <a:r>
+              <a:rPr lang="en-US" altLang="zh-CN" dirty="0"/>
+              <a:t>1</a:t>
+            </a:r>
+            <a:endParaRPr lang="zh-CN" altLang="en-US" dirty="0"/>
+          </a:p>
+        </p:txBody>
+      </p:sp>
+      <p:sp>
+        <p:nvSpPr>
+          <p:cNvPr id="27" name="文本框 26">
+            <a:extLst>
+              <a:ext uri="{FF2B5EF4-FFF2-40B4-BE49-F238E27FC236}">
+                <a16:creationId xmlns:a16="http://schemas.microsoft.com/office/drawing/2014/main" id="{132A1D5C-B872-4C7F-93C2-2944909C4CE6}"/>
+              </a:ext>
+            </a:extLst>
+          </p:cNvPr>
+          <p:cNvSpPr txBox="1"/>
+          <p:nvPr/>
+        </p:nvSpPr>
+        <p:spPr>
+          <a:xfrm>
+            <a:off x="12192000" y="1920561"/>
+            <a:ext cx="1090363" cy="369332"/>
+          </a:xfrm>
+          <a:prstGeom prst="rect">
+            <a:avLst/>
+          </a:prstGeom>
+          <a:noFill/>
+        </p:spPr>
+        <p:txBody>
+          <a:bodyPr wrap="none" rtlCol="0">
+            <a:spAutoFit/>
+          </a:bodyPr>
+          <a:lstStyle/>
+          <a:p>
+            <a:r>
+              <a:rPr lang="en-US" altLang="zh-CN" b="1" dirty="0">
+                <a:solidFill>
+                  <a:srgbClr val="FF0000"/>
+                </a:solidFill>
+              </a:rPr>
+              <a:t>3x80dim</a:t>
+            </a:r>
+            <a:endParaRPr lang="zh-CN" altLang="en-US" b="1" dirty="0">
+              <a:solidFill>
+                <a:srgbClr val="FF0000"/>
+              </a:solidFill>
+            </a:endParaRPr>
+          </a:p>
+        </p:txBody>
+      </p:sp>
+      <p:sp>
+        <p:nvSpPr>
+          <p:cNvPr id="28" name="文本框 27">
+            <a:extLst>
+              <a:ext uri="{FF2B5EF4-FFF2-40B4-BE49-F238E27FC236}">
+                <a16:creationId xmlns:a16="http://schemas.microsoft.com/office/drawing/2014/main" id="{E6E5464D-6FF8-409E-9BFD-C703EE59FABA}"/>
+              </a:ext>
+            </a:extLst>
+          </p:cNvPr>
+          <p:cNvSpPr txBox="1"/>
+          <p:nvPr/>
+        </p:nvSpPr>
+        <p:spPr>
+          <a:xfrm>
+            <a:off x="263888" y="3126063"/>
+            <a:ext cx="1446230" cy="369332"/>
+          </a:xfrm>
+          <a:prstGeom prst="rect">
+            <a:avLst/>
+          </a:prstGeom>
+          <a:noFill/>
+        </p:spPr>
+        <p:txBody>
+          <a:bodyPr wrap="none" rtlCol="0">
+            <a:spAutoFit/>
+          </a:bodyPr>
+          <a:lstStyle/>
+          <a:p>
+            <a:r>
+              <a:rPr lang="en-US" altLang="zh-CN" dirty="0" err="1"/>
+              <a:t>W_boundary</a:t>
+            </a:r>
+            <a:endParaRPr lang="zh-CN" altLang="en-US" dirty="0"/>
+          </a:p>
+        </p:txBody>
+      </p:sp>
+      <p:sp>
+        <p:nvSpPr>
+          <p:cNvPr id="29" name="文本框 28">
+            <a:extLst>
+              <a:ext uri="{FF2B5EF4-FFF2-40B4-BE49-F238E27FC236}">
+                <a16:creationId xmlns:a16="http://schemas.microsoft.com/office/drawing/2014/main" id="{5FD218AA-4A8D-4E55-9DE1-2FFD7F48358D}"/>
+              </a:ext>
+            </a:extLst>
+          </p:cNvPr>
+          <p:cNvSpPr txBox="1"/>
+          <p:nvPr/>
+        </p:nvSpPr>
+        <p:spPr>
+          <a:xfrm>
+            <a:off x="1751979" y="3126063"/>
+            <a:ext cx="741680" cy="369332"/>
+          </a:xfrm>
+          <a:prstGeom prst="rect">
+            <a:avLst/>
+          </a:prstGeom>
+          <a:noFill/>
+        </p:spPr>
+        <p:txBody>
+          <a:bodyPr wrap="square" rtlCol="0">
+            <a:spAutoFit/>
+          </a:bodyPr>
+          <a:lstStyle/>
+          <a:p>
+            <a:r>
+              <a:rPr lang="en-US" altLang="zh-CN" dirty="0"/>
+              <a:t>dx,dy</a:t>
+            </a:r>
+            <a:endParaRPr lang="zh-CN" altLang="en-US" dirty="0"/>
+          </a:p>
+        </p:txBody>
+      </p:sp>
+      <p:sp>
+        <p:nvSpPr>
+          <p:cNvPr id="30" name="文本框 29">
+            <a:extLst>
+              <a:ext uri="{FF2B5EF4-FFF2-40B4-BE49-F238E27FC236}">
+                <a16:creationId xmlns:a16="http://schemas.microsoft.com/office/drawing/2014/main" id="{8DD83864-6ACF-4BB5-8D37-0D67F7904171}"/>
+              </a:ext>
+            </a:extLst>
+          </p:cNvPr>
+          <p:cNvSpPr txBox="1"/>
+          <p:nvPr/>
+        </p:nvSpPr>
+        <p:spPr>
+          <a:xfrm>
+            <a:off x="4909818" y="3087505"/>
+            <a:ext cx="3446782" cy="369332"/>
+          </a:xfrm>
+          <a:prstGeom prst="rect">
+            <a:avLst/>
+          </a:prstGeom>
+          <a:noFill/>
+        </p:spPr>
+        <p:txBody>
+          <a:bodyPr wrap="square" rtlCol="0">
+            <a:spAutoFit/>
+          </a:bodyPr>
+          <a:lstStyle/>
+          <a:p>
+            <a:r>
+              <a:rPr lang="en-US" altLang="zh-CN" dirty="0"/>
+              <a:t>dx(0,200</a:t>
+            </a:r>
+            <a:r>
+              <a:rPr lang="zh-CN" altLang="en-US" dirty="0"/>
+              <a:t>→</a:t>
+            </a:r>
+            <a:r>
+              <a:rPr lang="en-US" altLang="zh-CN" dirty="0"/>
+              <a:t>0,1),dy (0,200</a:t>
+            </a:r>
+            <a:r>
+              <a:rPr lang="zh-CN" altLang="en-US" dirty="0"/>
+              <a:t>→</a:t>
+            </a:r>
+            <a:r>
+              <a:rPr lang="en-US" altLang="zh-CN" dirty="0"/>
+              <a:t>0,1)</a:t>
+            </a:r>
+            <a:endParaRPr lang="zh-CN" altLang="en-US" dirty="0"/>
+          </a:p>
+        </p:txBody>
+      </p:sp>
+      <p:sp>
+        <p:nvSpPr>
+          <p:cNvPr id="31" name="文本框 30">
+            <a:extLst>
+              <a:ext uri="{FF2B5EF4-FFF2-40B4-BE49-F238E27FC236}">
+                <a16:creationId xmlns:a16="http://schemas.microsoft.com/office/drawing/2014/main" id="{E8B984C8-78DF-4861-885B-04544887EEA2}"/>
+              </a:ext>
+            </a:extLst>
+          </p:cNvPr>
+          <p:cNvSpPr txBox="1"/>
+          <p:nvPr/>
+        </p:nvSpPr>
+        <p:spPr>
+          <a:xfrm>
+            <a:off x="4266693" y="3076283"/>
+            <a:ext cx="643125" cy="369332"/>
+          </a:xfrm>
+          <a:prstGeom prst="rect">
+            <a:avLst/>
+          </a:prstGeom>
+          <a:noFill/>
+        </p:spPr>
+        <p:txBody>
+          <a:bodyPr wrap="none" rtlCol="0">
+            <a:spAutoFit/>
+          </a:bodyPr>
+          <a:lstStyle/>
+          <a:p>
+            <a:r>
+              <a:rPr lang="en-US" altLang="zh-CN" dirty="0"/>
+              <a:t>valid</a:t>
+            </a:r>
+            <a:endParaRPr lang="zh-CN" altLang="en-US" dirty="0"/>
+          </a:p>
+        </p:txBody>
+      </p:sp>
+      <p:sp>
+        <p:nvSpPr>
+          <p:cNvPr id="32" name="文本框 31">
+            <a:extLst>
+              <a:ext uri="{FF2B5EF4-FFF2-40B4-BE49-F238E27FC236}">
+                <a16:creationId xmlns:a16="http://schemas.microsoft.com/office/drawing/2014/main" id="{D3FBA317-1C1D-484E-B2DF-B6092E146420}"/>
+              </a:ext>
+            </a:extLst>
+          </p:cNvPr>
+          <p:cNvSpPr txBox="1"/>
+          <p:nvPr/>
+        </p:nvSpPr>
+        <p:spPr>
+          <a:xfrm>
+            <a:off x="4088759" y="3440156"/>
+            <a:ext cx="821059" cy="369332"/>
+          </a:xfrm>
+          <a:prstGeom prst="rect">
+            <a:avLst/>
+          </a:prstGeom>
+          <a:noFill/>
+        </p:spPr>
+        <p:txBody>
+          <a:bodyPr wrap="none" rtlCol="0">
+            <a:spAutoFit/>
+          </a:bodyPr>
+          <a:lstStyle/>
+          <a:p>
+            <a:r>
+              <a:rPr lang="en-US" altLang="zh-CN" dirty="0"/>
+              <a:t>invalid</a:t>
+            </a:r>
+            <a:endParaRPr lang="zh-CN" altLang="en-US" dirty="0"/>
+          </a:p>
+        </p:txBody>
+      </p:sp>
+      <p:sp>
+        <p:nvSpPr>
+          <p:cNvPr id="33" name="文本框 32">
+            <a:extLst>
+              <a:ext uri="{FF2B5EF4-FFF2-40B4-BE49-F238E27FC236}">
+                <a16:creationId xmlns:a16="http://schemas.microsoft.com/office/drawing/2014/main" id="{B6DEB979-F60B-44A6-801C-DCF6B5567AFF}"/>
+              </a:ext>
+            </a:extLst>
+          </p:cNvPr>
+          <p:cNvSpPr txBox="1"/>
+          <p:nvPr/>
+        </p:nvSpPr>
+        <p:spPr>
+          <a:xfrm>
+            <a:off x="4909818" y="3426205"/>
+            <a:ext cx="3121662" cy="369332"/>
+          </a:xfrm>
+          <a:prstGeom prst="rect">
+            <a:avLst/>
+          </a:prstGeom>
+          <a:noFill/>
+        </p:spPr>
+        <p:txBody>
+          <a:bodyPr wrap="square" rtlCol="0">
+            <a:spAutoFit/>
+          </a:bodyPr>
+          <a:lstStyle/>
+          <a:p>
+            <a:r>
+              <a:rPr lang="en-US" altLang="zh-CN" dirty="0"/>
+              <a:t>1</a:t>
+            </a:r>
+            <a:r>
+              <a:rPr lang="zh-CN" altLang="en-US" dirty="0"/>
+              <a:t>，</a:t>
+            </a:r>
+            <a:r>
+              <a:rPr lang="en-US" altLang="zh-CN" dirty="0"/>
+              <a:t>1</a:t>
+            </a:r>
+            <a:endParaRPr lang="zh-CN" altLang="en-US" dirty="0"/>
+          </a:p>
+        </p:txBody>
+      </p:sp>
+      <p:sp>
+        <p:nvSpPr>
+          <p:cNvPr id="35" name="文本框 34">
+            <a:extLst>
+              <a:ext uri="{FF2B5EF4-FFF2-40B4-BE49-F238E27FC236}">
+                <a16:creationId xmlns:a16="http://schemas.microsoft.com/office/drawing/2014/main" id="{186FFBB7-E57E-4561-9048-C489B6A40CB7}"/>
+              </a:ext>
+            </a:extLst>
+          </p:cNvPr>
+          <p:cNvSpPr txBox="1"/>
+          <p:nvPr/>
+        </p:nvSpPr>
+        <p:spPr>
+          <a:xfrm>
+            <a:off x="932041" y="2262033"/>
+            <a:ext cx="2903359" cy="369332"/>
+          </a:xfrm>
+          <a:prstGeom prst="rect">
+            <a:avLst/>
+          </a:prstGeom>
+          <a:noFill/>
+        </p:spPr>
+        <p:txBody>
+          <a:bodyPr wrap="none" rtlCol="0">
+            <a:spAutoFit/>
+          </a:bodyPr>
+          <a:lstStyle/>
+          <a:p>
+            <a:r>
+              <a:rPr lang="zh-CN" altLang="en-US" dirty="0"/>
+              <a:t>对于没有在</a:t>
+            </a:r>
+            <a:r>
+              <a:rPr lang="en-US" altLang="zh-CN" dirty="0"/>
+              <a:t>goal</a:t>
+            </a:r>
+            <a:r>
+              <a:rPr lang="zh-CN" altLang="en-US" dirty="0"/>
+              <a:t>上的</a:t>
+            </a:r>
+            <a:r>
+              <a:rPr lang="en-US" altLang="zh-CN" dirty="0"/>
+              <a:t>w_lane</a:t>
+            </a:r>
+            <a:endParaRPr lang="zh-CN" altLang="en-US" dirty="0"/>
+          </a:p>
+        </p:txBody>
+      </p:sp>
+      <p:sp>
+        <p:nvSpPr>
+          <p:cNvPr id="36" name="文本框 35">
+            <a:extLst>
+              <a:ext uri="{FF2B5EF4-FFF2-40B4-BE49-F238E27FC236}">
+                <a16:creationId xmlns:a16="http://schemas.microsoft.com/office/drawing/2014/main" id="{42643F60-EE74-4060-A981-6B6B304499AC}"/>
+              </a:ext>
+            </a:extLst>
+          </p:cNvPr>
+          <p:cNvSpPr txBox="1"/>
+          <p:nvPr/>
+        </p:nvSpPr>
+        <p:spPr>
+          <a:xfrm>
+            <a:off x="932040" y="2625224"/>
+            <a:ext cx="2903359" cy="369332"/>
+          </a:xfrm>
+          <a:prstGeom prst="rect">
+            <a:avLst/>
+          </a:prstGeom>
+          <a:noFill/>
+        </p:spPr>
+        <p:txBody>
+          <a:bodyPr wrap="square" rtlCol="0">
+            <a:spAutoFit/>
+          </a:bodyPr>
+          <a:lstStyle/>
+          <a:p>
+            <a:r>
+              <a:rPr lang="zh-CN" altLang="en-US" dirty="0"/>
+              <a:t>全部填充</a:t>
+            </a:r>
+            <a:r>
+              <a:rPr lang="en-US" altLang="zh-CN" dirty="0"/>
+              <a:t>INF</a:t>
+            </a:r>
+            <a:r>
+              <a:rPr lang="zh-CN" altLang="en-US" dirty="0"/>
+              <a:t>（</a:t>
+            </a:r>
+            <a:r>
+              <a:rPr lang="en-US" altLang="zh-CN" dirty="0"/>
+              <a:t>1</a:t>
+            </a:r>
+            <a:r>
+              <a:rPr lang="zh-CN" altLang="en-US" dirty="0"/>
+              <a:t>）</a:t>
+            </a:r>
+          </a:p>
+        </p:txBody>
+      </p:sp>
+      <p:sp>
+        <p:nvSpPr>
+          <p:cNvPr id="41" name="文本框 40">
+            <a:extLst>
+              <a:ext uri="{FF2B5EF4-FFF2-40B4-BE49-F238E27FC236}">
+                <a16:creationId xmlns:a16="http://schemas.microsoft.com/office/drawing/2014/main" id="{A8594424-49B8-4E46-AA9C-42294DA0B8BB}"/>
+              </a:ext>
+            </a:extLst>
+          </p:cNvPr>
+          <p:cNvSpPr txBox="1"/>
+          <p:nvPr/>
+        </p:nvSpPr>
+        <p:spPr>
+          <a:xfrm>
+            <a:off x="263888" y="3870490"/>
+            <a:ext cx="1087157" cy="369332"/>
+          </a:xfrm>
+          <a:prstGeom prst="rect">
+            <a:avLst/>
+          </a:prstGeom>
+          <a:noFill/>
+        </p:spPr>
+        <p:txBody>
+          <a:bodyPr wrap="none" rtlCol="0">
+            <a:spAutoFit/>
+          </a:bodyPr>
+          <a:lstStyle/>
+          <a:p>
+            <a:r>
+              <a:rPr lang="en-US" altLang="zh-CN" dirty="0" err="1"/>
+              <a:t>Stop_line</a:t>
+            </a:r>
+            <a:endParaRPr lang="zh-CN" altLang="en-US" dirty="0"/>
+          </a:p>
+        </p:txBody>
+      </p:sp>
+      <p:sp>
+        <p:nvSpPr>
+          <p:cNvPr id="42" name="文本框 41">
+            <a:extLst>
+              <a:ext uri="{FF2B5EF4-FFF2-40B4-BE49-F238E27FC236}">
+                <a16:creationId xmlns:a16="http://schemas.microsoft.com/office/drawing/2014/main" id="{8E82318C-6CCF-4916-AA9D-9976D49DB912}"/>
+              </a:ext>
+            </a:extLst>
+          </p:cNvPr>
+          <p:cNvSpPr txBox="1"/>
+          <p:nvPr/>
+        </p:nvSpPr>
+        <p:spPr>
+          <a:xfrm>
+            <a:off x="1751978" y="3870490"/>
+            <a:ext cx="1296021" cy="369332"/>
+          </a:xfrm>
+          <a:prstGeom prst="rect">
+            <a:avLst/>
+          </a:prstGeom>
+          <a:noFill/>
+        </p:spPr>
+        <p:txBody>
+          <a:bodyPr wrap="square" rtlCol="0">
+            <a:spAutoFit/>
+          </a:bodyPr>
+          <a:lstStyle/>
+          <a:p>
+            <a:r>
+              <a:rPr lang="en-US" altLang="zh-CN" dirty="0"/>
+              <a:t>dx,dy</a:t>
+            </a:r>
+            <a:endParaRPr lang="zh-CN" altLang="en-US" dirty="0"/>
+          </a:p>
+        </p:txBody>
+      </p:sp>
+      <p:sp>
+        <p:nvSpPr>
+          <p:cNvPr id="43" name="文本框 42">
+            <a:extLst>
+              <a:ext uri="{FF2B5EF4-FFF2-40B4-BE49-F238E27FC236}">
+                <a16:creationId xmlns:a16="http://schemas.microsoft.com/office/drawing/2014/main" id="{292852F3-07DD-4766-A1C6-4AF9A039CED7}"/>
+              </a:ext>
+            </a:extLst>
+          </p:cNvPr>
+          <p:cNvSpPr txBox="1"/>
+          <p:nvPr/>
+        </p:nvSpPr>
+        <p:spPr>
+          <a:xfrm>
+            <a:off x="4909818" y="3879312"/>
+            <a:ext cx="3446782" cy="369332"/>
+          </a:xfrm>
+          <a:prstGeom prst="rect">
+            <a:avLst/>
+          </a:prstGeom>
+          <a:noFill/>
+        </p:spPr>
+        <p:txBody>
+          <a:bodyPr wrap="square" rtlCol="0">
+            <a:spAutoFit/>
+          </a:bodyPr>
+          <a:lstStyle/>
+          <a:p>
+            <a:r>
+              <a:rPr lang="en-US" altLang="zh-CN" dirty="0"/>
+              <a:t>dx(0,200</a:t>
+            </a:r>
+            <a:r>
+              <a:rPr lang="zh-CN" altLang="en-US" dirty="0"/>
+              <a:t>→</a:t>
+            </a:r>
+            <a:r>
+              <a:rPr lang="en-US" altLang="zh-CN" dirty="0"/>
+              <a:t>0,1),dy (0,200</a:t>
+            </a:r>
+            <a:r>
+              <a:rPr lang="zh-CN" altLang="en-US" dirty="0"/>
+              <a:t>→</a:t>
+            </a:r>
+            <a:r>
+              <a:rPr lang="en-US" altLang="zh-CN" dirty="0"/>
+              <a:t>0,1)</a:t>
+            </a:r>
+            <a:endParaRPr lang="zh-CN" altLang="en-US" dirty="0"/>
+          </a:p>
+        </p:txBody>
+      </p:sp>
+      <p:sp>
+        <p:nvSpPr>
+          <p:cNvPr id="44" name="文本框 43">
+            <a:extLst>
+              <a:ext uri="{FF2B5EF4-FFF2-40B4-BE49-F238E27FC236}">
+                <a16:creationId xmlns:a16="http://schemas.microsoft.com/office/drawing/2014/main" id="{50FC3072-1966-453F-A442-8BDFAA6CFC21}"/>
+              </a:ext>
+            </a:extLst>
+          </p:cNvPr>
+          <p:cNvSpPr txBox="1"/>
+          <p:nvPr/>
+        </p:nvSpPr>
+        <p:spPr>
+          <a:xfrm>
+            <a:off x="4266693" y="3868090"/>
+            <a:ext cx="643125" cy="369332"/>
+          </a:xfrm>
+          <a:prstGeom prst="rect">
+            <a:avLst/>
+          </a:prstGeom>
+          <a:noFill/>
+        </p:spPr>
+        <p:txBody>
+          <a:bodyPr wrap="none" rtlCol="0">
+            <a:spAutoFit/>
+          </a:bodyPr>
+          <a:lstStyle/>
+          <a:p>
+            <a:r>
+              <a:rPr lang="en-US" altLang="zh-CN" dirty="0"/>
+              <a:t>valid</a:t>
+            </a:r>
+            <a:endParaRPr lang="zh-CN" altLang="en-US" dirty="0"/>
+          </a:p>
+        </p:txBody>
+      </p:sp>
+      <p:sp>
+        <p:nvSpPr>
+          <p:cNvPr id="45" name="文本框 44">
+            <a:extLst>
+              <a:ext uri="{FF2B5EF4-FFF2-40B4-BE49-F238E27FC236}">
+                <a16:creationId xmlns:a16="http://schemas.microsoft.com/office/drawing/2014/main" id="{64ADD676-CC75-4DFA-8CCD-D82A9F9E2E11}"/>
+              </a:ext>
+            </a:extLst>
+          </p:cNvPr>
+          <p:cNvSpPr txBox="1"/>
+          <p:nvPr/>
+        </p:nvSpPr>
+        <p:spPr>
+          <a:xfrm>
+            <a:off x="4088759" y="4231963"/>
+            <a:ext cx="821059" cy="369332"/>
+          </a:xfrm>
+          <a:prstGeom prst="rect">
+            <a:avLst/>
+          </a:prstGeom>
+          <a:noFill/>
+        </p:spPr>
+        <p:txBody>
+          <a:bodyPr wrap="none" rtlCol="0">
+            <a:spAutoFit/>
+          </a:bodyPr>
+          <a:lstStyle/>
+          <a:p>
+            <a:r>
+              <a:rPr lang="en-US" altLang="zh-CN" dirty="0"/>
+              <a:t>invalid</a:t>
+            </a:r>
+            <a:endParaRPr lang="zh-CN" altLang="en-US" dirty="0"/>
+          </a:p>
+        </p:txBody>
+      </p:sp>
+      <p:sp>
+        <p:nvSpPr>
+          <p:cNvPr id="46" name="文本框 45">
+            <a:extLst>
+              <a:ext uri="{FF2B5EF4-FFF2-40B4-BE49-F238E27FC236}">
+                <a16:creationId xmlns:a16="http://schemas.microsoft.com/office/drawing/2014/main" id="{D5294CDC-F591-4550-8E37-D215C373DDEB}"/>
+              </a:ext>
+            </a:extLst>
+          </p:cNvPr>
+          <p:cNvSpPr txBox="1"/>
+          <p:nvPr/>
+        </p:nvSpPr>
+        <p:spPr>
+          <a:xfrm>
+            <a:off x="4909818" y="4218012"/>
+            <a:ext cx="3121662" cy="369332"/>
+          </a:xfrm>
+          <a:prstGeom prst="rect">
+            <a:avLst/>
+          </a:prstGeom>
+          <a:noFill/>
+        </p:spPr>
+        <p:txBody>
+          <a:bodyPr wrap="square" rtlCol="0">
+            <a:spAutoFit/>
+          </a:bodyPr>
+          <a:lstStyle/>
+          <a:p>
+            <a:r>
+              <a:rPr lang="en-US" altLang="zh-CN" dirty="0"/>
+              <a:t>1</a:t>
+            </a:r>
+            <a:r>
+              <a:rPr lang="zh-CN" altLang="en-US" dirty="0"/>
+              <a:t>，</a:t>
+            </a:r>
+            <a:r>
+              <a:rPr lang="en-US" altLang="zh-CN" dirty="0"/>
+              <a:t>1</a:t>
+            </a:r>
+            <a:endParaRPr lang="zh-CN" altLang="en-US" dirty="0"/>
+          </a:p>
+        </p:txBody>
+      </p:sp>
+      <p:sp>
+        <p:nvSpPr>
+          <p:cNvPr id="47" name="文本框 46">
+            <a:extLst>
+              <a:ext uri="{FF2B5EF4-FFF2-40B4-BE49-F238E27FC236}">
+                <a16:creationId xmlns:a16="http://schemas.microsoft.com/office/drawing/2014/main" id="{3225CF32-A4CE-48CF-811B-C69A16AA2EE2}"/>
+              </a:ext>
+            </a:extLst>
+          </p:cNvPr>
+          <p:cNvSpPr txBox="1"/>
+          <p:nvPr/>
+        </p:nvSpPr>
+        <p:spPr>
+          <a:xfrm>
+            <a:off x="12192000" y="3056873"/>
+            <a:ext cx="1090363" cy="369332"/>
+          </a:xfrm>
+          <a:prstGeom prst="rect">
+            <a:avLst/>
+          </a:prstGeom>
+          <a:noFill/>
+        </p:spPr>
+        <p:txBody>
+          <a:bodyPr wrap="none" rtlCol="0">
+            <a:spAutoFit/>
+          </a:bodyPr>
+          <a:lstStyle/>
+          <a:p>
+            <a:r>
+              <a:rPr lang="en-US" altLang="zh-CN" b="1" dirty="0">
+                <a:solidFill>
+                  <a:srgbClr val="FF0000"/>
+                </a:solidFill>
+              </a:rPr>
+              <a:t>2x80dim</a:t>
+            </a:r>
+            <a:endParaRPr lang="zh-CN" altLang="en-US" b="1" dirty="0">
+              <a:solidFill>
+                <a:srgbClr val="FF0000"/>
+              </a:solidFill>
+            </a:endParaRPr>
+          </a:p>
+        </p:txBody>
+      </p:sp>
+      <p:sp>
+        <p:nvSpPr>
+          <p:cNvPr id="48" name="文本框 47">
+            <a:extLst>
+              <a:ext uri="{FF2B5EF4-FFF2-40B4-BE49-F238E27FC236}">
+                <a16:creationId xmlns:a16="http://schemas.microsoft.com/office/drawing/2014/main" id="{579B3279-EF15-49E6-AE1B-CC1DC5534862}"/>
+              </a:ext>
+            </a:extLst>
+          </p:cNvPr>
+          <p:cNvSpPr txBox="1"/>
+          <p:nvPr/>
+        </p:nvSpPr>
+        <p:spPr>
+          <a:xfrm>
+            <a:off x="12192000" y="3869651"/>
+            <a:ext cx="1090363" cy="369332"/>
+          </a:xfrm>
+          <a:prstGeom prst="rect">
+            <a:avLst/>
+          </a:prstGeom>
+          <a:noFill/>
+        </p:spPr>
+        <p:txBody>
+          <a:bodyPr wrap="none" rtlCol="0">
+            <a:spAutoFit/>
+          </a:bodyPr>
+          <a:lstStyle/>
+          <a:p>
+            <a:r>
+              <a:rPr lang="en-US" altLang="zh-CN" b="1" dirty="0">
+                <a:solidFill>
+                  <a:srgbClr val="FF0000"/>
+                </a:solidFill>
+              </a:rPr>
+              <a:t>2x10dim</a:t>
+            </a:r>
+            <a:endParaRPr lang="zh-CN" altLang="en-US" b="1" dirty="0">
+              <a:solidFill>
+                <a:srgbClr val="FF0000"/>
+              </a:solidFill>
+            </a:endParaRPr>
+          </a:p>
+        </p:txBody>
+      </p:sp>
+      <p:sp>
+        <p:nvSpPr>
+          <p:cNvPr id="49" name="文本框 48">
+            <a:extLst>
+              <a:ext uri="{FF2B5EF4-FFF2-40B4-BE49-F238E27FC236}">
+                <a16:creationId xmlns:a16="http://schemas.microsoft.com/office/drawing/2014/main" id="{B9EB623E-ABBC-40C0-A7FD-0B7083ECCCE6}"/>
+              </a:ext>
+            </a:extLst>
+          </p:cNvPr>
+          <p:cNvSpPr txBox="1"/>
+          <p:nvPr/>
+        </p:nvSpPr>
+        <p:spPr>
+          <a:xfrm>
+            <a:off x="508912" y="4931090"/>
+            <a:ext cx="734496" cy="369332"/>
+          </a:xfrm>
+          <a:prstGeom prst="rect">
+            <a:avLst/>
+          </a:prstGeom>
+          <a:noFill/>
+        </p:spPr>
+        <p:txBody>
+          <a:bodyPr wrap="none" rtlCol="0">
+            <a:spAutoFit/>
+          </a:bodyPr>
+          <a:lstStyle/>
+          <a:p>
+            <a:r>
+              <a:rPr lang="en-US" altLang="zh-CN" dirty="0"/>
+              <a:t>Goals</a:t>
+            </a:r>
+            <a:endParaRPr lang="zh-CN" altLang="en-US" dirty="0"/>
+          </a:p>
+        </p:txBody>
+      </p:sp>
+      <p:sp>
+        <p:nvSpPr>
+          <p:cNvPr id="50" name="文本框 49">
+            <a:extLst>
+              <a:ext uri="{FF2B5EF4-FFF2-40B4-BE49-F238E27FC236}">
+                <a16:creationId xmlns:a16="http://schemas.microsoft.com/office/drawing/2014/main" id="{997DFBF1-BECA-4514-8886-DC00E9980F45}"/>
+              </a:ext>
+            </a:extLst>
+          </p:cNvPr>
+          <p:cNvSpPr txBox="1"/>
+          <p:nvPr/>
+        </p:nvSpPr>
+        <p:spPr>
+          <a:xfrm>
+            <a:off x="1751978" y="4931090"/>
+            <a:ext cx="1296021" cy="369332"/>
+          </a:xfrm>
+          <a:prstGeom prst="rect">
+            <a:avLst/>
+          </a:prstGeom>
+          <a:noFill/>
+        </p:spPr>
+        <p:txBody>
+          <a:bodyPr wrap="square" rtlCol="0">
+            <a:spAutoFit/>
+          </a:bodyPr>
+          <a:lstStyle/>
+          <a:p>
+            <a:r>
+              <a:rPr lang="en-US" altLang="zh-CN" dirty="0"/>
+              <a:t>dx,dy</a:t>
+            </a:r>
+            <a:endParaRPr lang="zh-CN" altLang="en-US" dirty="0"/>
+          </a:p>
+        </p:txBody>
+      </p:sp>
+      <p:sp>
+        <p:nvSpPr>
+          <p:cNvPr id="51" name="文本框 50">
+            <a:extLst>
+              <a:ext uri="{FF2B5EF4-FFF2-40B4-BE49-F238E27FC236}">
+                <a16:creationId xmlns:a16="http://schemas.microsoft.com/office/drawing/2014/main" id="{59331745-1D65-43A1-AB90-6D77445BA8ED}"/>
+              </a:ext>
+            </a:extLst>
+          </p:cNvPr>
+          <p:cNvSpPr txBox="1"/>
+          <p:nvPr/>
+        </p:nvSpPr>
+        <p:spPr>
+          <a:xfrm>
+            <a:off x="4909818" y="4965168"/>
+            <a:ext cx="3446782" cy="369332"/>
+          </a:xfrm>
+          <a:prstGeom prst="rect">
+            <a:avLst/>
+          </a:prstGeom>
+          <a:noFill/>
+        </p:spPr>
+        <p:txBody>
+          <a:bodyPr wrap="square" rtlCol="0">
+            <a:spAutoFit/>
+          </a:bodyPr>
+          <a:lstStyle/>
+          <a:p>
+            <a:r>
+              <a:rPr lang="en-US" altLang="zh-CN" dirty="0"/>
+              <a:t>dx(0,200</a:t>
+            </a:r>
+            <a:r>
+              <a:rPr lang="zh-CN" altLang="en-US" dirty="0"/>
+              <a:t>→</a:t>
+            </a:r>
+            <a:r>
+              <a:rPr lang="en-US" altLang="zh-CN" dirty="0"/>
+              <a:t>0,1),dy (0,200</a:t>
+            </a:r>
+            <a:r>
+              <a:rPr lang="zh-CN" altLang="en-US" dirty="0"/>
+              <a:t>→</a:t>
+            </a:r>
+            <a:r>
+              <a:rPr lang="en-US" altLang="zh-CN" dirty="0"/>
+              <a:t>0,1)</a:t>
+            </a:r>
+            <a:endParaRPr lang="zh-CN" altLang="en-US" dirty="0"/>
+          </a:p>
+        </p:txBody>
+      </p:sp>
+      <p:sp>
+        <p:nvSpPr>
+          <p:cNvPr id="52" name="文本框 51">
+            <a:extLst>
+              <a:ext uri="{FF2B5EF4-FFF2-40B4-BE49-F238E27FC236}">
+                <a16:creationId xmlns:a16="http://schemas.microsoft.com/office/drawing/2014/main" id="{C4F11DF5-33CC-4056-A1F8-2AB4C1C4DA8A}"/>
+              </a:ext>
+            </a:extLst>
+          </p:cNvPr>
+          <p:cNvSpPr txBox="1"/>
+          <p:nvPr/>
+        </p:nvSpPr>
+        <p:spPr>
+          <a:xfrm>
+            <a:off x="4266693" y="4953946"/>
+            <a:ext cx="643125" cy="369332"/>
+          </a:xfrm>
+          <a:prstGeom prst="rect">
+            <a:avLst/>
+          </a:prstGeom>
+          <a:noFill/>
+        </p:spPr>
+        <p:txBody>
+          <a:bodyPr wrap="none" rtlCol="0">
+            <a:spAutoFit/>
+          </a:bodyPr>
+          <a:lstStyle/>
+          <a:p>
+            <a:r>
+              <a:rPr lang="en-US" altLang="zh-CN" dirty="0"/>
+              <a:t>valid</a:t>
+            </a:r>
+            <a:endParaRPr lang="zh-CN" altLang="en-US" dirty="0"/>
+          </a:p>
+        </p:txBody>
+      </p:sp>
+      <p:sp>
+        <p:nvSpPr>
+          <p:cNvPr id="53" name="文本框 52">
+            <a:extLst>
+              <a:ext uri="{FF2B5EF4-FFF2-40B4-BE49-F238E27FC236}">
+                <a16:creationId xmlns:a16="http://schemas.microsoft.com/office/drawing/2014/main" id="{5467CE18-A1FC-4D94-9446-2D79CC319A90}"/>
+              </a:ext>
+            </a:extLst>
+          </p:cNvPr>
+          <p:cNvSpPr txBox="1"/>
+          <p:nvPr/>
+        </p:nvSpPr>
+        <p:spPr>
+          <a:xfrm>
+            <a:off x="4088759" y="5317819"/>
+            <a:ext cx="821059" cy="369332"/>
+          </a:xfrm>
+          <a:prstGeom prst="rect">
+            <a:avLst/>
+          </a:prstGeom>
+          <a:noFill/>
+        </p:spPr>
+        <p:txBody>
+          <a:bodyPr wrap="none" rtlCol="0">
+            <a:spAutoFit/>
+          </a:bodyPr>
+          <a:lstStyle/>
+          <a:p>
+            <a:r>
+              <a:rPr lang="en-US" altLang="zh-CN" dirty="0"/>
+              <a:t>invalid</a:t>
+            </a:r>
+            <a:endParaRPr lang="zh-CN" altLang="en-US" dirty="0"/>
+          </a:p>
+        </p:txBody>
+      </p:sp>
+      <p:sp>
+        <p:nvSpPr>
+          <p:cNvPr id="54" name="文本框 53">
+            <a:extLst>
+              <a:ext uri="{FF2B5EF4-FFF2-40B4-BE49-F238E27FC236}">
+                <a16:creationId xmlns:a16="http://schemas.microsoft.com/office/drawing/2014/main" id="{D490FE40-11E5-43AA-A585-AED0F5DAC4B1}"/>
+              </a:ext>
+            </a:extLst>
+          </p:cNvPr>
+          <p:cNvSpPr txBox="1"/>
+          <p:nvPr/>
+        </p:nvSpPr>
+        <p:spPr>
+          <a:xfrm>
+            <a:off x="4909818" y="5303868"/>
+            <a:ext cx="3121662" cy="369332"/>
+          </a:xfrm>
+          <a:prstGeom prst="rect">
+            <a:avLst/>
+          </a:prstGeom>
+          <a:noFill/>
+        </p:spPr>
+        <p:txBody>
+          <a:bodyPr wrap="square" rtlCol="0">
+            <a:spAutoFit/>
+          </a:bodyPr>
+          <a:lstStyle/>
+          <a:p>
+            <a:r>
+              <a:rPr lang="en-US" altLang="zh-CN" dirty="0"/>
+              <a:t>1</a:t>
+            </a:r>
+            <a:r>
+              <a:rPr lang="zh-CN" altLang="en-US" dirty="0"/>
+              <a:t>，</a:t>
+            </a:r>
+            <a:r>
+              <a:rPr lang="en-US" altLang="zh-CN" dirty="0"/>
+              <a:t>1</a:t>
+            </a:r>
+            <a:endParaRPr lang="zh-CN" altLang="en-US" dirty="0"/>
+          </a:p>
+        </p:txBody>
+      </p:sp>
+      <p:sp>
+        <p:nvSpPr>
+          <p:cNvPr id="55" name="文本框 54">
+            <a:extLst>
+              <a:ext uri="{FF2B5EF4-FFF2-40B4-BE49-F238E27FC236}">
+                <a16:creationId xmlns:a16="http://schemas.microsoft.com/office/drawing/2014/main" id="{D352B2C8-5AA4-4B4C-B94B-CA12D54B7639}"/>
+              </a:ext>
+            </a:extLst>
+          </p:cNvPr>
+          <p:cNvSpPr txBox="1"/>
+          <p:nvPr/>
+        </p:nvSpPr>
+        <p:spPr>
+          <a:xfrm>
+            <a:off x="12192000" y="4931090"/>
+            <a:ext cx="1218603" cy="369332"/>
+          </a:xfrm>
+          <a:prstGeom prst="rect">
+            <a:avLst/>
+          </a:prstGeom>
+          <a:noFill/>
+        </p:spPr>
+        <p:txBody>
+          <a:bodyPr wrap="none" rtlCol="0">
+            <a:spAutoFit/>
+          </a:bodyPr>
+          <a:lstStyle/>
+          <a:p>
+            <a:r>
+              <a:rPr lang="en-US" altLang="zh-CN" b="1" dirty="0">
+                <a:solidFill>
+                  <a:srgbClr val="FF0000"/>
+                </a:solidFill>
+              </a:rPr>
+              <a:t>128x2dim</a:t>
+            </a:r>
+            <a:endParaRPr lang="zh-CN" altLang="en-US" b="1" dirty="0">
+              <a:solidFill>
+                <a:srgbClr val="FF0000"/>
+              </a:solidFill>
+            </a:endParaRPr>
+          </a:p>
+        </p:txBody>
+      </p:sp>
+      <p:sp>
+        <p:nvSpPr>
+          <p:cNvPr id="56" name="文本框 55">
+            <a:extLst>
+              <a:ext uri="{FF2B5EF4-FFF2-40B4-BE49-F238E27FC236}">
+                <a16:creationId xmlns:a16="http://schemas.microsoft.com/office/drawing/2014/main" id="{AD6A6FB8-50B0-40CE-BC2A-C67479B54F4B}"/>
+              </a:ext>
+            </a:extLst>
+          </p:cNvPr>
+          <p:cNvSpPr txBox="1"/>
+          <p:nvPr/>
+        </p:nvSpPr>
+        <p:spPr>
+          <a:xfrm>
+            <a:off x="100382" y="5687151"/>
+            <a:ext cx="1250663" cy="369332"/>
+          </a:xfrm>
+          <a:prstGeom prst="rect">
+            <a:avLst/>
+          </a:prstGeom>
+          <a:noFill/>
+        </p:spPr>
+        <p:txBody>
+          <a:bodyPr wrap="none" rtlCol="0">
+            <a:spAutoFit/>
+          </a:bodyPr>
+          <a:lstStyle/>
+          <a:p>
+            <a:r>
+              <a:rPr lang="en-US" altLang="zh-CN" dirty="0"/>
+              <a:t>Conditions</a:t>
+            </a:r>
+            <a:endParaRPr lang="zh-CN" altLang="en-US" dirty="0"/>
+          </a:p>
+        </p:txBody>
+      </p:sp>
+      <p:sp>
+        <p:nvSpPr>
+          <p:cNvPr id="57" name="文本框 56">
+            <a:extLst>
+              <a:ext uri="{FF2B5EF4-FFF2-40B4-BE49-F238E27FC236}">
+                <a16:creationId xmlns:a16="http://schemas.microsoft.com/office/drawing/2014/main" id="{AEB9CFAE-E923-4DB1-8005-EE40E29B07C2}"/>
+              </a:ext>
+            </a:extLst>
+          </p:cNvPr>
+          <p:cNvSpPr txBox="1"/>
+          <p:nvPr/>
+        </p:nvSpPr>
+        <p:spPr>
+          <a:xfrm>
+            <a:off x="1757630" y="5702606"/>
+            <a:ext cx="2457232" cy="369332"/>
+          </a:xfrm>
+          <a:prstGeom prst="rect">
+            <a:avLst/>
+          </a:prstGeom>
+          <a:noFill/>
+        </p:spPr>
+        <p:txBody>
+          <a:bodyPr wrap="square" rtlCol="0">
+            <a:spAutoFit/>
+          </a:bodyPr>
+          <a:lstStyle/>
+          <a:p>
+            <a:r>
+              <a:rPr lang="en-US" altLang="zh-CN" dirty="0" err="1"/>
+              <a:t>current_road_curvature</a:t>
+            </a:r>
+            <a:endParaRPr lang="zh-CN" altLang="en-US" dirty="0"/>
+          </a:p>
+        </p:txBody>
+      </p:sp>
+      <p:sp>
+        <p:nvSpPr>
+          <p:cNvPr id="58" name="文本框 57">
+            <a:extLst>
+              <a:ext uri="{FF2B5EF4-FFF2-40B4-BE49-F238E27FC236}">
+                <a16:creationId xmlns:a16="http://schemas.microsoft.com/office/drawing/2014/main" id="{4F5B25E0-6FE7-4992-A6C8-B5FF9D8CC71A}"/>
+              </a:ext>
+            </a:extLst>
+          </p:cNvPr>
+          <p:cNvSpPr txBox="1"/>
+          <p:nvPr/>
+        </p:nvSpPr>
+        <p:spPr>
+          <a:xfrm>
+            <a:off x="4909817" y="5702606"/>
+            <a:ext cx="2725423" cy="369332"/>
+          </a:xfrm>
+          <a:prstGeom prst="rect">
+            <a:avLst/>
+          </a:prstGeom>
+          <a:noFill/>
+        </p:spPr>
+        <p:txBody>
+          <a:bodyPr wrap="square" rtlCol="0">
+            <a:spAutoFit/>
+          </a:bodyPr>
+          <a:lstStyle/>
+          <a:p>
+            <a:r>
+              <a:rPr lang="en-US" altLang="zh-CN" dirty="0"/>
+              <a:t>-0.077,0.077</a:t>
+            </a:r>
+            <a:r>
+              <a:rPr lang="zh-CN" altLang="en-US" dirty="0"/>
+              <a:t> →</a:t>
+            </a:r>
+            <a:r>
+              <a:rPr lang="en-US" altLang="zh-CN" dirty="0"/>
+              <a:t>(-1,1)</a:t>
+            </a:r>
+            <a:endParaRPr lang="zh-CN" altLang="en-US" dirty="0"/>
+          </a:p>
+        </p:txBody>
+      </p:sp>
+      <p:sp>
+        <p:nvSpPr>
+          <p:cNvPr id="59" name="文本框 58">
+            <a:extLst>
+              <a:ext uri="{FF2B5EF4-FFF2-40B4-BE49-F238E27FC236}">
+                <a16:creationId xmlns:a16="http://schemas.microsoft.com/office/drawing/2014/main" id="{310F2C8C-B4B7-478F-AD80-61008C001042}"/>
+              </a:ext>
+            </a:extLst>
+          </p:cNvPr>
+          <p:cNvSpPr txBox="1"/>
+          <p:nvPr/>
+        </p:nvSpPr>
+        <p:spPr>
+          <a:xfrm>
+            <a:off x="4266692" y="5710705"/>
+            <a:ext cx="643125" cy="369332"/>
+          </a:xfrm>
+          <a:prstGeom prst="rect">
+            <a:avLst/>
+          </a:prstGeom>
+          <a:noFill/>
+        </p:spPr>
+        <p:txBody>
+          <a:bodyPr wrap="none" rtlCol="0">
+            <a:spAutoFit/>
+          </a:bodyPr>
+          <a:lstStyle/>
+          <a:p>
+            <a:r>
+              <a:rPr lang="en-US" altLang="zh-CN" dirty="0"/>
+              <a:t>valid</a:t>
+            </a:r>
+            <a:endParaRPr lang="zh-CN" altLang="en-US" dirty="0"/>
+          </a:p>
+        </p:txBody>
+      </p:sp>
+      <p:sp>
+        <p:nvSpPr>
+          <p:cNvPr id="60" name="文本框 59">
+            <a:extLst>
+              <a:ext uri="{FF2B5EF4-FFF2-40B4-BE49-F238E27FC236}">
+                <a16:creationId xmlns:a16="http://schemas.microsoft.com/office/drawing/2014/main" id="{C3A22451-9556-4D09-AD95-4A56CD3D6D52}"/>
+              </a:ext>
+            </a:extLst>
+          </p:cNvPr>
+          <p:cNvSpPr txBox="1"/>
+          <p:nvPr/>
+        </p:nvSpPr>
+        <p:spPr>
+          <a:xfrm>
+            <a:off x="1757630" y="6080037"/>
+            <a:ext cx="2249220" cy="369332"/>
+          </a:xfrm>
+          <a:prstGeom prst="rect">
+            <a:avLst/>
+          </a:prstGeom>
+          <a:noFill/>
+        </p:spPr>
+        <p:txBody>
+          <a:bodyPr wrap="square" rtlCol="0">
+            <a:spAutoFit/>
+          </a:bodyPr>
+          <a:lstStyle/>
+          <a:p>
+            <a:r>
+              <a:rPr lang="en-US" altLang="zh-CN" dirty="0" err="1"/>
+              <a:t>Dynamics_params</a:t>
+            </a:r>
+            <a:endParaRPr lang="zh-CN" altLang="en-US" dirty="0"/>
+          </a:p>
+        </p:txBody>
+      </p:sp>
+      <p:sp>
+        <p:nvSpPr>
+          <p:cNvPr id="63" name="文本框 62">
+            <a:extLst>
+              <a:ext uri="{FF2B5EF4-FFF2-40B4-BE49-F238E27FC236}">
+                <a16:creationId xmlns:a16="http://schemas.microsoft.com/office/drawing/2014/main" id="{6E5BFD4B-CBA6-4E98-8103-4B7E0046ECE5}"/>
+              </a:ext>
+            </a:extLst>
+          </p:cNvPr>
+          <p:cNvSpPr txBox="1"/>
+          <p:nvPr/>
+        </p:nvSpPr>
+        <p:spPr>
+          <a:xfrm>
+            <a:off x="4266691" y="6103591"/>
+            <a:ext cx="643125" cy="369332"/>
+          </a:xfrm>
+          <a:prstGeom prst="rect">
+            <a:avLst/>
+          </a:prstGeom>
+          <a:noFill/>
+        </p:spPr>
+        <p:txBody>
+          <a:bodyPr wrap="none" rtlCol="0">
+            <a:spAutoFit/>
+          </a:bodyPr>
+          <a:lstStyle/>
+          <a:p>
+            <a:r>
+              <a:rPr lang="en-US" altLang="zh-CN" dirty="0"/>
+              <a:t>valid</a:t>
+            </a:r>
+            <a:endParaRPr lang="zh-CN" altLang="en-US" dirty="0"/>
+          </a:p>
+        </p:txBody>
+      </p:sp>
+      <p:sp>
+        <p:nvSpPr>
+          <p:cNvPr id="65" name="文本框 64">
+            <a:extLst>
+              <a:ext uri="{FF2B5EF4-FFF2-40B4-BE49-F238E27FC236}">
+                <a16:creationId xmlns:a16="http://schemas.microsoft.com/office/drawing/2014/main" id="{9BFBECAB-39EA-40DB-9B28-F3C115D584E2}"/>
+              </a:ext>
+            </a:extLst>
+          </p:cNvPr>
+          <p:cNvSpPr txBox="1"/>
+          <p:nvPr/>
+        </p:nvSpPr>
+        <p:spPr>
+          <a:xfrm>
+            <a:off x="12188664" y="5734259"/>
+            <a:ext cx="718466" cy="369332"/>
+          </a:xfrm>
+          <a:prstGeom prst="rect">
+            <a:avLst/>
+          </a:prstGeom>
+          <a:noFill/>
+        </p:spPr>
+        <p:txBody>
+          <a:bodyPr wrap="none" rtlCol="0">
+            <a:spAutoFit/>
+          </a:bodyPr>
+          <a:lstStyle/>
+          <a:p>
+            <a:r>
+              <a:rPr lang="en-US" altLang="zh-CN" b="1" dirty="0">
+                <a:solidFill>
+                  <a:srgbClr val="FF0000"/>
+                </a:solidFill>
+              </a:rPr>
+              <a:t>1dim</a:t>
+            </a:r>
+            <a:endParaRPr lang="zh-CN" altLang="en-US" b="1" dirty="0">
+              <a:solidFill>
+                <a:srgbClr val="FF0000"/>
+              </a:solidFill>
+            </a:endParaRPr>
+          </a:p>
+        </p:txBody>
+      </p:sp>
+      <p:sp>
+        <p:nvSpPr>
+          <p:cNvPr id="66" name="文本框 65">
+            <a:extLst>
+              <a:ext uri="{FF2B5EF4-FFF2-40B4-BE49-F238E27FC236}">
+                <a16:creationId xmlns:a16="http://schemas.microsoft.com/office/drawing/2014/main" id="{1ADFED12-795B-4C48-BF58-974443246DD2}"/>
+              </a:ext>
+            </a:extLst>
+          </p:cNvPr>
+          <p:cNvSpPr txBox="1"/>
+          <p:nvPr/>
+        </p:nvSpPr>
+        <p:spPr>
+          <a:xfrm>
+            <a:off x="12188664" y="6080037"/>
+            <a:ext cx="718466" cy="369332"/>
+          </a:xfrm>
+          <a:prstGeom prst="rect">
+            <a:avLst/>
+          </a:prstGeom>
+          <a:noFill/>
+        </p:spPr>
+        <p:txBody>
+          <a:bodyPr wrap="none" rtlCol="0">
+            <a:spAutoFit/>
+          </a:bodyPr>
+          <a:lstStyle/>
+          <a:p>
+            <a:r>
+              <a:rPr lang="en-US" altLang="zh-CN" b="1" dirty="0">
+                <a:solidFill>
+                  <a:srgbClr val="FF0000"/>
+                </a:solidFill>
+              </a:rPr>
+              <a:t>4dim</a:t>
+            </a:r>
+            <a:endParaRPr lang="zh-CN" altLang="en-US" b="1" dirty="0">
+              <a:solidFill>
+                <a:srgbClr val="FF0000"/>
+              </a:solidFill>
+            </a:endParaRPr>
+          </a:p>
+        </p:txBody>
+      </p:sp>
+      <p:sp>
+        <p:nvSpPr>
+          <p:cNvPr id="68" name="文本框 67">
+            <a:extLst>
+              <a:ext uri="{FF2B5EF4-FFF2-40B4-BE49-F238E27FC236}">
+                <a16:creationId xmlns:a16="http://schemas.microsoft.com/office/drawing/2014/main" id="{4ECBA376-6738-4E29-873B-C8FC0B47ACD5}"/>
+              </a:ext>
+            </a:extLst>
+          </p:cNvPr>
+          <p:cNvSpPr txBox="1"/>
+          <p:nvPr/>
+        </p:nvSpPr>
+        <p:spPr>
+          <a:xfrm>
+            <a:off x="4909816" y="6107710"/>
+            <a:ext cx="3121662" cy="1200329"/>
+          </a:xfrm>
+          <a:prstGeom prst="rect">
+            <a:avLst/>
+          </a:prstGeom>
+          <a:noFill/>
+        </p:spPr>
+        <p:txBody>
+          <a:bodyPr wrap="square">
+            <a:spAutoFit/>
+          </a:bodyPr>
+          <a:lstStyle/>
+          <a:p>
+            <a:r>
+              <a:rPr lang="zh-CN" altLang="en-US" dirty="0"/>
+              <a:t> Cthrottle 范围: [0.90</a:t>
+            </a:r>
+            <a:r>
+              <a:rPr lang="en-US" altLang="zh-CN" dirty="0"/>
+              <a:t>0</a:t>
+            </a:r>
+            <a:r>
+              <a:rPr lang="zh-CN" altLang="en-US" dirty="0"/>
+              <a:t>, 1.12</a:t>
+            </a:r>
+            <a:r>
+              <a:rPr lang="en-US" altLang="zh-CN" dirty="0"/>
+              <a:t>5</a:t>
+            </a:r>
+            <a:r>
+              <a:rPr lang="zh-CN" altLang="en-US" dirty="0"/>
+              <a:t>]</a:t>
+            </a:r>
+          </a:p>
+          <a:p>
+            <a:r>
+              <a:rPr lang="zh-CN" altLang="en-US" dirty="0"/>
+              <a:t> Csteer 范围: [0.90</a:t>
+            </a:r>
+            <a:r>
+              <a:rPr lang="en-US" altLang="zh-CN" dirty="0"/>
+              <a:t>0</a:t>
+            </a:r>
+            <a:r>
+              <a:rPr lang="zh-CN" altLang="en-US" dirty="0"/>
+              <a:t>, 1.12</a:t>
+            </a:r>
+            <a:r>
+              <a:rPr lang="en-US" altLang="zh-CN" dirty="0"/>
+              <a:t>5</a:t>
+            </a:r>
+            <a:r>
+              <a:rPr lang="zh-CN" altLang="en-US" dirty="0"/>
+              <a:t>]</a:t>
+            </a:r>
+          </a:p>
+          <a:p>
+            <a:r>
+              <a:rPr lang="zh-CN" altLang="en-US" dirty="0"/>
+              <a:t> Cacc 范围: [0.833, 1.2</a:t>
+            </a:r>
+            <a:r>
+              <a:rPr lang="en-US" altLang="zh-CN" dirty="0"/>
+              <a:t>5</a:t>
+            </a:r>
+            <a:r>
+              <a:rPr lang="zh-CN" altLang="en-US" dirty="0"/>
+              <a:t>]</a:t>
+            </a:r>
+          </a:p>
+          <a:p>
+            <a:r>
+              <a:rPr lang="zh-CN" altLang="en-US" dirty="0"/>
+              <a:t> Cvel 范围: [0.83</a:t>
+            </a:r>
+            <a:r>
+              <a:rPr lang="en-US" altLang="zh-CN" dirty="0"/>
+              <a:t>3</a:t>
+            </a:r>
+            <a:r>
+              <a:rPr lang="zh-CN" altLang="en-US" dirty="0"/>
+              <a:t>, 1.2</a:t>
+            </a:r>
+            <a:r>
+              <a:rPr lang="en-US" altLang="zh-CN" dirty="0"/>
+              <a:t>5</a:t>
+            </a:r>
+            <a:r>
+              <a:rPr lang="zh-CN" altLang="en-US" dirty="0"/>
+              <a:t>]</a:t>
+            </a:r>
+          </a:p>
+        </p:txBody>
+      </p:sp>
+      <p:sp>
+        <p:nvSpPr>
+          <p:cNvPr id="70" name="文本框 69">
+            <a:extLst>
+              <a:ext uri="{FF2B5EF4-FFF2-40B4-BE49-F238E27FC236}">
+                <a16:creationId xmlns:a16="http://schemas.microsoft.com/office/drawing/2014/main" id="{71BDC649-EFB5-4FBC-AA96-31EC08F2BF22}"/>
+              </a:ext>
+            </a:extLst>
+          </p:cNvPr>
+          <p:cNvSpPr txBox="1"/>
+          <p:nvPr/>
+        </p:nvSpPr>
+        <p:spPr>
+          <a:xfrm>
+            <a:off x="7921625" y="6168096"/>
+            <a:ext cx="1057275" cy="369332"/>
+          </a:xfrm>
+          <a:prstGeom prst="rect">
+            <a:avLst/>
+          </a:prstGeom>
+          <a:noFill/>
+        </p:spPr>
+        <p:txBody>
+          <a:bodyPr wrap="square">
+            <a:spAutoFit/>
+          </a:bodyPr>
+          <a:lstStyle/>
+          <a:p>
+            <a:r>
+              <a:rPr lang="zh-CN" altLang="en-US" dirty="0"/>
+              <a:t>→</a:t>
+            </a:r>
+            <a:r>
+              <a:rPr lang="en-US" altLang="zh-CN" dirty="0"/>
+              <a:t>(0,1)</a:t>
+            </a:r>
+            <a:endParaRPr lang="zh-CN" altLang="en-US" dirty="0"/>
+          </a:p>
+        </p:txBody>
+      </p:sp>
+      <p:sp>
+        <p:nvSpPr>
+          <p:cNvPr id="71" name="文本框 70">
+            <a:extLst>
+              <a:ext uri="{FF2B5EF4-FFF2-40B4-BE49-F238E27FC236}">
+                <a16:creationId xmlns:a16="http://schemas.microsoft.com/office/drawing/2014/main" id="{FDC273E7-257E-4374-AA6A-9FA7BBFEA1F9}"/>
+              </a:ext>
+            </a:extLst>
+          </p:cNvPr>
+          <p:cNvSpPr txBox="1"/>
+          <p:nvPr/>
+        </p:nvSpPr>
+        <p:spPr>
+          <a:xfrm>
+            <a:off x="1774238" y="7259967"/>
+            <a:ext cx="2249220" cy="369332"/>
+          </a:xfrm>
+          <a:prstGeom prst="rect">
+            <a:avLst/>
+          </a:prstGeom>
+          <a:noFill/>
+        </p:spPr>
+        <p:txBody>
+          <a:bodyPr wrap="square" rtlCol="0">
+            <a:spAutoFit/>
+          </a:bodyPr>
+          <a:lstStyle/>
+          <a:p>
+            <a:r>
+              <a:rPr lang="en-US" altLang="zh-CN" dirty="0" err="1"/>
+              <a:t>Reward_params</a:t>
+            </a:r>
+            <a:endParaRPr lang="zh-CN" altLang="en-US" dirty="0"/>
+          </a:p>
+        </p:txBody>
+      </p:sp>
+      <p:sp>
+        <p:nvSpPr>
+          <p:cNvPr id="72" name="文本框 71">
+            <a:extLst>
+              <a:ext uri="{FF2B5EF4-FFF2-40B4-BE49-F238E27FC236}">
+                <a16:creationId xmlns:a16="http://schemas.microsoft.com/office/drawing/2014/main" id="{7244A8C2-006D-41D3-ACA5-4F9A556E31E2}"/>
+              </a:ext>
+            </a:extLst>
+          </p:cNvPr>
+          <p:cNvSpPr txBox="1"/>
+          <p:nvPr/>
+        </p:nvSpPr>
+        <p:spPr>
+          <a:xfrm>
+            <a:off x="4266691" y="7259967"/>
+            <a:ext cx="643125" cy="369332"/>
+          </a:xfrm>
+          <a:prstGeom prst="rect">
+            <a:avLst/>
+          </a:prstGeom>
+          <a:noFill/>
+        </p:spPr>
+        <p:txBody>
+          <a:bodyPr wrap="none" rtlCol="0">
+            <a:spAutoFit/>
+          </a:bodyPr>
+          <a:lstStyle/>
+          <a:p>
+            <a:r>
+              <a:rPr lang="en-US" altLang="zh-CN" dirty="0"/>
+              <a:t>valid</a:t>
+            </a:r>
+            <a:endParaRPr lang="zh-CN" altLang="en-US" dirty="0"/>
+          </a:p>
+        </p:txBody>
+      </p:sp>
+      <p:sp>
+        <p:nvSpPr>
+          <p:cNvPr id="73" name="文本框 72">
+            <a:extLst>
+              <a:ext uri="{FF2B5EF4-FFF2-40B4-BE49-F238E27FC236}">
+                <a16:creationId xmlns:a16="http://schemas.microsoft.com/office/drawing/2014/main" id="{2DA6649F-44A4-4D40-926C-B41C7254BFD9}"/>
+              </a:ext>
+            </a:extLst>
+          </p:cNvPr>
+          <p:cNvSpPr txBox="1"/>
+          <p:nvPr/>
+        </p:nvSpPr>
+        <p:spPr>
+          <a:xfrm>
+            <a:off x="4909816" y="7264387"/>
+            <a:ext cx="3121662" cy="369332"/>
+          </a:xfrm>
+          <a:prstGeom prst="rect">
+            <a:avLst/>
+          </a:prstGeom>
+          <a:noFill/>
+        </p:spPr>
+        <p:txBody>
+          <a:bodyPr wrap="square">
+            <a:spAutoFit/>
+          </a:bodyPr>
+          <a:lstStyle/>
+          <a:p>
+            <a:r>
+              <a:rPr lang="en-US" altLang="zh-CN" dirty="0"/>
+              <a:t>10</a:t>
+            </a:r>
+            <a:r>
+              <a:rPr lang="zh-CN" altLang="en-US" dirty="0"/>
+              <a:t>项目分别归一化</a:t>
+            </a:r>
+          </a:p>
+        </p:txBody>
+      </p:sp>
+      <p:sp>
+        <p:nvSpPr>
+          <p:cNvPr id="74" name="文本框 73">
+            <a:extLst>
+              <a:ext uri="{FF2B5EF4-FFF2-40B4-BE49-F238E27FC236}">
+                <a16:creationId xmlns:a16="http://schemas.microsoft.com/office/drawing/2014/main" id="{94FB55DC-B302-41F8-AE26-91061322FE67}"/>
+              </a:ext>
+            </a:extLst>
+          </p:cNvPr>
+          <p:cNvSpPr txBox="1"/>
+          <p:nvPr/>
+        </p:nvSpPr>
+        <p:spPr>
+          <a:xfrm>
+            <a:off x="12217994" y="7307382"/>
+            <a:ext cx="846707" cy="369332"/>
+          </a:xfrm>
+          <a:prstGeom prst="rect">
+            <a:avLst/>
+          </a:prstGeom>
+          <a:noFill/>
+        </p:spPr>
+        <p:txBody>
+          <a:bodyPr wrap="none" rtlCol="0">
+            <a:spAutoFit/>
+          </a:bodyPr>
+          <a:lstStyle/>
+          <a:p>
+            <a:r>
+              <a:rPr lang="en-US" altLang="zh-CN" b="1" dirty="0">
+                <a:solidFill>
+                  <a:srgbClr val="FF0000"/>
+                </a:solidFill>
+              </a:rPr>
+              <a:t>10dim</a:t>
+            </a:r>
+            <a:endParaRPr lang="zh-CN" altLang="en-US" b="1" dirty="0">
+              <a:solidFill>
+                <a:srgbClr val="FF0000"/>
+              </a:solidFill>
+            </a:endParaRPr>
+          </a:p>
+        </p:txBody>
+      </p:sp>
+      <p:sp>
+        <p:nvSpPr>
+          <p:cNvPr id="79" name="文本框 78">
+            <a:extLst>
+              <a:ext uri="{FF2B5EF4-FFF2-40B4-BE49-F238E27FC236}">
+                <a16:creationId xmlns:a16="http://schemas.microsoft.com/office/drawing/2014/main" id="{FEB45226-6740-4ACC-946B-0CCB8EBBC311}"/>
+              </a:ext>
+            </a:extLst>
+          </p:cNvPr>
+          <p:cNvSpPr txBox="1"/>
+          <p:nvPr/>
+        </p:nvSpPr>
+        <p:spPr>
+          <a:xfrm>
+            <a:off x="1774238" y="7763933"/>
+            <a:ext cx="2249220" cy="369332"/>
+          </a:xfrm>
+          <a:prstGeom prst="rect">
+            <a:avLst/>
+          </a:prstGeom>
+          <a:noFill/>
+        </p:spPr>
+        <p:txBody>
+          <a:bodyPr wrap="square" rtlCol="0">
+            <a:spAutoFit/>
+          </a:bodyPr>
+          <a:lstStyle/>
+          <a:p>
+            <a:r>
+              <a:rPr lang="en-US" altLang="zh-CN" dirty="0" err="1"/>
+              <a:t>Wheel_base</a:t>
+            </a:r>
+            <a:endParaRPr lang="zh-CN" altLang="en-US" dirty="0"/>
+          </a:p>
+        </p:txBody>
+      </p:sp>
+      <p:sp>
+        <p:nvSpPr>
+          <p:cNvPr id="80" name="文本框 79">
+            <a:extLst>
+              <a:ext uri="{FF2B5EF4-FFF2-40B4-BE49-F238E27FC236}">
+                <a16:creationId xmlns:a16="http://schemas.microsoft.com/office/drawing/2014/main" id="{C5A45029-4495-4167-80DF-7E258C0D3B51}"/>
+              </a:ext>
+            </a:extLst>
+          </p:cNvPr>
+          <p:cNvSpPr txBox="1"/>
+          <p:nvPr/>
+        </p:nvSpPr>
+        <p:spPr>
+          <a:xfrm>
+            <a:off x="4909816" y="7763933"/>
+            <a:ext cx="2725424" cy="369332"/>
+          </a:xfrm>
+          <a:prstGeom prst="rect">
+            <a:avLst/>
+          </a:prstGeom>
+          <a:noFill/>
+        </p:spPr>
+        <p:txBody>
+          <a:bodyPr wrap="square" rtlCol="0">
+            <a:spAutoFit/>
+          </a:bodyPr>
+          <a:lstStyle/>
+          <a:p>
+            <a:r>
+              <a:rPr lang="en-US" altLang="zh-CN" dirty="0"/>
+              <a:t>[0.48,4.2]</a:t>
+            </a:r>
+            <a:r>
+              <a:rPr lang="zh-CN" altLang="en-US" dirty="0"/>
+              <a:t> →</a:t>
+            </a:r>
+            <a:r>
+              <a:rPr lang="en-US" altLang="zh-CN" dirty="0"/>
+              <a:t>(0,1)</a:t>
+            </a:r>
+            <a:endParaRPr lang="zh-CN" altLang="en-US" dirty="0"/>
+          </a:p>
+        </p:txBody>
+      </p:sp>
+      <p:sp>
+        <p:nvSpPr>
+          <p:cNvPr id="81" name="文本框 80">
+            <a:extLst>
+              <a:ext uri="{FF2B5EF4-FFF2-40B4-BE49-F238E27FC236}">
+                <a16:creationId xmlns:a16="http://schemas.microsoft.com/office/drawing/2014/main" id="{B009F15A-7967-457F-9751-72AD5E0D6655}"/>
+              </a:ext>
+            </a:extLst>
+          </p:cNvPr>
+          <p:cNvSpPr txBox="1"/>
+          <p:nvPr/>
+        </p:nvSpPr>
+        <p:spPr>
+          <a:xfrm>
+            <a:off x="12188664" y="7756953"/>
+            <a:ext cx="718466" cy="369332"/>
+          </a:xfrm>
+          <a:prstGeom prst="rect">
+            <a:avLst/>
+          </a:prstGeom>
+          <a:noFill/>
+        </p:spPr>
+        <p:txBody>
+          <a:bodyPr wrap="none" rtlCol="0">
+            <a:spAutoFit/>
+          </a:bodyPr>
+          <a:lstStyle/>
+          <a:p>
+            <a:r>
+              <a:rPr lang="en-US" altLang="zh-CN" b="1" dirty="0">
+                <a:solidFill>
+                  <a:srgbClr val="FF0000"/>
+                </a:solidFill>
+              </a:rPr>
+              <a:t>1dim</a:t>
+            </a:r>
+            <a:endParaRPr lang="zh-CN" altLang="en-US" b="1" dirty="0">
+              <a:solidFill>
+                <a:srgbClr val="FF0000"/>
+              </a:solidFill>
+            </a:endParaRPr>
+          </a:p>
+        </p:txBody>
+      </p:sp>
+      <p:sp>
+        <p:nvSpPr>
+          <p:cNvPr id="82" name="文本框 81">
+            <a:extLst>
+              <a:ext uri="{FF2B5EF4-FFF2-40B4-BE49-F238E27FC236}">
+                <a16:creationId xmlns:a16="http://schemas.microsoft.com/office/drawing/2014/main" id="{BA0F9B15-6FA9-42F8-8D3B-2BFEF407C8E2}"/>
+              </a:ext>
+            </a:extLst>
+          </p:cNvPr>
+          <p:cNvSpPr txBox="1"/>
+          <p:nvPr/>
+        </p:nvSpPr>
+        <p:spPr>
+          <a:xfrm>
+            <a:off x="12217994" y="8738663"/>
+            <a:ext cx="974947" cy="369332"/>
+          </a:xfrm>
+          <a:prstGeom prst="rect">
+            <a:avLst/>
+          </a:prstGeom>
+          <a:noFill/>
+        </p:spPr>
+        <p:txBody>
+          <a:bodyPr wrap="none" rtlCol="0">
+            <a:spAutoFit/>
+          </a:bodyPr>
+          <a:lstStyle/>
+          <a:p>
+            <a:r>
+              <a:rPr lang="en-US" altLang="zh-CN" b="1" dirty="0">
+                <a:solidFill>
+                  <a:srgbClr val="FF0000"/>
+                </a:solidFill>
+              </a:rPr>
+              <a:t>840dim</a:t>
+            </a:r>
+            <a:endParaRPr lang="zh-CN" altLang="en-US" b="1" dirty="0">
+              <a:solidFill>
+                <a:srgbClr val="FF0000"/>
+              </a:solidFill>
+            </a:endParaRPr>
           </a:p>
         </p:txBody>
       </p:sp>
@@ -3477,6 +6298,72 @@
     <p:extLst>
       <p:ext uri="{BB962C8B-B14F-4D97-AF65-F5344CB8AC3E}">
         <p14:creationId xmlns:p14="http://schemas.microsoft.com/office/powerpoint/2010/main" val="2749342983"/>
+      </p:ext>
+    </p:extLst>
+  </p:cSld>
+  <p:clrMapOvr>
+    <a:masterClrMapping/>
+  </p:clrMapOvr>
+</p:sld>
+</file>
+
+<file path=ppt/slides/slide2.xml><?xml version="1.0" encoding="utf-8"?>
+<p:sld xmlns:a="http://schemas.openxmlformats.org/drawingml/2006/main" xmlns:r="http://schemas.openxmlformats.org/officeDocument/2006/relationships" xmlns:p="http://schemas.openxmlformats.org/presentationml/2006/main">
+  <p:cSld>
+    <p:spTree>
+      <p:nvGrpSpPr>
+        <p:cNvPr id="1" name=""/>
+        <p:cNvGrpSpPr/>
+        <p:nvPr/>
+      </p:nvGrpSpPr>
+      <p:grpSpPr>
+        <a:xfrm>
+          <a:off x="0" y="0"/>
+          <a:ext cx="0" cy="0"/>
+          <a:chOff x="0" y="0"/>
+          <a:chExt cx="0" cy="0"/>
+        </a:xfrm>
+      </p:grpSpPr>
+      <p:sp>
+        <p:nvSpPr>
+          <p:cNvPr id="4" name="文本框 3">
+            <a:extLst>
+              <a:ext uri="{FF2B5EF4-FFF2-40B4-BE49-F238E27FC236}">
+                <a16:creationId xmlns:a16="http://schemas.microsoft.com/office/drawing/2014/main" id="{2ECA72EE-ED21-4E40-9F70-861EEE824937}"/>
+              </a:ext>
+            </a:extLst>
+          </p:cNvPr>
+          <p:cNvSpPr txBox="1"/>
+          <p:nvPr/>
+        </p:nvSpPr>
+        <p:spPr>
+          <a:xfrm>
+            <a:off x="193092" y="184713"/>
+            <a:ext cx="821059" cy="369332"/>
+          </a:xfrm>
+          <a:prstGeom prst="rect">
+            <a:avLst/>
+          </a:prstGeom>
+          <a:noFill/>
+        </p:spPr>
+        <p:txBody>
+          <a:bodyPr wrap="none" rtlCol="0">
+            <a:spAutoFit/>
+          </a:bodyPr>
+          <a:lstStyle/>
+          <a:p>
+            <a:r>
+              <a:rPr lang="en-US" altLang="zh-CN" dirty="0"/>
+              <a:t>Action</a:t>
+            </a:r>
+            <a:endParaRPr lang="zh-CN" altLang="en-US" dirty="0"/>
+          </a:p>
+        </p:txBody>
+      </p:sp>
+    </p:spTree>
+    <p:extLst>
+      <p:ext uri="{BB962C8B-B14F-4D97-AF65-F5344CB8AC3E}">
+        <p14:creationId xmlns:p14="http://schemas.microsoft.com/office/powerpoint/2010/main" val="445785923"/>
       </p:ext>
     </p:extLst>
   </p:cSld>
@@ -3779,4 +6666,299 @@
     </a:ext>
   </a:extLst>
 </a:theme>
+</file>
+
+<file path=ppt/theme/theme2.xml><?xml version="1.0" encoding="utf-8"?>
+<a:theme xmlns:a="http://schemas.openxmlformats.org/drawingml/2006/main" name="Office 主题​​">
+  <a:themeElements>
+    <a:clrScheme name="Office">
+      <a:dk1>
+        <a:sysClr val="windowText" lastClr="000000"/>
+      </a:dk1>
+      <a:lt1>
+        <a:sysClr val="window" lastClr="FFFFFF"/>
+      </a:lt1>
+      <a:dk2>
+        <a:srgbClr val="44546A"/>
+      </a:dk2>
+      <a:lt2>
+        <a:srgbClr val="E7E6E6"/>
+      </a:lt2>
+      <a:accent1>
+        <a:srgbClr val="4472C4"/>
+      </a:accent1>
+      <a:accent2>
+        <a:srgbClr val="ED7D31"/>
+      </a:accent2>
+      <a:accent3>
+        <a:srgbClr val="A5A5A5"/>
+      </a:accent3>
+      <a:accent4>
+        <a:srgbClr val="FFC000"/>
+      </a:accent4>
+      <a:accent5>
+        <a:srgbClr val="5B9BD5"/>
+      </a:accent5>
+      <a:accent6>
+        <a:srgbClr val="70AD47"/>
+      </a:accent6>
+      <a:hlink>
+        <a:srgbClr val="0563C1"/>
+      </a:hlink>
+      <a:folHlink>
+        <a:srgbClr val="954F72"/>
+      </a:folHlink>
+    </a:clrScheme>
+    <a:fontScheme name="Office">
+      <a:majorFont>
+        <a:latin typeface="等线 Light" panose="020F0302020204030204"/>
+        <a:ea typeface=""/>
+        <a:cs typeface=""/>
+        <a:font script="Jpan" typeface="游ゴシック Light"/>
+        <a:font script="Hang" typeface="맑은 고딕"/>
+        <a:font script="Hans" typeface="等线 Light"/>
+        <a:font script="Hant" typeface="新細明體"/>
+        <a:font script="Arab" typeface="Times New Roman"/>
+        <a:font script="Hebr" typeface="Times New Roman"/>
+        <a:font script="Thai" typeface="Angsana New"/>
+        <a:font script="Ethi" typeface="Nyala"/>
+        <a:font script="Beng" typeface="Vrinda"/>
+        <a:font script="Gujr" typeface="Shruti"/>
+        <a:font script="Khmr" typeface="MoolBoran"/>
+        <a:font script="Knda" typeface="Tunga"/>
+        <a:font script="Guru" typeface="Raavi"/>
+        <a:font script="Cans" typeface="Euphemia"/>
+        <a:font script="Cher" typeface="Plantagenet Cherokee"/>
+        <a:font script="Yiii" typeface="Microsoft Yi Baiti"/>
+        <a:font script="Tibt" typeface="Microsoft Himalaya"/>
+        <a:font script="Thaa" typeface="MV Boli"/>
+        <a:font script="Deva" typeface="Mangal"/>
+        <a:font script="Telu" typeface="Gautami"/>
+        <a:font script="Taml" typeface="Latha"/>
+        <a:font script="Syrc" typeface="Estrangelo Edessa"/>
+        <a:font script="Orya" typeface="Kalinga"/>
+        <a:font script="Mlym" typeface="Kartika"/>
+        <a:font script="Laoo" typeface="DokChampa"/>
+        <a:font script="Sinh" typeface="Iskoola Pota"/>
+        <a:font script="Mong" typeface="Mongolian Baiti"/>
+        <a:font script="Viet" typeface="Times New Roman"/>
+        <a:font script="Uigh" typeface="Microsoft Uighur"/>
+        <a:font script="Geor" typeface="Sylfaen"/>
+        <a:font script="Armn" typeface="Arial"/>
+        <a:font script="Bugi" typeface="Leelawadee UI"/>
+        <a:font script="Bopo" typeface="Microsoft JhengHei"/>
+        <a:font script="Java" typeface="Javanese Text"/>
+        <a:font script="Lisu" typeface="Segoe UI"/>
+        <a:font script="Mymr" typeface="Myanmar Text"/>
+        <a:font script="Nkoo" typeface="Ebrima"/>
+        <a:font script="Olck" typeface="Nirmala UI"/>
+        <a:font script="Osma" typeface="Ebrima"/>
+        <a:font script="Phag" typeface="Phagspa"/>
+        <a:font script="Syrn" typeface="Estrangelo Edessa"/>
+        <a:font script="Syrj" typeface="Estrangelo Edessa"/>
+        <a:font script="Syre" typeface="Estrangelo Edessa"/>
+        <a:font script="Sora" typeface="Nirmala UI"/>
+        <a:font script="Tale" typeface="Microsoft Tai Le"/>
+        <a:font script="Talu" typeface="Microsoft New Tai Lue"/>
+        <a:font script="Tfng" typeface="Ebrima"/>
+      </a:majorFont>
+      <a:minorFont>
+        <a:latin typeface="等线" panose="020F0502020204030204"/>
+        <a:ea typeface=""/>
+        <a:cs typeface=""/>
+        <a:font script="Jpan" typeface="游ゴシック"/>
+        <a:font script="Hang" typeface="맑은 고딕"/>
+        <a:font script="Hans" typeface="等线"/>
+        <a:font script="Hant" typeface="新細明體"/>
+        <a:font script="Arab" typeface="Arial"/>
+        <a:font script="Hebr" typeface="Arial"/>
+        <a:font script="Thai" typeface="Cordia New"/>
+        <a:font script="Ethi" typeface="Nyala"/>
+        <a:font script="Beng" typeface="Vrinda"/>
+        <a:font script="Gujr" typeface="Shruti"/>
+        <a:font script="Khmr" typeface="DaunPenh"/>
+        <a:font script="Knda" typeface="Tunga"/>
+        <a:font script="Guru" typeface="Raavi"/>
+        <a:font script="Cans" typeface="Euphemia"/>
+        <a:font script="Cher" typeface="Plantagenet Cherokee"/>
+        <a:font script="Yiii" typeface="Microsoft Yi Baiti"/>
+        <a:font script="Tibt" typeface="Microsoft Himalaya"/>
+        <a:font script="Thaa" typeface="MV Boli"/>
+        <a:font script="Deva" typeface="Mangal"/>
+        <a:font script="Telu" typeface="Gautami"/>
+        <a:font script="Taml" typeface="Latha"/>
+        <a:font script="Syrc" typeface="Estrangelo Edessa"/>
+        <a:font script="Orya" typeface="Kalinga"/>
+        <a:font script="Mlym" typeface="Kartika"/>
+        <a:font script="Laoo" typeface="DokChampa"/>
+        <a:font script="Sinh" typeface="Iskoola Pota"/>
+        <a:font script="Mong" typeface="Mongolian Baiti"/>
+        <a:font script="Viet" typeface="Arial"/>
+        <a:font script="Uigh" typeface="Microsoft Uighur"/>
+        <a:font script="Geor" typeface="Sylfaen"/>
+        <a:font script="Armn" typeface="Arial"/>
+        <a:font script="Bugi" typeface="Leelawadee UI"/>
+        <a:font script="Bopo" typeface="Microsoft JhengHei"/>
+        <a:font script="Java" typeface="Javanese Text"/>
+        <a:font script="Lisu" typeface="Segoe UI"/>
+        <a:font script="Mymr" typeface="Myanmar Text"/>
+        <a:font script="Nkoo" typeface="Ebrima"/>
+        <a:font script="Olck" typeface="Nirmala UI"/>
+        <a:font script="Osma" typeface="Ebrima"/>
+        <a:font script="Phag" typeface="Phagspa"/>
+        <a:font script="Syrn" typeface="Estrangelo Edessa"/>
+        <a:font script="Syrj" typeface="Estrangelo Edessa"/>
+        <a:font script="Syre" typeface="Estrangelo Edessa"/>
+        <a:font script="Sora" typeface="Nirmala UI"/>
+        <a:font script="Tale" typeface="Microsoft Tai Le"/>
+        <a:font script="Talu" typeface="Microsoft New Tai Lue"/>
+        <a:font script="Tfng" typeface="Ebrima"/>
+      </a:minorFont>
+    </a:fontScheme>
+    <a:fmtScheme name="Office">
+      <a:fillStyleLst>
+        <a:solidFill>
+          <a:schemeClr val="phClr"/>
+        </a:solidFill>
+        <a:gradFill rotWithShape="1">
+          <a:gsLst>
+            <a:gs pos="0">
+              <a:schemeClr val="phClr">
+                <a:lumMod val="110000"/>
+                <a:satMod val="105000"/>
+                <a:tint val="67000"/>
+              </a:schemeClr>
+            </a:gs>
+            <a:gs pos="50000">
+              <a:schemeClr val="phClr">
+                <a:lumMod val="105000"/>
+                <a:satMod val="103000"/>
+                <a:tint val="73000"/>
+              </a:schemeClr>
+            </a:gs>
+            <a:gs pos="100000">
+              <a:schemeClr val="phClr">
+                <a:lumMod val="105000"/>
+                <a:satMod val="109000"/>
+                <a:tint val="81000"/>
+              </a:schemeClr>
+            </a:gs>
+          </a:gsLst>
+          <a:lin ang="5400000" scaled="0"/>
+        </a:gradFill>
+        <a:gradFill rotWithShape="1">
+          <a:gsLst>
+            <a:gs pos="0">
+              <a:schemeClr val="phClr">
+                <a:satMod val="103000"/>
+                <a:lumMod val="102000"/>
+                <a:tint val="94000"/>
+              </a:schemeClr>
+            </a:gs>
+            <a:gs pos="50000">
+              <a:schemeClr val="phClr">
+                <a:satMod val="110000"/>
+                <a:lumMod val="100000"/>
+                <a:shade val="100000"/>
+              </a:schemeClr>
+            </a:gs>
+            <a:gs pos="100000">
+              <a:schemeClr val="phClr">
+                <a:lumMod val="99000"/>
+                <a:satMod val="120000"/>
+                <a:shade val="78000"/>
+              </a:schemeClr>
+            </a:gs>
+          </a:gsLst>
+          <a:lin ang="5400000" scaled="0"/>
+        </a:gradFill>
+      </a:fillStyleLst>
+      <a:lnStyleLst>
+        <a:ln w="6350" cap="flat" cmpd="sng" algn="ctr">
+          <a:solidFill>
+            <a:schemeClr val="phClr"/>
+          </a:solidFill>
+          <a:prstDash val="solid"/>
+          <a:miter lim="800000"/>
+        </a:ln>
+        <a:ln w="12700" cap="flat" cmpd="sng" algn="ctr">
+          <a:solidFill>
+            <a:schemeClr val="phClr"/>
+          </a:solidFill>
+          <a:prstDash val="solid"/>
+          <a:miter lim="800000"/>
+        </a:ln>
+        <a:ln w="19050" cap="flat" cmpd="sng" algn="ctr">
+          <a:solidFill>
+            <a:schemeClr val="phClr"/>
+          </a:solidFill>
+          <a:prstDash val="solid"/>
+          <a:miter lim="800000"/>
+        </a:ln>
+      </a:lnStyleLst>
+      <a:effectStyleLst>
+        <a:effectStyle>
+          <a:effectLst/>
+        </a:effectStyle>
+        <a:effectStyle>
+          <a:effectLst/>
+        </a:effectStyle>
+        <a:effectStyle>
+          <a:effectLst>
+            <a:outerShdw blurRad="57150" dist="19050" dir="5400000" algn="ctr" rotWithShape="0">
+              <a:srgbClr val="000000">
+                <a:alpha val="63000"/>
+              </a:srgbClr>
+            </a:outerShdw>
+          </a:effectLst>
+        </a:effectStyle>
+      </a:effectStyleLst>
+      <a:bgFillStyleLst>
+        <a:solidFill>
+          <a:schemeClr val="phClr"/>
+        </a:solidFill>
+        <a:solidFill>
+          <a:schemeClr val="phClr">
+            <a:tint val="95000"/>
+            <a:satMod val="170000"/>
+          </a:schemeClr>
+        </a:solidFill>
+        <a:gradFill rotWithShape="1">
+          <a:gsLst>
+            <a:gs pos="0">
+              <a:schemeClr val="phClr">
+                <a:tint val="93000"/>
+                <a:satMod val="150000"/>
+                <a:shade val="98000"/>
+                <a:lumMod val="102000"/>
+              </a:schemeClr>
+            </a:gs>
+            <a:gs pos="50000">
+              <a:schemeClr val="phClr">
+                <a:tint val="98000"/>
+                <a:satMod val="130000"/>
+                <a:shade val="90000"/>
+                <a:lumMod val="103000"/>
+              </a:schemeClr>
+            </a:gs>
+            <a:gs pos="100000">
+              <a:schemeClr val="phClr">
+                <a:shade val="63000"/>
+                <a:satMod val="120000"/>
+              </a:schemeClr>
+            </a:gs>
+          </a:gsLst>
+          <a:lin ang="5400000" scaled="0"/>
+        </a:gradFill>
+      </a:bgFillStyleLst>
+    </a:fmtScheme>
+  </a:themeElements>
+  <a:objectDefaults/>
+  <a:extraClrSchemeLst/>
+  <a:extLst>
+    <a:ext uri="{05A4C25C-085E-4340-85A3-A5531E510DB2}">
+      <thm15:themeFamily xmlns:thm15="http://schemas.microsoft.com/office/thememl/2012/main" name="Office Theme" id="{62F939B6-93AF-4DB8-9C6B-D6C7DFDC589F}" vid="{4A3C46E8-61CC-4603-A589-7422A47A8E4A}"/>
+    </a:ext>
+  </a:extLst>
+</a:theme>
 </file>
--- a/construct.pptx
+++ b/construct.pptx
@@ -5,11 +5,16 @@
     <p:sldMasterId id="2147483648" r:id="rId1"/>
   </p:sldMasterIdLst>
   <p:notesMasterIdLst>
-    <p:notesMasterId r:id="rId4"/>
+    <p:notesMasterId r:id="rId9"/>
   </p:notesMasterIdLst>
   <p:sldIdLst>
-    <p:sldId id="256" r:id="rId2"/>
-    <p:sldId id="257" r:id="rId3"/>
+    <p:sldId id="260" r:id="rId2"/>
+    <p:sldId id="258" r:id="rId3"/>
+    <p:sldId id="259" r:id="rId4"/>
+    <p:sldId id="261" r:id="rId5"/>
+    <p:sldId id="262" r:id="rId6"/>
+    <p:sldId id="256" r:id="rId7"/>
+    <p:sldId id="257" r:id="rId8"/>
   </p:sldIdLst>
   <p:sldSz cx="12192000" cy="6858000"/>
   <p:notesSz cx="6858000" cy="9144000"/>
@@ -198,7 +203,7 @@
           <a:p>
             <a:fld id="{95BED5AB-465E-4E70-8B4C-8410F2278A90}" type="datetimeFigureOut">
               <a:rPr lang="zh-CN" altLang="en-US" smtClean="0"/>
-              <a:t>2025/11/10</a:t>
+              <a:t>2025/12/19</a:t>
             </a:fld>
             <a:endParaRPr lang="zh-CN" altLang="en-US"/>
           </a:p>
@@ -530,7 +535,7 @@
           <a:p>
             <a:fld id="{50F91C08-419E-435B-89FC-920B728238CC}" type="slidenum">
               <a:rPr lang="zh-CN" altLang="en-US" smtClean="0"/>
-              <a:t>1</a:t>
+              <a:t>6</a:t>
             </a:fld>
             <a:endParaRPr lang="zh-CN" altLang="en-US"/>
           </a:p>
@@ -696,7 +701,7 @@
           <a:p>
             <a:fld id="{A69F80EA-AFE6-4570-883F-20D9B728F631}" type="datetimeFigureOut">
               <a:rPr lang="zh-CN" altLang="en-US" smtClean="0"/>
-              <a:t>2025/11/10</a:t>
+              <a:t>2025/12/19</a:t>
             </a:fld>
             <a:endParaRPr lang="zh-CN" altLang="en-US"/>
           </a:p>
@@ -894,7 +899,7 @@
           <a:p>
             <a:fld id="{A69F80EA-AFE6-4570-883F-20D9B728F631}" type="datetimeFigureOut">
               <a:rPr lang="zh-CN" altLang="en-US" smtClean="0"/>
-              <a:t>2025/11/10</a:t>
+              <a:t>2025/12/19</a:t>
             </a:fld>
             <a:endParaRPr lang="zh-CN" altLang="en-US"/>
           </a:p>
@@ -1102,7 +1107,7 @@
           <a:p>
             <a:fld id="{A69F80EA-AFE6-4570-883F-20D9B728F631}" type="datetimeFigureOut">
               <a:rPr lang="zh-CN" altLang="en-US" smtClean="0"/>
-              <a:t>2025/11/10</a:t>
+              <a:t>2025/12/19</a:t>
             </a:fld>
             <a:endParaRPr lang="zh-CN" altLang="en-US"/>
           </a:p>
@@ -1300,7 +1305,7 @@
           <a:p>
             <a:fld id="{A69F80EA-AFE6-4570-883F-20D9B728F631}" type="datetimeFigureOut">
               <a:rPr lang="zh-CN" altLang="en-US" smtClean="0"/>
-              <a:t>2025/11/10</a:t>
+              <a:t>2025/12/19</a:t>
             </a:fld>
             <a:endParaRPr lang="zh-CN" altLang="en-US"/>
           </a:p>
@@ -1575,7 +1580,7 @@
           <a:p>
             <a:fld id="{A69F80EA-AFE6-4570-883F-20D9B728F631}" type="datetimeFigureOut">
               <a:rPr lang="zh-CN" altLang="en-US" smtClean="0"/>
-              <a:t>2025/11/10</a:t>
+              <a:t>2025/12/19</a:t>
             </a:fld>
             <a:endParaRPr lang="zh-CN" altLang="en-US"/>
           </a:p>
@@ -1840,7 +1845,7 @@
           <a:p>
             <a:fld id="{A69F80EA-AFE6-4570-883F-20D9B728F631}" type="datetimeFigureOut">
               <a:rPr lang="zh-CN" altLang="en-US" smtClean="0"/>
-              <a:t>2025/11/10</a:t>
+              <a:t>2025/12/19</a:t>
             </a:fld>
             <a:endParaRPr lang="zh-CN" altLang="en-US"/>
           </a:p>
@@ -2252,7 +2257,7 @@
           <a:p>
             <a:fld id="{A69F80EA-AFE6-4570-883F-20D9B728F631}" type="datetimeFigureOut">
               <a:rPr lang="zh-CN" altLang="en-US" smtClean="0"/>
-              <a:t>2025/11/10</a:t>
+              <a:t>2025/12/19</a:t>
             </a:fld>
             <a:endParaRPr lang="zh-CN" altLang="en-US"/>
           </a:p>
@@ -2393,7 +2398,7 @@
           <a:p>
             <a:fld id="{A69F80EA-AFE6-4570-883F-20D9B728F631}" type="datetimeFigureOut">
               <a:rPr lang="zh-CN" altLang="en-US" smtClean="0"/>
-              <a:t>2025/11/10</a:t>
+              <a:t>2025/12/19</a:t>
             </a:fld>
             <a:endParaRPr lang="zh-CN" altLang="en-US"/>
           </a:p>
@@ -2506,7 +2511,7 @@
           <a:p>
             <a:fld id="{A69F80EA-AFE6-4570-883F-20D9B728F631}" type="datetimeFigureOut">
               <a:rPr lang="zh-CN" altLang="en-US" smtClean="0"/>
-              <a:t>2025/11/10</a:t>
+              <a:t>2025/12/19</a:t>
             </a:fld>
             <a:endParaRPr lang="zh-CN" altLang="en-US"/>
           </a:p>
@@ -2817,7 +2822,7 @@
           <a:p>
             <a:fld id="{A69F80EA-AFE6-4570-883F-20D9B728F631}" type="datetimeFigureOut">
               <a:rPr lang="zh-CN" altLang="en-US" smtClean="0"/>
-              <a:t>2025/11/10</a:t>
+              <a:t>2025/12/19</a:t>
             </a:fld>
             <a:endParaRPr lang="zh-CN" altLang="en-US"/>
           </a:p>
@@ -3105,7 +3110,7 @@
           <a:p>
             <a:fld id="{A69F80EA-AFE6-4570-883F-20D9B728F631}" type="datetimeFigureOut">
               <a:rPr lang="zh-CN" altLang="en-US" smtClean="0"/>
-              <a:t>2025/11/10</a:t>
+              <a:t>2025/12/19</a:t>
             </a:fld>
             <a:endParaRPr lang="zh-CN" altLang="en-US"/>
           </a:p>
@@ -3346,7 +3351,7 @@
           <a:p>
             <a:fld id="{A69F80EA-AFE6-4570-883F-20D9B728F631}" type="datetimeFigureOut">
               <a:rPr lang="zh-CN" altLang="en-US" smtClean="0"/>
-              <a:t>2025/11/10</a:t>
+              <a:t>2025/12/19</a:t>
             </a:fld>
             <a:endParaRPr lang="zh-CN" altLang="en-US"/>
           </a:p>
@@ -3768,6 +3773,3796 @@
           <p:cNvPr id="4" name="文本框 3">
             <a:extLst>
               <a:ext uri="{FF2B5EF4-FFF2-40B4-BE49-F238E27FC236}">
+                <a16:creationId xmlns:a16="http://schemas.microsoft.com/office/drawing/2014/main" id="{AEA81029-13B0-41D7-B7FE-913AE28C56A2}"/>
+              </a:ext>
+            </a:extLst>
+          </p:cNvPr>
+          <p:cNvSpPr txBox="1"/>
+          <p:nvPr/>
+        </p:nvSpPr>
+        <p:spPr>
+          <a:xfrm>
+            <a:off x="0" y="0"/>
+            <a:ext cx="1534394" cy="461665"/>
+          </a:xfrm>
+          <a:prstGeom prst="rect">
+            <a:avLst/>
+          </a:prstGeom>
+          <a:noFill/>
+        </p:spPr>
+        <p:txBody>
+          <a:bodyPr wrap="none" rtlCol="0">
+            <a:spAutoFit/>
+          </a:bodyPr>
+          <a:lstStyle/>
+          <a:p>
+            <a:r>
+              <a:rPr lang="en-US" altLang="zh-CN" sz="2400" b="1" dirty="0" err="1">
+                <a:latin typeface="Arial" panose="020B0604020202020204" pitchFamily="34" charset="0"/>
+                <a:cs typeface="Arial" panose="020B0604020202020204" pitchFamily="34" charset="0"/>
+              </a:rPr>
+              <a:t>map.json</a:t>
+            </a:r>
+            <a:endParaRPr lang="zh-CN" altLang="en-US" sz="2400" b="1" dirty="0">
+              <a:latin typeface="Arial" panose="020B0604020202020204" pitchFamily="34" charset="0"/>
+              <a:cs typeface="Arial" panose="020B0604020202020204" pitchFamily="34" charset="0"/>
+            </a:endParaRPr>
+          </a:p>
+        </p:txBody>
+      </p:sp>
+      <p:sp>
+        <p:nvSpPr>
+          <p:cNvPr id="5" name="矩形 4">
+            <a:extLst>
+              <a:ext uri="{FF2B5EF4-FFF2-40B4-BE49-F238E27FC236}">
+                <a16:creationId xmlns:a16="http://schemas.microsoft.com/office/drawing/2014/main" id="{95F1E405-F668-4B97-B3D7-1A4BFFF87DA5}"/>
+              </a:ext>
+            </a:extLst>
+          </p:cNvPr>
+          <p:cNvSpPr/>
+          <p:nvPr/>
+        </p:nvSpPr>
+        <p:spPr>
+          <a:xfrm>
+            <a:off x="1534394" y="847131"/>
+            <a:ext cx="4543097" cy="3207983"/>
+          </a:xfrm>
+          <a:prstGeom prst="rect">
+            <a:avLst/>
+          </a:prstGeom>
+          <a:noFill/>
+          <a:ln w="25400">
+            <a:solidFill>
+              <a:schemeClr val="tx1"/>
+            </a:solidFill>
+            <a:prstDash val="sysDash"/>
+          </a:ln>
+        </p:spPr>
+        <p:style>
+          <a:lnRef idx="2">
+            <a:schemeClr val="accent1">
+              <a:shade val="50000"/>
+            </a:schemeClr>
+          </a:lnRef>
+          <a:fillRef idx="1">
+            <a:schemeClr val="accent1"/>
+          </a:fillRef>
+          <a:effectRef idx="0">
+            <a:schemeClr val="accent1"/>
+          </a:effectRef>
+          <a:fontRef idx="minor">
+            <a:schemeClr val="lt1"/>
+          </a:fontRef>
+        </p:style>
+        <p:txBody>
+          <a:bodyPr rtlCol="0" anchor="ctr"/>
+          <a:lstStyle/>
+          <a:p>
+            <a:pPr algn="ctr"/>
+            <a:endParaRPr lang="zh-CN" altLang="en-US" dirty="0"/>
+          </a:p>
+        </p:txBody>
+      </p:sp>
+      <p:sp>
+        <p:nvSpPr>
+          <p:cNvPr id="6" name="文本框 5">
+            <a:extLst>
+              <a:ext uri="{FF2B5EF4-FFF2-40B4-BE49-F238E27FC236}">
+                <a16:creationId xmlns:a16="http://schemas.microsoft.com/office/drawing/2014/main" id="{B792C0A4-C6E8-4989-96C4-7153F4F332A2}"/>
+              </a:ext>
+            </a:extLst>
+          </p:cNvPr>
+          <p:cNvSpPr txBox="1"/>
+          <p:nvPr/>
+        </p:nvSpPr>
+        <p:spPr>
+          <a:xfrm>
+            <a:off x="1534395" y="847131"/>
+            <a:ext cx="787395" cy="369332"/>
+          </a:xfrm>
+          <a:prstGeom prst="rect">
+            <a:avLst/>
+          </a:prstGeom>
+          <a:noFill/>
+        </p:spPr>
+        <p:txBody>
+          <a:bodyPr wrap="none" rtlCol="0">
+            <a:spAutoFit/>
+          </a:bodyPr>
+          <a:lstStyle/>
+          <a:p>
+            <a:r>
+              <a:rPr lang="en-US" altLang="zh-CN" dirty="0"/>
+              <a:t>quads</a:t>
+            </a:r>
+            <a:endParaRPr lang="zh-CN" altLang="en-US" dirty="0"/>
+          </a:p>
+        </p:txBody>
+      </p:sp>
+      <p:sp>
+        <p:nvSpPr>
+          <p:cNvPr id="7" name="文本框 6">
+            <a:extLst>
+              <a:ext uri="{FF2B5EF4-FFF2-40B4-BE49-F238E27FC236}">
+                <a16:creationId xmlns:a16="http://schemas.microsoft.com/office/drawing/2014/main" id="{569026B9-B1B6-4833-8C67-E51822FD7167}"/>
+              </a:ext>
+            </a:extLst>
+          </p:cNvPr>
+          <p:cNvSpPr txBox="1"/>
+          <p:nvPr/>
+        </p:nvSpPr>
+        <p:spPr>
+          <a:xfrm>
+            <a:off x="1928091" y="1192792"/>
+            <a:ext cx="4149401" cy="2862322"/>
+          </a:xfrm>
+          <a:prstGeom prst="rect">
+            <a:avLst/>
+          </a:prstGeom>
+          <a:noFill/>
+        </p:spPr>
+        <p:txBody>
+          <a:bodyPr wrap="square" rtlCol="0">
+            <a:spAutoFit/>
+          </a:bodyPr>
+          <a:lstStyle/>
+          <a:p>
+            <a:r>
+              <a:rPr lang="en-US" altLang="zh-CN" dirty="0"/>
+              <a:t>poly_id	#</a:t>
+            </a:r>
+            <a:r>
+              <a:rPr lang="zh-CN" altLang="en-US" dirty="0"/>
+              <a:t>每个</a:t>
+            </a:r>
+            <a:r>
+              <a:rPr lang="en-US" altLang="zh-CN" dirty="0"/>
+              <a:t>poly</a:t>
+            </a:r>
+            <a:r>
+              <a:rPr lang="zh-CN" altLang="en-US" dirty="0"/>
+              <a:t>唯一标志</a:t>
+            </a:r>
+            <a:endParaRPr lang="en-US" altLang="zh-CN" dirty="0"/>
+          </a:p>
+          <a:p>
+            <a:r>
+              <a:rPr lang="en-US" altLang="zh-CN" dirty="0"/>
+              <a:t>road_id	#</a:t>
+            </a:r>
+          </a:p>
+          <a:p>
+            <a:r>
+              <a:rPr lang="en-US" altLang="zh-CN" dirty="0"/>
+              <a:t>lane_id	#</a:t>
+            </a:r>
+          </a:p>
+          <a:p>
+            <a:r>
+              <a:rPr lang="en-US" altLang="zh-CN" dirty="0"/>
+              <a:t>center	#</a:t>
+            </a:r>
+            <a:r>
+              <a:rPr lang="zh-CN" altLang="en-US" dirty="0"/>
+              <a:t>中心坐标</a:t>
+            </a:r>
+            <a:endParaRPr lang="en-US" altLang="zh-CN" dirty="0"/>
+          </a:p>
+          <a:p>
+            <a:r>
+              <a:rPr lang="en-US" altLang="zh-CN" dirty="0"/>
+              <a:t>vertices	#</a:t>
+            </a:r>
+            <a:r>
+              <a:rPr lang="zh-CN" altLang="en-US" dirty="0"/>
+              <a:t>四个角点</a:t>
+            </a:r>
+            <a:endParaRPr lang="en-US" altLang="zh-CN" dirty="0"/>
+          </a:p>
+          <a:p>
+            <a:r>
+              <a:rPr lang="en-US" altLang="zh-CN" dirty="0"/>
+              <a:t>direction_angle</a:t>
+            </a:r>
+          </a:p>
+          <a:p>
+            <a:r>
+              <a:rPr lang="en-US" altLang="zh-CN" dirty="0"/>
+              <a:t>s	#</a:t>
+            </a:r>
+            <a:r>
+              <a:rPr lang="zh-CN" altLang="en-US" dirty="0"/>
+              <a:t>从本身</a:t>
+            </a:r>
+            <a:r>
+              <a:rPr lang="en-US" altLang="zh-CN" dirty="0"/>
+              <a:t>lane_id</a:t>
+            </a:r>
+            <a:r>
+              <a:rPr lang="zh-CN" altLang="en-US" dirty="0"/>
+              <a:t>的</a:t>
+            </a:r>
+            <a:r>
+              <a:rPr lang="en-US" altLang="zh-CN" dirty="0"/>
+              <a:t>start</a:t>
+            </a:r>
+            <a:r>
+              <a:rPr lang="zh-CN" altLang="en-US" dirty="0"/>
+              <a:t>的距离</a:t>
+            </a:r>
+            <a:endParaRPr lang="en-US" altLang="zh-CN" dirty="0"/>
+          </a:p>
+          <a:p>
+            <a:r>
+              <a:rPr lang="en-US" altLang="zh-CN" dirty="0"/>
+              <a:t>curvature#</a:t>
+            </a:r>
+            <a:r>
+              <a:rPr lang="zh-CN" altLang="en-US" dirty="0"/>
+              <a:t>三点法计算，端部特殊处理</a:t>
+            </a:r>
+            <a:endParaRPr lang="en-US" altLang="zh-CN" dirty="0"/>
+          </a:p>
+          <a:p>
+            <a:r>
+              <a:rPr lang="en-US" altLang="zh-CN" dirty="0" err="1"/>
+              <a:t>prev_w_lane_id</a:t>
+            </a:r>
+            <a:r>
+              <a:rPr lang="en-US" altLang="zh-CN" dirty="0"/>
+              <a:t> # </a:t>
+            </a:r>
+            <a:r>
+              <a:rPr lang="zh-CN" altLang="en-US" dirty="0"/>
+              <a:t>之前的所有</a:t>
+            </a:r>
+            <a:r>
+              <a:rPr lang="en-US" altLang="zh-CN" dirty="0" err="1"/>
+              <a:t>w_lane_id</a:t>
+            </a:r>
+            <a:endParaRPr lang="en-US" altLang="zh-CN" dirty="0"/>
+          </a:p>
+          <a:p>
+            <a:r>
+              <a:rPr lang="en-US" altLang="zh-CN" dirty="0" err="1"/>
+              <a:t>next_w_lane_id</a:t>
+            </a:r>
+            <a:r>
+              <a:rPr lang="en-US" altLang="zh-CN" dirty="0"/>
+              <a:t> # </a:t>
+            </a:r>
+            <a:r>
+              <a:rPr lang="zh-CN" altLang="en-US" dirty="0"/>
+              <a:t>之后所有的</a:t>
+            </a:r>
+            <a:r>
+              <a:rPr lang="en-US" altLang="zh-CN" dirty="0" err="1"/>
+              <a:t>w_lane_id</a:t>
+            </a:r>
+            <a:endParaRPr lang="zh-CN" altLang="en-US" dirty="0"/>
+          </a:p>
+        </p:txBody>
+      </p:sp>
+      <p:sp>
+        <p:nvSpPr>
+          <p:cNvPr id="8" name="矩形 7">
+            <a:extLst>
+              <a:ext uri="{FF2B5EF4-FFF2-40B4-BE49-F238E27FC236}">
+                <a16:creationId xmlns:a16="http://schemas.microsoft.com/office/drawing/2014/main" id="{56D778E3-A78F-498C-80B1-493937F93071}"/>
+              </a:ext>
+            </a:extLst>
+          </p:cNvPr>
+          <p:cNvSpPr/>
+          <p:nvPr/>
+        </p:nvSpPr>
+        <p:spPr>
+          <a:xfrm>
+            <a:off x="6284194" y="847131"/>
+            <a:ext cx="4543097" cy="689570"/>
+          </a:xfrm>
+          <a:prstGeom prst="rect">
+            <a:avLst/>
+          </a:prstGeom>
+          <a:noFill/>
+          <a:ln w="25400">
+            <a:solidFill>
+              <a:schemeClr val="tx1"/>
+            </a:solidFill>
+            <a:prstDash val="sysDash"/>
+          </a:ln>
+        </p:spPr>
+        <p:style>
+          <a:lnRef idx="2">
+            <a:schemeClr val="accent1">
+              <a:shade val="50000"/>
+            </a:schemeClr>
+          </a:lnRef>
+          <a:fillRef idx="1">
+            <a:schemeClr val="accent1"/>
+          </a:fillRef>
+          <a:effectRef idx="0">
+            <a:schemeClr val="accent1"/>
+          </a:effectRef>
+          <a:fontRef idx="minor">
+            <a:schemeClr val="lt1"/>
+          </a:fontRef>
+        </p:style>
+        <p:txBody>
+          <a:bodyPr rtlCol="0" anchor="ctr"/>
+          <a:lstStyle/>
+          <a:p>
+            <a:pPr algn="ctr"/>
+            <a:endParaRPr lang="zh-CN" altLang="en-US" dirty="0"/>
+          </a:p>
+        </p:txBody>
+      </p:sp>
+      <p:sp>
+        <p:nvSpPr>
+          <p:cNvPr id="9" name="文本框 8">
+            <a:extLst>
+              <a:ext uri="{FF2B5EF4-FFF2-40B4-BE49-F238E27FC236}">
+                <a16:creationId xmlns:a16="http://schemas.microsoft.com/office/drawing/2014/main" id="{278E150D-86BB-4FAE-85A7-5F8868B407A8}"/>
+              </a:ext>
+            </a:extLst>
+          </p:cNvPr>
+          <p:cNvSpPr txBox="1"/>
+          <p:nvPr/>
+        </p:nvSpPr>
+        <p:spPr>
+          <a:xfrm>
+            <a:off x="6284193" y="823460"/>
+            <a:ext cx="1292341" cy="369332"/>
+          </a:xfrm>
+          <a:prstGeom prst="rect">
+            <a:avLst/>
+          </a:prstGeom>
+          <a:noFill/>
+        </p:spPr>
+        <p:txBody>
+          <a:bodyPr wrap="none" rtlCol="0">
+            <a:spAutoFit/>
+          </a:bodyPr>
+          <a:lstStyle/>
+          <a:p>
+            <a:r>
+              <a:rPr lang="en-US" altLang="zh-CN" dirty="0" err="1"/>
+              <a:t>oob_points</a:t>
+            </a:r>
+            <a:endParaRPr lang="zh-CN" altLang="en-US" dirty="0"/>
+          </a:p>
+        </p:txBody>
+      </p:sp>
+      <p:sp>
+        <p:nvSpPr>
+          <p:cNvPr id="10" name="文本框 9">
+            <a:extLst>
+              <a:ext uri="{FF2B5EF4-FFF2-40B4-BE49-F238E27FC236}">
+                <a16:creationId xmlns:a16="http://schemas.microsoft.com/office/drawing/2014/main" id="{D1BAEB24-8A73-4C99-A2C6-18CD4FB8D71D}"/>
+              </a:ext>
+            </a:extLst>
+          </p:cNvPr>
+          <p:cNvSpPr txBox="1"/>
+          <p:nvPr/>
+        </p:nvSpPr>
+        <p:spPr>
+          <a:xfrm>
+            <a:off x="6677890" y="1165508"/>
+            <a:ext cx="4149401" cy="369332"/>
+          </a:xfrm>
+          <a:prstGeom prst="rect">
+            <a:avLst/>
+          </a:prstGeom>
+          <a:noFill/>
+        </p:spPr>
+        <p:txBody>
+          <a:bodyPr wrap="square" rtlCol="0">
+            <a:spAutoFit/>
+          </a:bodyPr>
+          <a:lstStyle/>
+          <a:p>
+            <a:r>
+              <a:rPr lang="en-US" altLang="zh-CN" dirty="0" err="1"/>
+              <a:t>x,y,z</a:t>
+            </a:r>
+            <a:endParaRPr lang="zh-CN" altLang="en-US" dirty="0"/>
+          </a:p>
+        </p:txBody>
+      </p:sp>
+      <p:sp>
+        <p:nvSpPr>
+          <p:cNvPr id="11" name="矩形 10">
+            <a:extLst>
+              <a:ext uri="{FF2B5EF4-FFF2-40B4-BE49-F238E27FC236}">
+                <a16:creationId xmlns:a16="http://schemas.microsoft.com/office/drawing/2014/main" id="{077F9D57-952C-40E0-9DB4-1F079EED83CC}"/>
+              </a:ext>
+            </a:extLst>
+          </p:cNvPr>
+          <p:cNvSpPr/>
+          <p:nvPr/>
+        </p:nvSpPr>
+        <p:spPr>
+          <a:xfrm>
+            <a:off x="6233889" y="1722545"/>
+            <a:ext cx="4543097" cy="2318983"/>
+          </a:xfrm>
+          <a:prstGeom prst="rect">
+            <a:avLst/>
+          </a:prstGeom>
+          <a:noFill/>
+          <a:ln w="25400">
+            <a:solidFill>
+              <a:schemeClr val="tx1"/>
+            </a:solidFill>
+            <a:prstDash val="sysDash"/>
+          </a:ln>
+        </p:spPr>
+        <p:style>
+          <a:lnRef idx="2">
+            <a:schemeClr val="accent1">
+              <a:shade val="50000"/>
+            </a:schemeClr>
+          </a:lnRef>
+          <a:fillRef idx="1">
+            <a:schemeClr val="accent1"/>
+          </a:fillRef>
+          <a:effectRef idx="0">
+            <a:schemeClr val="accent1"/>
+          </a:effectRef>
+          <a:fontRef idx="minor">
+            <a:schemeClr val="lt1"/>
+          </a:fontRef>
+        </p:style>
+        <p:txBody>
+          <a:bodyPr rtlCol="0" anchor="ctr"/>
+          <a:lstStyle/>
+          <a:p>
+            <a:pPr algn="ctr"/>
+            <a:endParaRPr lang="zh-CN" altLang="en-US" dirty="0"/>
+          </a:p>
+        </p:txBody>
+      </p:sp>
+      <p:sp>
+        <p:nvSpPr>
+          <p:cNvPr id="12" name="文本框 11">
+            <a:extLst>
+              <a:ext uri="{FF2B5EF4-FFF2-40B4-BE49-F238E27FC236}">
+                <a16:creationId xmlns:a16="http://schemas.microsoft.com/office/drawing/2014/main" id="{3F02A7A9-6150-41B6-BDE6-A39DA7120858}"/>
+              </a:ext>
+            </a:extLst>
+          </p:cNvPr>
+          <p:cNvSpPr txBox="1"/>
+          <p:nvPr/>
+        </p:nvSpPr>
+        <p:spPr>
+          <a:xfrm>
+            <a:off x="6284194" y="1736131"/>
+            <a:ext cx="949299" cy="369332"/>
+          </a:xfrm>
+          <a:prstGeom prst="rect">
+            <a:avLst/>
+          </a:prstGeom>
+          <a:noFill/>
+        </p:spPr>
+        <p:txBody>
+          <a:bodyPr wrap="none" rtlCol="0">
+            <a:spAutoFit/>
+          </a:bodyPr>
+          <a:lstStyle/>
+          <a:p>
+            <a:r>
+              <a:rPr lang="en-US" altLang="zh-CN" dirty="0" err="1"/>
+              <a:t>w_lanes</a:t>
+            </a:r>
+            <a:endParaRPr lang="zh-CN" altLang="en-US" dirty="0"/>
+          </a:p>
+        </p:txBody>
+      </p:sp>
+      <p:sp>
+        <p:nvSpPr>
+          <p:cNvPr id="13" name="文本框 12">
+            <a:extLst>
+              <a:ext uri="{FF2B5EF4-FFF2-40B4-BE49-F238E27FC236}">
+                <a16:creationId xmlns:a16="http://schemas.microsoft.com/office/drawing/2014/main" id="{8135797E-B6C3-4309-9185-EBFA8209B1F4}"/>
+              </a:ext>
+            </a:extLst>
+          </p:cNvPr>
+          <p:cNvSpPr txBox="1"/>
+          <p:nvPr/>
+        </p:nvSpPr>
+        <p:spPr>
+          <a:xfrm>
+            <a:off x="6677890" y="2304893"/>
+            <a:ext cx="4149401" cy="1477328"/>
+          </a:xfrm>
+          <a:prstGeom prst="rect">
+            <a:avLst/>
+          </a:prstGeom>
+          <a:noFill/>
+        </p:spPr>
+        <p:txBody>
+          <a:bodyPr wrap="square" rtlCol="0">
+            <a:spAutoFit/>
+          </a:bodyPr>
+          <a:lstStyle/>
+          <a:p>
+            <a:r>
+              <a:rPr lang="en-US" altLang="zh-CN" dirty="0" err="1"/>
+              <a:t>w_lane_id</a:t>
+            </a:r>
+            <a:r>
+              <a:rPr lang="en-US" altLang="zh-CN" dirty="0"/>
+              <a:t>	#</a:t>
+            </a:r>
+            <a:r>
+              <a:rPr lang="zh-CN" altLang="en-US" dirty="0"/>
+              <a:t>唯一标志</a:t>
+            </a:r>
+            <a:endParaRPr lang="en-US" altLang="zh-CN" dirty="0"/>
+          </a:p>
+          <a:p>
+            <a:r>
+              <a:rPr lang="en-US" altLang="zh-CN" dirty="0"/>
+              <a:t>road_id		#</a:t>
+            </a:r>
+          </a:p>
+          <a:p>
+            <a:r>
+              <a:rPr lang="en-US" altLang="zh-CN" dirty="0"/>
+              <a:t>lane_id		#</a:t>
+            </a:r>
+          </a:p>
+          <a:p>
+            <a:r>
+              <a:rPr lang="en-US" altLang="zh-CN" dirty="0"/>
+              <a:t>center		#</a:t>
+            </a:r>
+            <a:r>
+              <a:rPr lang="zh-CN" altLang="en-US" dirty="0"/>
+              <a:t>中心坐标</a:t>
+            </a:r>
+            <a:endParaRPr lang="en-US" altLang="zh-CN" dirty="0"/>
+          </a:p>
+          <a:p>
+            <a:r>
+              <a:rPr lang="en-US" altLang="zh-CN" dirty="0"/>
+              <a:t>width		#</a:t>
+            </a:r>
+            <a:r>
+              <a:rPr lang="zh-CN" altLang="en-US" dirty="0"/>
+              <a:t>路宽</a:t>
+            </a:r>
+          </a:p>
+        </p:txBody>
+      </p:sp>
+      <p:sp>
+        <p:nvSpPr>
+          <p:cNvPr id="17" name="矩形 16">
+            <a:extLst>
+              <a:ext uri="{FF2B5EF4-FFF2-40B4-BE49-F238E27FC236}">
+                <a16:creationId xmlns:a16="http://schemas.microsoft.com/office/drawing/2014/main" id="{8C8BB71D-CF46-40D1-903D-8530F39E86DA}"/>
+              </a:ext>
+            </a:extLst>
+          </p:cNvPr>
+          <p:cNvSpPr/>
+          <p:nvPr/>
+        </p:nvSpPr>
+        <p:spPr>
+          <a:xfrm>
+            <a:off x="1534394" y="4220867"/>
+            <a:ext cx="9292896" cy="1878026"/>
+          </a:xfrm>
+          <a:prstGeom prst="rect">
+            <a:avLst/>
+          </a:prstGeom>
+          <a:noFill/>
+          <a:ln w="25400">
+            <a:solidFill>
+              <a:schemeClr val="tx1"/>
+            </a:solidFill>
+            <a:prstDash val="sysDash"/>
+          </a:ln>
+        </p:spPr>
+        <p:style>
+          <a:lnRef idx="2">
+            <a:schemeClr val="accent1">
+              <a:shade val="50000"/>
+            </a:schemeClr>
+          </a:lnRef>
+          <a:fillRef idx="1">
+            <a:schemeClr val="accent1"/>
+          </a:fillRef>
+          <a:effectRef idx="0">
+            <a:schemeClr val="accent1"/>
+          </a:effectRef>
+          <a:fontRef idx="minor">
+            <a:schemeClr val="lt1"/>
+          </a:fontRef>
+        </p:style>
+        <p:txBody>
+          <a:bodyPr rtlCol="0" anchor="ctr"/>
+          <a:lstStyle/>
+          <a:p>
+            <a:pPr algn="ctr"/>
+            <a:endParaRPr lang="zh-CN" altLang="en-US" dirty="0"/>
+          </a:p>
+        </p:txBody>
+      </p:sp>
+      <p:sp>
+        <p:nvSpPr>
+          <p:cNvPr id="18" name="文本框 17">
+            <a:extLst>
+              <a:ext uri="{FF2B5EF4-FFF2-40B4-BE49-F238E27FC236}">
+                <a16:creationId xmlns:a16="http://schemas.microsoft.com/office/drawing/2014/main" id="{D807DB14-E6E7-43A5-B6E3-D9587C5F286C}"/>
+              </a:ext>
+            </a:extLst>
+          </p:cNvPr>
+          <p:cNvSpPr txBox="1"/>
+          <p:nvPr/>
+        </p:nvSpPr>
+        <p:spPr>
+          <a:xfrm>
+            <a:off x="1534393" y="4216109"/>
+            <a:ext cx="1141659" cy="369332"/>
+          </a:xfrm>
+          <a:prstGeom prst="rect">
+            <a:avLst/>
+          </a:prstGeom>
+          <a:noFill/>
+        </p:spPr>
+        <p:txBody>
+          <a:bodyPr wrap="none" rtlCol="0">
+            <a:spAutoFit/>
+          </a:bodyPr>
+          <a:lstStyle/>
+          <a:p>
+            <a:r>
+              <a:rPr lang="en-US" altLang="zh-CN" dirty="0"/>
+              <a:t>geometry</a:t>
+            </a:r>
+            <a:endParaRPr lang="zh-CN" altLang="en-US" dirty="0"/>
+          </a:p>
+        </p:txBody>
+      </p:sp>
+      <p:sp>
+        <p:nvSpPr>
+          <p:cNvPr id="19" name="文本框 18">
+            <a:extLst>
+              <a:ext uri="{FF2B5EF4-FFF2-40B4-BE49-F238E27FC236}">
+                <a16:creationId xmlns:a16="http://schemas.microsoft.com/office/drawing/2014/main" id="{5D991474-CA4D-4084-9A22-5CDB97293F8C}"/>
+              </a:ext>
+            </a:extLst>
+          </p:cNvPr>
+          <p:cNvSpPr txBox="1"/>
+          <p:nvPr/>
+        </p:nvSpPr>
+        <p:spPr>
+          <a:xfrm>
+            <a:off x="1928090" y="4585441"/>
+            <a:ext cx="4149401" cy="1477328"/>
+          </a:xfrm>
+          <a:prstGeom prst="rect">
+            <a:avLst/>
+          </a:prstGeom>
+          <a:noFill/>
+        </p:spPr>
+        <p:txBody>
+          <a:bodyPr wrap="square" rtlCol="0">
+            <a:spAutoFit/>
+          </a:bodyPr>
+          <a:lstStyle/>
+          <a:p>
+            <a:r>
+              <a:rPr lang="en-US" altLang="zh-CN" dirty="0"/>
+              <a:t>road_id	#</a:t>
+            </a:r>
+          </a:p>
+          <a:p>
+            <a:r>
+              <a:rPr lang="en-US" altLang="zh-CN" dirty="0"/>
+              <a:t>lane_id	#</a:t>
+            </a:r>
+          </a:p>
+          <a:p>
+            <a:r>
+              <a:rPr lang="en-US" altLang="zh-CN" dirty="0" err="1"/>
+              <a:t>start_poly_id</a:t>
+            </a:r>
+            <a:endParaRPr lang="en-US" altLang="zh-CN" dirty="0"/>
+          </a:p>
+          <a:p>
+            <a:r>
+              <a:rPr lang="en-US" altLang="zh-CN" dirty="0" err="1"/>
+              <a:t>end_poly_id</a:t>
+            </a:r>
+            <a:endParaRPr lang="en-US" altLang="zh-CN" dirty="0"/>
+          </a:p>
+          <a:p>
+            <a:r>
+              <a:rPr lang="en-US" altLang="zh-CN" dirty="0"/>
+              <a:t>layer	#</a:t>
+            </a:r>
+            <a:r>
+              <a:rPr lang="zh-CN" altLang="en-US" dirty="0"/>
+              <a:t>可以区分路类型、区分立交</a:t>
+            </a:r>
+            <a:endParaRPr lang="en-US" altLang="zh-CN" dirty="0"/>
+          </a:p>
+        </p:txBody>
+      </p:sp>
+      <p:sp>
+        <p:nvSpPr>
+          <p:cNvPr id="20" name="文本框 19">
+            <a:extLst>
+              <a:ext uri="{FF2B5EF4-FFF2-40B4-BE49-F238E27FC236}">
+                <a16:creationId xmlns:a16="http://schemas.microsoft.com/office/drawing/2014/main" id="{1D942E49-D5A9-41A3-905A-5FBF7006D86E}"/>
+              </a:ext>
+            </a:extLst>
+          </p:cNvPr>
+          <p:cNvSpPr txBox="1"/>
+          <p:nvPr/>
+        </p:nvSpPr>
+        <p:spPr>
+          <a:xfrm>
+            <a:off x="6471187" y="4579545"/>
+            <a:ext cx="4149401" cy="923330"/>
+          </a:xfrm>
+          <a:prstGeom prst="rect">
+            <a:avLst/>
+          </a:prstGeom>
+          <a:noFill/>
+        </p:spPr>
+        <p:txBody>
+          <a:bodyPr wrap="square" rtlCol="0">
+            <a:spAutoFit/>
+          </a:bodyPr>
+          <a:lstStyle/>
+          <a:p>
+            <a:r>
+              <a:rPr lang="en-US" altLang="zh-CN" dirty="0"/>
+              <a:t>start	#x,y,z</a:t>
+            </a:r>
+          </a:p>
+          <a:p>
+            <a:r>
+              <a:rPr lang="en-US" altLang="zh-CN" dirty="0"/>
+              <a:t>end	#x,y,z</a:t>
+            </a:r>
+          </a:p>
+          <a:p>
+            <a:r>
+              <a:rPr lang="en-US" altLang="zh-CN" dirty="0"/>
+              <a:t>length 	#lane</a:t>
+            </a:r>
+            <a:r>
+              <a:rPr lang="zh-CN" altLang="en-US" dirty="0"/>
+              <a:t>长度</a:t>
+            </a:r>
+            <a:endParaRPr lang="en-US" altLang="zh-CN" dirty="0"/>
+          </a:p>
+        </p:txBody>
+      </p:sp>
+    </p:spTree>
+    <p:extLst>
+      <p:ext uri="{BB962C8B-B14F-4D97-AF65-F5344CB8AC3E}">
+        <p14:creationId xmlns:p14="http://schemas.microsoft.com/office/powerpoint/2010/main" val="3406159784"/>
+      </p:ext>
+    </p:extLst>
+  </p:cSld>
+  <p:clrMapOvr>
+    <a:masterClrMapping/>
+  </p:clrMapOvr>
+</p:sld>
+</file>
+
+<file path=ppt/slides/slide2.xml><?xml version="1.0" encoding="utf-8"?>
+<p:sld xmlns:a="http://schemas.openxmlformats.org/drawingml/2006/main" xmlns:r="http://schemas.openxmlformats.org/officeDocument/2006/relationships" xmlns:p="http://schemas.openxmlformats.org/presentationml/2006/main">
+  <p:cSld>
+    <p:spTree>
+      <p:nvGrpSpPr>
+        <p:cNvPr id="1" name=""/>
+        <p:cNvGrpSpPr/>
+        <p:nvPr/>
+      </p:nvGrpSpPr>
+      <p:grpSpPr>
+        <a:xfrm>
+          <a:off x="0" y="0"/>
+          <a:ext cx="0" cy="0"/>
+          <a:chOff x="0" y="0"/>
+          <a:chExt cx="0" cy="0"/>
+        </a:xfrm>
+      </p:grpSpPr>
+      <p:sp>
+        <p:nvSpPr>
+          <p:cNvPr id="4" name="矩形 3">
+            <a:extLst>
+              <a:ext uri="{FF2B5EF4-FFF2-40B4-BE49-F238E27FC236}">
+                <a16:creationId xmlns:a16="http://schemas.microsoft.com/office/drawing/2014/main" id="{6BFAEBC0-626B-4ECD-A85F-E848EA864ED8}"/>
+              </a:ext>
+            </a:extLst>
+          </p:cNvPr>
+          <p:cNvSpPr/>
+          <p:nvPr/>
+        </p:nvSpPr>
+        <p:spPr>
+          <a:xfrm>
+            <a:off x="1841771" y="40640"/>
+            <a:ext cx="2476500" cy="6756400"/>
+          </a:xfrm>
+          <a:prstGeom prst="rect">
+            <a:avLst/>
+          </a:prstGeom>
+          <a:noFill/>
+          <a:ln w="25400">
+            <a:solidFill>
+              <a:schemeClr val="tx1"/>
+            </a:solidFill>
+            <a:prstDash val="sysDash"/>
+          </a:ln>
+        </p:spPr>
+        <p:style>
+          <a:lnRef idx="2">
+            <a:schemeClr val="accent1">
+              <a:shade val="50000"/>
+            </a:schemeClr>
+          </a:lnRef>
+          <a:fillRef idx="1">
+            <a:schemeClr val="accent1"/>
+          </a:fillRef>
+          <a:effectRef idx="0">
+            <a:schemeClr val="accent1"/>
+          </a:effectRef>
+          <a:fontRef idx="minor">
+            <a:schemeClr val="lt1"/>
+          </a:fontRef>
+        </p:style>
+        <p:txBody>
+          <a:bodyPr rtlCol="0" anchor="ctr"/>
+          <a:lstStyle/>
+          <a:p>
+            <a:pPr algn="ctr"/>
+            <a:endParaRPr lang="zh-CN" altLang="en-US" dirty="0"/>
+          </a:p>
+        </p:txBody>
+      </p:sp>
+      <p:sp>
+        <p:nvSpPr>
+          <p:cNvPr id="6" name="文本框 5">
+            <a:extLst>
+              <a:ext uri="{FF2B5EF4-FFF2-40B4-BE49-F238E27FC236}">
+                <a16:creationId xmlns:a16="http://schemas.microsoft.com/office/drawing/2014/main" id="{D6A35F19-A81B-4EBC-A1BC-3F95897E8A7E}"/>
+              </a:ext>
+            </a:extLst>
+          </p:cNvPr>
+          <p:cNvSpPr txBox="1"/>
+          <p:nvPr/>
+        </p:nvSpPr>
+        <p:spPr>
+          <a:xfrm>
+            <a:off x="28205" y="0"/>
+            <a:ext cx="1569660" cy="461665"/>
+          </a:xfrm>
+          <a:prstGeom prst="rect">
+            <a:avLst/>
+          </a:prstGeom>
+          <a:noFill/>
+        </p:spPr>
+        <p:txBody>
+          <a:bodyPr wrap="none" rtlCol="0">
+            <a:spAutoFit/>
+          </a:bodyPr>
+          <a:lstStyle/>
+          <a:p>
+            <a:r>
+              <a:rPr lang="en-US" altLang="zh-CN" sz="2400" b="1" dirty="0">
+                <a:latin typeface="Arial" panose="020B0604020202020204" pitchFamily="34" charset="0"/>
+                <a:cs typeface="Arial" panose="020B0604020202020204" pitchFamily="34" charset="0"/>
+              </a:rPr>
+              <a:t>simulator</a:t>
+            </a:r>
+            <a:endParaRPr lang="zh-CN" altLang="en-US" sz="2400" b="1" dirty="0">
+              <a:latin typeface="Arial" panose="020B0604020202020204" pitchFamily="34" charset="0"/>
+              <a:cs typeface="Arial" panose="020B0604020202020204" pitchFamily="34" charset="0"/>
+            </a:endParaRPr>
+          </a:p>
+        </p:txBody>
+      </p:sp>
+      <p:sp>
+        <p:nvSpPr>
+          <p:cNvPr id="8" name="矩形 7">
+            <a:extLst>
+              <a:ext uri="{FF2B5EF4-FFF2-40B4-BE49-F238E27FC236}">
+                <a16:creationId xmlns:a16="http://schemas.microsoft.com/office/drawing/2014/main" id="{93E208AF-F3B9-4103-9E9C-BA707E75D178}"/>
+              </a:ext>
+            </a:extLst>
+          </p:cNvPr>
+          <p:cNvSpPr/>
+          <p:nvPr/>
+        </p:nvSpPr>
+        <p:spPr>
+          <a:xfrm>
+            <a:off x="2243562" y="900114"/>
+            <a:ext cx="1663705" cy="461665"/>
+          </a:xfrm>
+          <a:prstGeom prst="rect">
+            <a:avLst/>
+          </a:prstGeom>
+        </p:spPr>
+        <p:style>
+          <a:lnRef idx="2">
+            <a:schemeClr val="accent1">
+              <a:shade val="50000"/>
+            </a:schemeClr>
+          </a:lnRef>
+          <a:fillRef idx="1">
+            <a:schemeClr val="accent1"/>
+          </a:fillRef>
+          <a:effectRef idx="0">
+            <a:schemeClr val="accent1"/>
+          </a:effectRef>
+          <a:fontRef idx="minor">
+            <a:schemeClr val="lt1"/>
+          </a:fontRef>
+        </p:style>
+        <p:txBody>
+          <a:bodyPr rtlCol="0" anchor="ctr"/>
+          <a:lstStyle/>
+          <a:p>
+            <a:pPr algn="ctr"/>
+            <a:r>
+              <a:rPr lang="en-US" altLang="zh-CN" b="1" dirty="0" err="1">
+                <a:latin typeface="Arial" panose="020B0604020202020204" pitchFamily="34" charset="0"/>
+                <a:cs typeface="Arial" panose="020B0604020202020204" pitchFamily="34" charset="0"/>
+              </a:rPr>
+              <a:t>spacial_hash</a:t>
+            </a:r>
+            <a:endParaRPr lang="zh-CN" altLang="en-US" b="1" dirty="0">
+              <a:latin typeface="Arial" panose="020B0604020202020204" pitchFamily="34" charset="0"/>
+              <a:cs typeface="Arial" panose="020B0604020202020204" pitchFamily="34" charset="0"/>
+            </a:endParaRPr>
+          </a:p>
+        </p:txBody>
+      </p:sp>
+      <p:sp>
+        <p:nvSpPr>
+          <p:cNvPr id="9" name="矩形 8">
+            <a:extLst>
+              <a:ext uri="{FF2B5EF4-FFF2-40B4-BE49-F238E27FC236}">
+                <a16:creationId xmlns:a16="http://schemas.microsoft.com/office/drawing/2014/main" id="{C03FC096-07A3-4E1C-9837-59FBDD5FB5B7}"/>
+              </a:ext>
+            </a:extLst>
+          </p:cNvPr>
+          <p:cNvSpPr/>
+          <p:nvPr/>
+        </p:nvSpPr>
+        <p:spPr>
+          <a:xfrm>
+            <a:off x="2528254" y="134044"/>
+            <a:ext cx="1094322" cy="461665"/>
+          </a:xfrm>
+          <a:prstGeom prst="rect">
+            <a:avLst/>
+          </a:prstGeom>
+        </p:spPr>
+        <p:style>
+          <a:lnRef idx="2">
+            <a:schemeClr val="accent1">
+              <a:shade val="50000"/>
+            </a:schemeClr>
+          </a:lnRef>
+          <a:fillRef idx="1">
+            <a:schemeClr val="accent1"/>
+          </a:fillRef>
+          <a:effectRef idx="0">
+            <a:schemeClr val="accent1"/>
+          </a:effectRef>
+          <a:fontRef idx="minor">
+            <a:schemeClr val="lt1"/>
+          </a:fontRef>
+        </p:style>
+        <p:txBody>
+          <a:bodyPr rtlCol="0" anchor="ctr"/>
+          <a:lstStyle/>
+          <a:p>
+            <a:pPr algn="ctr"/>
+            <a:r>
+              <a:rPr lang="en-US" altLang="zh-CN" b="1" dirty="0" err="1">
+                <a:solidFill>
+                  <a:schemeClr val="bg1"/>
+                </a:solidFill>
+                <a:latin typeface="Arial" panose="020B0604020202020204" pitchFamily="34" charset="0"/>
+                <a:cs typeface="Arial" panose="020B0604020202020204" pitchFamily="34" charset="0"/>
+                <a:hlinkClick r:id="rId2" action="ppaction://hlinksldjump">
+                  <a:extLst>
+                    <a:ext uri="{A12FA001-AC4F-418D-AE19-62706E023703}">
+                      <ahyp:hlinkClr xmlns:ahyp="http://schemas.microsoft.com/office/drawing/2018/hyperlinkcolor" val="tx"/>
+                    </a:ext>
+                  </a:extLst>
+                </a:hlinkClick>
+              </a:rPr>
+              <a:t>roadnet</a:t>
+            </a:r>
+            <a:endParaRPr lang="zh-CN" altLang="en-US" b="1" dirty="0">
+              <a:solidFill>
+                <a:schemeClr val="bg1"/>
+              </a:solidFill>
+              <a:latin typeface="Arial" panose="020B0604020202020204" pitchFamily="34" charset="0"/>
+              <a:cs typeface="Arial" panose="020B0604020202020204" pitchFamily="34" charset="0"/>
+            </a:endParaRPr>
+          </a:p>
+        </p:txBody>
+      </p:sp>
+      <p:sp>
+        <p:nvSpPr>
+          <p:cNvPr id="10" name="矩形 9">
+            <a:extLst>
+              <a:ext uri="{FF2B5EF4-FFF2-40B4-BE49-F238E27FC236}">
+                <a16:creationId xmlns:a16="http://schemas.microsoft.com/office/drawing/2014/main" id="{43879487-BD92-4C0D-AB67-C90065D17A17}"/>
+              </a:ext>
+            </a:extLst>
+          </p:cNvPr>
+          <p:cNvSpPr/>
+          <p:nvPr/>
+        </p:nvSpPr>
+        <p:spPr>
+          <a:xfrm>
+            <a:off x="2116034" y="1666184"/>
+            <a:ext cx="1918759" cy="461665"/>
+          </a:xfrm>
+          <a:prstGeom prst="rect">
+            <a:avLst/>
+          </a:prstGeom>
+        </p:spPr>
+        <p:style>
+          <a:lnRef idx="2">
+            <a:schemeClr val="accent1">
+              <a:shade val="50000"/>
+            </a:schemeClr>
+          </a:lnRef>
+          <a:fillRef idx="1">
+            <a:schemeClr val="accent1"/>
+          </a:fillRef>
+          <a:effectRef idx="0">
+            <a:schemeClr val="accent1"/>
+          </a:effectRef>
+          <a:fontRef idx="minor">
+            <a:schemeClr val="lt1"/>
+          </a:fontRef>
+        </p:style>
+        <p:txBody>
+          <a:bodyPr rtlCol="0" anchor="ctr"/>
+          <a:lstStyle/>
+          <a:p>
+            <a:pPr algn="ctr"/>
+            <a:r>
+              <a:rPr lang="en-US" altLang="zh-CN" b="1" dirty="0" err="1">
+                <a:latin typeface="Arial" panose="020B0604020202020204" pitchFamily="34" charset="0"/>
+                <a:cs typeface="Arial" panose="020B0604020202020204" pitchFamily="34" charset="0"/>
+              </a:rPr>
+              <a:t>offroadchecker</a:t>
+            </a:r>
+            <a:endParaRPr lang="zh-CN" altLang="en-US" b="1" dirty="0">
+              <a:latin typeface="Arial" panose="020B0604020202020204" pitchFamily="34" charset="0"/>
+              <a:cs typeface="Arial" panose="020B0604020202020204" pitchFamily="34" charset="0"/>
+            </a:endParaRPr>
+          </a:p>
+        </p:txBody>
+      </p:sp>
+      <p:sp>
+        <p:nvSpPr>
+          <p:cNvPr id="11" name="矩形 10">
+            <a:extLst>
+              <a:ext uri="{FF2B5EF4-FFF2-40B4-BE49-F238E27FC236}">
+                <a16:creationId xmlns:a16="http://schemas.microsoft.com/office/drawing/2014/main" id="{79D53907-1C02-4270-B0F2-FB2A2C686243}"/>
+              </a:ext>
+            </a:extLst>
+          </p:cNvPr>
+          <p:cNvSpPr/>
+          <p:nvPr/>
+        </p:nvSpPr>
+        <p:spPr>
+          <a:xfrm>
+            <a:off x="2116033" y="2432254"/>
+            <a:ext cx="1918759" cy="461665"/>
+          </a:xfrm>
+          <a:prstGeom prst="rect">
+            <a:avLst/>
+          </a:prstGeom>
+        </p:spPr>
+        <p:style>
+          <a:lnRef idx="2">
+            <a:schemeClr val="accent1">
+              <a:shade val="50000"/>
+            </a:schemeClr>
+          </a:lnRef>
+          <a:fillRef idx="1">
+            <a:schemeClr val="accent1"/>
+          </a:fillRef>
+          <a:effectRef idx="0">
+            <a:schemeClr val="accent1"/>
+          </a:effectRef>
+          <a:fontRef idx="minor">
+            <a:schemeClr val="lt1"/>
+          </a:fontRef>
+        </p:style>
+        <p:txBody>
+          <a:bodyPr rtlCol="0" anchor="ctr"/>
+          <a:lstStyle/>
+          <a:p>
+            <a:pPr algn="ctr"/>
+            <a:r>
+              <a:rPr lang="en-US" altLang="zh-CN" b="1" dirty="0" err="1">
+                <a:latin typeface="Arial" panose="020B0604020202020204" pitchFamily="34" charset="0"/>
+                <a:cs typeface="Arial" panose="020B0604020202020204" pitchFamily="34" charset="0"/>
+              </a:rPr>
+              <a:t>Collisioncheck</a:t>
+            </a:r>
+            <a:endParaRPr lang="zh-CN" altLang="en-US" b="1" dirty="0">
+              <a:latin typeface="Arial" panose="020B0604020202020204" pitchFamily="34" charset="0"/>
+              <a:cs typeface="Arial" panose="020B0604020202020204" pitchFamily="34" charset="0"/>
+            </a:endParaRPr>
+          </a:p>
+        </p:txBody>
+      </p:sp>
+      <p:sp>
+        <p:nvSpPr>
+          <p:cNvPr id="12" name="矩形 11">
+            <a:extLst>
+              <a:ext uri="{FF2B5EF4-FFF2-40B4-BE49-F238E27FC236}">
+                <a16:creationId xmlns:a16="http://schemas.microsoft.com/office/drawing/2014/main" id="{C3CCAB00-A325-4B30-A9F9-2E0B7CD20B8A}"/>
+              </a:ext>
+            </a:extLst>
+          </p:cNvPr>
+          <p:cNvSpPr/>
+          <p:nvPr/>
+        </p:nvSpPr>
+        <p:spPr>
+          <a:xfrm>
+            <a:off x="2116032" y="3198324"/>
+            <a:ext cx="1918759" cy="461665"/>
+          </a:xfrm>
+          <a:prstGeom prst="rect">
+            <a:avLst/>
+          </a:prstGeom>
+        </p:spPr>
+        <p:style>
+          <a:lnRef idx="2">
+            <a:schemeClr val="accent1">
+              <a:shade val="50000"/>
+            </a:schemeClr>
+          </a:lnRef>
+          <a:fillRef idx="1">
+            <a:schemeClr val="accent1"/>
+          </a:fillRef>
+          <a:effectRef idx="0">
+            <a:schemeClr val="accent1"/>
+          </a:effectRef>
+          <a:fontRef idx="minor">
+            <a:schemeClr val="lt1"/>
+          </a:fontRef>
+        </p:style>
+        <p:txBody>
+          <a:bodyPr rtlCol="0" anchor="ctr"/>
+          <a:lstStyle/>
+          <a:p>
+            <a:pPr algn="ctr"/>
+            <a:r>
+              <a:rPr lang="en-US" altLang="zh-CN" b="1" dirty="0" err="1">
+                <a:latin typeface="Arial" panose="020B0604020202020204" pitchFamily="34" charset="0"/>
+                <a:cs typeface="Arial" panose="020B0604020202020204" pitchFamily="34" charset="0"/>
+              </a:rPr>
+              <a:t>Worldinit</a:t>
+            </a:r>
+            <a:endParaRPr lang="zh-CN" altLang="en-US" b="1" dirty="0">
+              <a:latin typeface="Arial" panose="020B0604020202020204" pitchFamily="34" charset="0"/>
+              <a:cs typeface="Arial" panose="020B0604020202020204" pitchFamily="34" charset="0"/>
+            </a:endParaRPr>
+          </a:p>
+        </p:txBody>
+      </p:sp>
+      <p:sp>
+        <p:nvSpPr>
+          <p:cNvPr id="13" name="矩形 12">
+            <a:extLst>
+              <a:ext uri="{FF2B5EF4-FFF2-40B4-BE49-F238E27FC236}">
+                <a16:creationId xmlns:a16="http://schemas.microsoft.com/office/drawing/2014/main" id="{EBEFB008-1C9B-4CD5-9AD2-742DC6EDED1B}"/>
+              </a:ext>
+            </a:extLst>
+          </p:cNvPr>
+          <p:cNvSpPr/>
+          <p:nvPr/>
+        </p:nvSpPr>
+        <p:spPr>
+          <a:xfrm>
+            <a:off x="2116031" y="3964394"/>
+            <a:ext cx="1918759" cy="461665"/>
+          </a:xfrm>
+          <a:prstGeom prst="rect">
+            <a:avLst/>
+          </a:prstGeom>
+        </p:spPr>
+        <p:style>
+          <a:lnRef idx="2">
+            <a:schemeClr val="accent1">
+              <a:shade val="50000"/>
+            </a:schemeClr>
+          </a:lnRef>
+          <a:fillRef idx="1">
+            <a:schemeClr val="accent1"/>
+          </a:fillRef>
+          <a:effectRef idx="0">
+            <a:schemeClr val="accent1"/>
+          </a:effectRef>
+          <a:fontRef idx="minor">
+            <a:schemeClr val="lt1"/>
+          </a:fontRef>
+        </p:style>
+        <p:txBody>
+          <a:bodyPr rtlCol="0" anchor="ctr"/>
+          <a:lstStyle/>
+          <a:p>
+            <a:pPr algn="ctr"/>
+            <a:r>
+              <a:rPr lang="en-US" altLang="zh-CN" b="1" dirty="0">
+                <a:latin typeface="Arial" panose="020B0604020202020204" pitchFamily="34" charset="0"/>
+                <a:cs typeface="Arial" panose="020B0604020202020204" pitchFamily="34" charset="0"/>
+              </a:rPr>
+              <a:t>dynamics</a:t>
+            </a:r>
+            <a:endParaRPr lang="zh-CN" altLang="en-US" b="1" dirty="0">
+              <a:latin typeface="Arial" panose="020B0604020202020204" pitchFamily="34" charset="0"/>
+              <a:cs typeface="Arial" panose="020B0604020202020204" pitchFamily="34" charset="0"/>
+            </a:endParaRPr>
+          </a:p>
+        </p:txBody>
+      </p:sp>
+      <p:sp>
+        <p:nvSpPr>
+          <p:cNvPr id="14" name="矩形 13">
+            <a:extLst>
+              <a:ext uri="{FF2B5EF4-FFF2-40B4-BE49-F238E27FC236}">
+                <a16:creationId xmlns:a16="http://schemas.microsoft.com/office/drawing/2014/main" id="{6D94735F-BA47-484B-919C-42FBCC4913D6}"/>
+              </a:ext>
+            </a:extLst>
+          </p:cNvPr>
+          <p:cNvSpPr/>
+          <p:nvPr/>
+        </p:nvSpPr>
+        <p:spPr>
+          <a:xfrm>
+            <a:off x="2116031" y="4730464"/>
+            <a:ext cx="1918759" cy="461665"/>
+          </a:xfrm>
+          <a:prstGeom prst="rect">
+            <a:avLst/>
+          </a:prstGeom>
+        </p:spPr>
+        <p:style>
+          <a:lnRef idx="2">
+            <a:schemeClr val="accent1">
+              <a:shade val="50000"/>
+            </a:schemeClr>
+          </a:lnRef>
+          <a:fillRef idx="1">
+            <a:schemeClr val="accent1"/>
+          </a:fillRef>
+          <a:effectRef idx="0">
+            <a:schemeClr val="accent1"/>
+          </a:effectRef>
+          <a:fontRef idx="minor">
+            <a:schemeClr val="lt1"/>
+          </a:fontRef>
+        </p:style>
+        <p:txBody>
+          <a:bodyPr rtlCol="0" anchor="ctr"/>
+          <a:lstStyle/>
+          <a:p>
+            <a:pPr algn="ctr"/>
+            <a:r>
+              <a:rPr lang="en-US" altLang="zh-CN" b="1" dirty="0">
+                <a:latin typeface="Arial" panose="020B0604020202020204" pitchFamily="34" charset="0"/>
+                <a:cs typeface="Arial" panose="020B0604020202020204" pitchFamily="34" charset="0"/>
+              </a:rPr>
+              <a:t>observation</a:t>
+            </a:r>
+            <a:endParaRPr lang="zh-CN" altLang="en-US" b="1" dirty="0">
+              <a:latin typeface="Arial" panose="020B0604020202020204" pitchFamily="34" charset="0"/>
+              <a:cs typeface="Arial" panose="020B0604020202020204" pitchFamily="34" charset="0"/>
+            </a:endParaRPr>
+          </a:p>
+        </p:txBody>
+      </p:sp>
+      <p:sp>
+        <p:nvSpPr>
+          <p:cNvPr id="15" name="矩形 14">
+            <a:extLst>
+              <a:ext uri="{FF2B5EF4-FFF2-40B4-BE49-F238E27FC236}">
+                <a16:creationId xmlns:a16="http://schemas.microsoft.com/office/drawing/2014/main" id="{E9BBADBE-2190-41AF-8171-682D77BFF31B}"/>
+              </a:ext>
+            </a:extLst>
+          </p:cNvPr>
+          <p:cNvSpPr/>
+          <p:nvPr/>
+        </p:nvSpPr>
+        <p:spPr>
+          <a:xfrm>
+            <a:off x="2116031" y="5496534"/>
+            <a:ext cx="1918759" cy="461665"/>
+          </a:xfrm>
+          <a:prstGeom prst="rect">
+            <a:avLst/>
+          </a:prstGeom>
+        </p:spPr>
+        <p:style>
+          <a:lnRef idx="2">
+            <a:schemeClr val="accent1">
+              <a:shade val="50000"/>
+            </a:schemeClr>
+          </a:lnRef>
+          <a:fillRef idx="1">
+            <a:schemeClr val="accent1"/>
+          </a:fillRef>
+          <a:effectRef idx="0">
+            <a:schemeClr val="accent1"/>
+          </a:effectRef>
+          <a:fontRef idx="minor">
+            <a:schemeClr val="lt1"/>
+          </a:fontRef>
+        </p:style>
+        <p:txBody>
+          <a:bodyPr rtlCol="0" anchor="ctr"/>
+          <a:lstStyle/>
+          <a:p>
+            <a:pPr algn="ctr"/>
+            <a:r>
+              <a:rPr lang="en-US" altLang="zh-CN" b="1" dirty="0">
+                <a:latin typeface="Arial" panose="020B0604020202020204" pitchFamily="34" charset="0"/>
+                <a:cs typeface="Arial" panose="020B0604020202020204" pitchFamily="34" charset="0"/>
+              </a:rPr>
+              <a:t>reward</a:t>
+            </a:r>
+            <a:endParaRPr lang="zh-CN" altLang="en-US" b="1" dirty="0">
+              <a:latin typeface="Arial" panose="020B0604020202020204" pitchFamily="34" charset="0"/>
+              <a:cs typeface="Arial" panose="020B0604020202020204" pitchFamily="34" charset="0"/>
+            </a:endParaRPr>
+          </a:p>
+        </p:txBody>
+      </p:sp>
+      <p:sp>
+        <p:nvSpPr>
+          <p:cNvPr id="16" name="矩形 15">
+            <a:extLst>
+              <a:ext uri="{FF2B5EF4-FFF2-40B4-BE49-F238E27FC236}">
+                <a16:creationId xmlns:a16="http://schemas.microsoft.com/office/drawing/2014/main" id="{A3D19D4B-AB94-4A3D-930D-EB3D68FBA74E}"/>
+              </a:ext>
+            </a:extLst>
+          </p:cNvPr>
+          <p:cNvSpPr/>
+          <p:nvPr/>
+        </p:nvSpPr>
+        <p:spPr>
+          <a:xfrm>
+            <a:off x="2116031" y="6262604"/>
+            <a:ext cx="1918759" cy="461665"/>
+          </a:xfrm>
+          <a:prstGeom prst="rect">
+            <a:avLst/>
+          </a:prstGeom>
+        </p:spPr>
+        <p:style>
+          <a:lnRef idx="2">
+            <a:schemeClr val="accent1">
+              <a:shade val="50000"/>
+            </a:schemeClr>
+          </a:lnRef>
+          <a:fillRef idx="1">
+            <a:schemeClr val="accent1"/>
+          </a:fillRef>
+          <a:effectRef idx="0">
+            <a:schemeClr val="accent1"/>
+          </a:effectRef>
+          <a:fontRef idx="minor">
+            <a:schemeClr val="lt1"/>
+          </a:fontRef>
+        </p:style>
+        <p:txBody>
+          <a:bodyPr rtlCol="0" anchor="ctr"/>
+          <a:lstStyle/>
+          <a:p>
+            <a:pPr algn="ctr"/>
+            <a:r>
+              <a:rPr lang="en-US" altLang="zh-CN" b="1" dirty="0" err="1">
+                <a:latin typeface="Arial" panose="020B0604020202020204" pitchFamily="34" charset="0"/>
+                <a:cs typeface="Arial" panose="020B0604020202020204" pitchFamily="34" charset="0"/>
+              </a:rPr>
+              <a:t>Pathplanner</a:t>
+            </a:r>
+            <a:endParaRPr lang="zh-CN" altLang="en-US" b="1" dirty="0">
+              <a:latin typeface="Arial" panose="020B0604020202020204" pitchFamily="34" charset="0"/>
+              <a:cs typeface="Arial" panose="020B0604020202020204" pitchFamily="34" charset="0"/>
+            </a:endParaRPr>
+          </a:p>
+        </p:txBody>
+      </p:sp>
+      <p:sp>
+        <p:nvSpPr>
+          <p:cNvPr id="17" name="矩形 16">
+            <a:extLst>
+              <a:ext uri="{FF2B5EF4-FFF2-40B4-BE49-F238E27FC236}">
+                <a16:creationId xmlns:a16="http://schemas.microsoft.com/office/drawing/2014/main" id="{68CE1AC0-B06C-4DB3-A678-E86857B64586}"/>
+              </a:ext>
+            </a:extLst>
+          </p:cNvPr>
+          <p:cNvSpPr/>
+          <p:nvPr/>
+        </p:nvSpPr>
+        <p:spPr>
+          <a:xfrm>
+            <a:off x="4464858" y="152400"/>
+            <a:ext cx="7511242" cy="774700"/>
+          </a:xfrm>
+          <a:prstGeom prst="rect">
+            <a:avLst/>
+          </a:prstGeom>
+          <a:noFill/>
+          <a:ln w="25400">
+            <a:solidFill>
+              <a:schemeClr val="tx1"/>
+            </a:solidFill>
+            <a:prstDash val="sysDash"/>
+          </a:ln>
+        </p:spPr>
+        <p:style>
+          <a:lnRef idx="2">
+            <a:schemeClr val="accent1">
+              <a:shade val="50000"/>
+            </a:schemeClr>
+          </a:lnRef>
+          <a:fillRef idx="1">
+            <a:schemeClr val="accent1"/>
+          </a:fillRef>
+          <a:effectRef idx="0">
+            <a:schemeClr val="accent1"/>
+          </a:effectRef>
+          <a:fontRef idx="minor">
+            <a:schemeClr val="lt1"/>
+          </a:fontRef>
+        </p:style>
+        <p:txBody>
+          <a:bodyPr rtlCol="0" anchor="ctr"/>
+          <a:lstStyle/>
+          <a:p>
+            <a:pPr algn="ctr"/>
+            <a:endParaRPr lang="zh-CN" altLang="en-US" dirty="0"/>
+          </a:p>
+        </p:txBody>
+      </p:sp>
+      <p:sp>
+        <p:nvSpPr>
+          <p:cNvPr id="18" name="矩形 17">
+            <a:extLst>
+              <a:ext uri="{FF2B5EF4-FFF2-40B4-BE49-F238E27FC236}">
+                <a16:creationId xmlns:a16="http://schemas.microsoft.com/office/drawing/2014/main" id="{F3A322F8-FC4C-4984-A8B5-69C86CC788F0}"/>
+              </a:ext>
+            </a:extLst>
+          </p:cNvPr>
+          <p:cNvSpPr/>
+          <p:nvPr/>
+        </p:nvSpPr>
+        <p:spPr>
+          <a:xfrm>
+            <a:off x="4673084" y="286443"/>
+            <a:ext cx="886888" cy="461665"/>
+          </a:xfrm>
+          <a:prstGeom prst="rect">
+            <a:avLst/>
+          </a:prstGeom>
+        </p:spPr>
+        <p:style>
+          <a:lnRef idx="2">
+            <a:schemeClr val="accent1">
+              <a:shade val="50000"/>
+            </a:schemeClr>
+          </a:lnRef>
+          <a:fillRef idx="1">
+            <a:schemeClr val="accent1"/>
+          </a:fillRef>
+          <a:effectRef idx="0">
+            <a:schemeClr val="accent1"/>
+          </a:effectRef>
+          <a:fontRef idx="minor">
+            <a:schemeClr val="lt1"/>
+          </a:fontRef>
+        </p:style>
+        <p:txBody>
+          <a:bodyPr rtlCol="0" anchor="ctr"/>
+          <a:lstStyle/>
+          <a:p>
+            <a:pPr algn="ctr"/>
+            <a:r>
+              <a:rPr lang="en-US" altLang="zh-CN" b="1" dirty="0">
+                <a:solidFill>
+                  <a:schemeClr val="bg1"/>
+                </a:solidFill>
+                <a:latin typeface="Arial" panose="020B0604020202020204" pitchFamily="34" charset="0"/>
+                <a:cs typeface="Arial" panose="020B0604020202020204" pitchFamily="34" charset="0"/>
+              </a:rPr>
+              <a:t>state</a:t>
+            </a:r>
+            <a:endParaRPr lang="zh-CN" altLang="en-US" b="1" dirty="0">
+              <a:solidFill>
+                <a:schemeClr val="bg1"/>
+              </a:solidFill>
+              <a:latin typeface="Arial" panose="020B0604020202020204" pitchFamily="34" charset="0"/>
+              <a:cs typeface="Arial" panose="020B0604020202020204" pitchFamily="34" charset="0"/>
+            </a:endParaRPr>
+          </a:p>
+        </p:txBody>
+      </p:sp>
+      <p:sp>
+        <p:nvSpPr>
+          <p:cNvPr id="19" name="矩形 18">
+            <a:extLst>
+              <a:ext uri="{FF2B5EF4-FFF2-40B4-BE49-F238E27FC236}">
+                <a16:creationId xmlns:a16="http://schemas.microsoft.com/office/drawing/2014/main" id="{573AE681-936A-4142-9EB4-615A6A1FB8AC}"/>
+              </a:ext>
+            </a:extLst>
+          </p:cNvPr>
+          <p:cNvSpPr/>
+          <p:nvPr/>
+        </p:nvSpPr>
+        <p:spPr>
+          <a:xfrm>
+            <a:off x="7679161" y="1226623"/>
+            <a:ext cx="1375939" cy="461665"/>
+          </a:xfrm>
+          <a:prstGeom prst="rect">
+            <a:avLst/>
+          </a:prstGeom>
+        </p:spPr>
+        <p:style>
+          <a:lnRef idx="2">
+            <a:schemeClr val="accent1">
+              <a:shade val="50000"/>
+            </a:schemeClr>
+          </a:lnRef>
+          <a:fillRef idx="1">
+            <a:schemeClr val="accent1"/>
+          </a:fillRef>
+          <a:effectRef idx="0">
+            <a:schemeClr val="accent1"/>
+          </a:effectRef>
+          <a:fontRef idx="minor">
+            <a:schemeClr val="lt1"/>
+          </a:fontRef>
+        </p:style>
+        <p:txBody>
+          <a:bodyPr rtlCol="0" anchor="ctr"/>
+          <a:lstStyle/>
+          <a:p>
+            <a:pPr algn="ctr"/>
+            <a:r>
+              <a:rPr lang="en-US" altLang="zh-CN" b="1" dirty="0" err="1">
+                <a:solidFill>
+                  <a:schemeClr val="bg1"/>
+                </a:solidFill>
+                <a:latin typeface="Arial" panose="020B0604020202020204" pitchFamily="34" charset="0"/>
+                <a:cs typeface="Arial" panose="020B0604020202020204" pitchFamily="34" charset="0"/>
+              </a:rPr>
+              <a:t>startquad</a:t>
+            </a:r>
+            <a:endParaRPr lang="zh-CN" altLang="en-US" b="1" dirty="0">
+              <a:solidFill>
+                <a:schemeClr val="bg1"/>
+              </a:solidFill>
+              <a:latin typeface="Arial" panose="020B0604020202020204" pitchFamily="34" charset="0"/>
+              <a:cs typeface="Arial" panose="020B0604020202020204" pitchFamily="34" charset="0"/>
+            </a:endParaRPr>
+          </a:p>
+        </p:txBody>
+      </p:sp>
+      <p:sp>
+        <p:nvSpPr>
+          <p:cNvPr id="20" name="矩形 19">
+            <a:extLst>
+              <a:ext uri="{FF2B5EF4-FFF2-40B4-BE49-F238E27FC236}">
+                <a16:creationId xmlns:a16="http://schemas.microsoft.com/office/drawing/2014/main" id="{EABD843E-6A0F-4DCF-842D-448C8335CB74}"/>
+              </a:ext>
+            </a:extLst>
+          </p:cNvPr>
+          <p:cNvSpPr/>
+          <p:nvPr/>
+        </p:nvSpPr>
+        <p:spPr>
+          <a:xfrm>
+            <a:off x="10417106" y="1226622"/>
+            <a:ext cx="1375939" cy="461665"/>
+          </a:xfrm>
+          <a:prstGeom prst="rect">
+            <a:avLst/>
+          </a:prstGeom>
+        </p:spPr>
+        <p:style>
+          <a:lnRef idx="2">
+            <a:schemeClr val="accent1">
+              <a:shade val="50000"/>
+            </a:schemeClr>
+          </a:lnRef>
+          <a:fillRef idx="1">
+            <a:schemeClr val="accent1"/>
+          </a:fillRef>
+          <a:effectRef idx="0">
+            <a:schemeClr val="accent1"/>
+          </a:effectRef>
+          <a:fontRef idx="minor">
+            <a:schemeClr val="lt1"/>
+          </a:fontRef>
+        </p:style>
+        <p:txBody>
+          <a:bodyPr rtlCol="0" anchor="ctr"/>
+          <a:lstStyle/>
+          <a:p>
+            <a:pPr algn="ctr"/>
+            <a:r>
+              <a:rPr lang="en-US" altLang="zh-CN" b="1" dirty="0" err="1">
+                <a:solidFill>
+                  <a:schemeClr val="bg1"/>
+                </a:solidFill>
+                <a:latin typeface="Arial" panose="020B0604020202020204" pitchFamily="34" charset="0"/>
+                <a:cs typeface="Arial" panose="020B0604020202020204" pitchFamily="34" charset="0"/>
+              </a:rPr>
+              <a:t>goal_quad</a:t>
+            </a:r>
+            <a:endParaRPr lang="zh-CN" altLang="en-US" b="1" dirty="0">
+              <a:solidFill>
+                <a:schemeClr val="bg1"/>
+              </a:solidFill>
+              <a:latin typeface="Arial" panose="020B0604020202020204" pitchFamily="34" charset="0"/>
+              <a:cs typeface="Arial" panose="020B0604020202020204" pitchFamily="34" charset="0"/>
+            </a:endParaRPr>
+          </a:p>
+        </p:txBody>
+      </p:sp>
+      <p:sp>
+        <p:nvSpPr>
+          <p:cNvPr id="21" name="矩形 20">
+            <a:extLst>
+              <a:ext uri="{FF2B5EF4-FFF2-40B4-BE49-F238E27FC236}">
+                <a16:creationId xmlns:a16="http://schemas.microsoft.com/office/drawing/2014/main" id="{67FECF27-A9CE-4E92-A473-C8430F6E246F}"/>
+              </a:ext>
+            </a:extLst>
+          </p:cNvPr>
+          <p:cNvSpPr/>
+          <p:nvPr/>
+        </p:nvSpPr>
+        <p:spPr>
+          <a:xfrm>
+            <a:off x="5768198" y="254283"/>
+            <a:ext cx="4435444" cy="461665"/>
+          </a:xfrm>
+          <a:prstGeom prst="rect">
+            <a:avLst/>
+          </a:prstGeom>
+        </p:spPr>
+        <p:style>
+          <a:lnRef idx="2">
+            <a:schemeClr val="accent1">
+              <a:shade val="50000"/>
+            </a:schemeClr>
+          </a:lnRef>
+          <a:fillRef idx="1">
+            <a:schemeClr val="accent1"/>
+          </a:fillRef>
+          <a:effectRef idx="0">
+            <a:schemeClr val="accent1"/>
+          </a:effectRef>
+          <a:fontRef idx="minor">
+            <a:schemeClr val="lt1"/>
+          </a:fontRef>
+        </p:style>
+        <p:txBody>
+          <a:bodyPr rtlCol="0" anchor="ctr"/>
+          <a:lstStyle/>
+          <a:p>
+            <a:pPr algn="ctr"/>
+            <a:r>
+              <a:rPr lang="en-US" altLang="zh-CN" b="1" dirty="0">
+                <a:solidFill>
+                  <a:schemeClr val="bg1"/>
+                </a:solidFill>
+                <a:latin typeface="Arial" panose="020B0604020202020204" pitchFamily="34" charset="0"/>
+                <a:cs typeface="Arial" panose="020B0604020202020204" pitchFamily="34" charset="0"/>
+              </a:rPr>
+              <a:t>params(dynamics\style\reward\goal..)</a:t>
+            </a:r>
+            <a:endParaRPr lang="zh-CN" altLang="en-US" b="1" dirty="0">
+              <a:solidFill>
+                <a:schemeClr val="bg1"/>
+              </a:solidFill>
+              <a:latin typeface="Arial" panose="020B0604020202020204" pitchFamily="34" charset="0"/>
+              <a:cs typeface="Arial" panose="020B0604020202020204" pitchFamily="34" charset="0"/>
+            </a:endParaRPr>
+          </a:p>
+        </p:txBody>
+      </p:sp>
+      <p:cxnSp>
+        <p:nvCxnSpPr>
+          <p:cNvPr id="3" name="直接箭头连接符 2">
+            <a:extLst>
+              <a:ext uri="{FF2B5EF4-FFF2-40B4-BE49-F238E27FC236}">
+                <a16:creationId xmlns:a16="http://schemas.microsoft.com/office/drawing/2014/main" id="{DD9CEDAE-CEA2-4E4F-90A2-DE8EF08ED530}"/>
+              </a:ext>
+            </a:extLst>
+          </p:cNvPr>
+          <p:cNvCxnSpPr>
+            <a:stCxn id="19" idx="3"/>
+            <a:endCxn id="20" idx="1"/>
+          </p:cNvCxnSpPr>
+          <p:nvPr/>
+        </p:nvCxnSpPr>
+        <p:spPr>
+          <a:xfrm flipV="1">
+            <a:off x="9055100" y="1457455"/>
+            <a:ext cx="1362006" cy="1"/>
+          </a:xfrm>
+          <a:prstGeom prst="straightConnector1">
+            <a:avLst/>
+          </a:prstGeom>
+          <a:ln>
+            <a:tailEnd type="triangle"/>
+          </a:ln>
+        </p:spPr>
+        <p:style>
+          <a:lnRef idx="1">
+            <a:schemeClr val="dk1"/>
+          </a:lnRef>
+          <a:fillRef idx="0">
+            <a:schemeClr val="dk1"/>
+          </a:fillRef>
+          <a:effectRef idx="0">
+            <a:schemeClr val="dk1"/>
+          </a:effectRef>
+          <a:fontRef idx="minor">
+            <a:schemeClr val="tx1"/>
+          </a:fontRef>
+        </p:style>
+      </p:cxnSp>
+      <p:sp>
+        <p:nvSpPr>
+          <p:cNvPr id="5" name="文本框 4">
+            <a:extLst>
+              <a:ext uri="{FF2B5EF4-FFF2-40B4-BE49-F238E27FC236}">
+                <a16:creationId xmlns:a16="http://schemas.microsoft.com/office/drawing/2014/main" id="{B9876255-6D80-41A6-B153-B953606FDD19}"/>
+              </a:ext>
+            </a:extLst>
+          </p:cNvPr>
+          <p:cNvSpPr txBox="1"/>
+          <p:nvPr/>
+        </p:nvSpPr>
+        <p:spPr>
+          <a:xfrm>
+            <a:off x="9015026" y="1048763"/>
+            <a:ext cx="1383712" cy="369332"/>
+          </a:xfrm>
+          <a:prstGeom prst="rect">
+            <a:avLst/>
+          </a:prstGeom>
+          <a:noFill/>
+        </p:spPr>
+        <p:txBody>
+          <a:bodyPr wrap="none" rtlCol="0">
+            <a:spAutoFit/>
+          </a:bodyPr>
+          <a:lstStyle/>
+          <a:p>
+            <a:r>
+              <a:rPr lang="en-US" altLang="zh-CN" dirty="0" err="1"/>
+              <a:t>pathplanner</a:t>
+            </a:r>
+            <a:endParaRPr lang="zh-CN" altLang="en-US" dirty="0"/>
+          </a:p>
+        </p:txBody>
+      </p:sp>
+      <p:sp>
+        <p:nvSpPr>
+          <p:cNvPr id="22" name="矩形 21">
+            <a:extLst>
+              <a:ext uri="{FF2B5EF4-FFF2-40B4-BE49-F238E27FC236}">
+                <a16:creationId xmlns:a16="http://schemas.microsoft.com/office/drawing/2014/main" id="{2D54C8B7-97C9-4756-9AF9-BBD14D76608C}"/>
+              </a:ext>
+            </a:extLst>
+          </p:cNvPr>
+          <p:cNvSpPr/>
+          <p:nvPr/>
+        </p:nvSpPr>
+        <p:spPr>
+          <a:xfrm>
+            <a:off x="10350229" y="254283"/>
+            <a:ext cx="1501165" cy="461665"/>
+          </a:xfrm>
+          <a:prstGeom prst="rect">
+            <a:avLst/>
+          </a:prstGeom>
+        </p:spPr>
+        <p:style>
+          <a:lnRef idx="2">
+            <a:schemeClr val="accent1">
+              <a:shade val="50000"/>
+            </a:schemeClr>
+          </a:lnRef>
+          <a:fillRef idx="1">
+            <a:schemeClr val="accent1"/>
+          </a:fillRef>
+          <a:effectRef idx="0">
+            <a:schemeClr val="accent1"/>
+          </a:effectRef>
+          <a:fontRef idx="minor">
+            <a:schemeClr val="lt1"/>
+          </a:fontRef>
+        </p:style>
+        <p:txBody>
+          <a:bodyPr rtlCol="0" anchor="ctr"/>
+          <a:lstStyle/>
+          <a:p>
+            <a:pPr algn="ctr"/>
+            <a:r>
+              <a:rPr lang="en-US" altLang="zh-CN" b="1" dirty="0" err="1">
+                <a:solidFill>
+                  <a:schemeClr val="bg1"/>
+                </a:solidFill>
+                <a:latin typeface="Arial" panose="020B0604020202020204" pitchFamily="34" charset="0"/>
+                <a:cs typeface="Arial" panose="020B0604020202020204" pitchFamily="34" charset="0"/>
+              </a:rPr>
+              <a:t>Done_mask</a:t>
+            </a:r>
+            <a:endParaRPr lang="zh-CN" altLang="en-US" b="1" dirty="0">
+              <a:solidFill>
+                <a:schemeClr val="bg1"/>
+              </a:solidFill>
+              <a:latin typeface="Arial" panose="020B0604020202020204" pitchFamily="34" charset="0"/>
+              <a:cs typeface="Arial" panose="020B0604020202020204" pitchFamily="34" charset="0"/>
+            </a:endParaRPr>
+          </a:p>
+        </p:txBody>
+      </p:sp>
+      <p:sp>
+        <p:nvSpPr>
+          <p:cNvPr id="23" name="矩形 22">
+            <a:extLst>
+              <a:ext uri="{FF2B5EF4-FFF2-40B4-BE49-F238E27FC236}">
+                <a16:creationId xmlns:a16="http://schemas.microsoft.com/office/drawing/2014/main" id="{12D9FE91-4CA6-4965-8DA5-D7B9FF0A9779}"/>
+              </a:ext>
+            </a:extLst>
+          </p:cNvPr>
+          <p:cNvSpPr/>
+          <p:nvPr/>
+        </p:nvSpPr>
+        <p:spPr>
+          <a:xfrm>
+            <a:off x="5240076" y="1948449"/>
+            <a:ext cx="6736023" cy="873569"/>
+          </a:xfrm>
+          <a:prstGeom prst="rect">
+            <a:avLst/>
+          </a:prstGeom>
+          <a:noFill/>
+          <a:ln w="25400">
+            <a:solidFill>
+              <a:schemeClr val="tx1"/>
+            </a:solidFill>
+            <a:prstDash val="sysDash"/>
+          </a:ln>
+        </p:spPr>
+        <p:style>
+          <a:lnRef idx="2">
+            <a:schemeClr val="accent1">
+              <a:shade val="50000"/>
+            </a:schemeClr>
+          </a:lnRef>
+          <a:fillRef idx="1">
+            <a:schemeClr val="accent1"/>
+          </a:fillRef>
+          <a:effectRef idx="0">
+            <a:schemeClr val="accent1"/>
+          </a:effectRef>
+          <a:fontRef idx="minor">
+            <a:schemeClr val="lt1"/>
+          </a:fontRef>
+        </p:style>
+        <p:txBody>
+          <a:bodyPr rtlCol="0" anchor="ctr"/>
+          <a:lstStyle/>
+          <a:p>
+            <a:pPr algn="ctr"/>
+            <a:endParaRPr lang="zh-CN" altLang="en-US" dirty="0"/>
+          </a:p>
+        </p:txBody>
+      </p:sp>
+      <p:cxnSp>
+        <p:nvCxnSpPr>
+          <p:cNvPr id="24" name="直接箭头连接符 23">
+            <a:extLst>
+              <a:ext uri="{FF2B5EF4-FFF2-40B4-BE49-F238E27FC236}">
+                <a16:creationId xmlns:a16="http://schemas.microsoft.com/office/drawing/2014/main" id="{834F8414-A53A-4EAB-B866-04E3ED209B07}"/>
+              </a:ext>
+            </a:extLst>
+          </p:cNvPr>
+          <p:cNvCxnSpPr>
+            <a:cxnSpLocks/>
+            <a:stCxn id="5" idx="2"/>
+          </p:cNvCxnSpPr>
+          <p:nvPr/>
+        </p:nvCxnSpPr>
+        <p:spPr>
+          <a:xfrm>
+            <a:off x="9706882" y="1418095"/>
+            <a:ext cx="0" cy="530355"/>
+          </a:xfrm>
+          <a:prstGeom prst="straightConnector1">
+            <a:avLst/>
+          </a:prstGeom>
+          <a:ln>
+            <a:tailEnd type="triangle"/>
+          </a:ln>
+        </p:spPr>
+        <p:style>
+          <a:lnRef idx="1">
+            <a:schemeClr val="accent1"/>
+          </a:lnRef>
+          <a:fillRef idx="0">
+            <a:schemeClr val="accent1"/>
+          </a:fillRef>
+          <a:effectRef idx="0">
+            <a:schemeClr val="accent1"/>
+          </a:effectRef>
+          <a:fontRef idx="minor">
+            <a:schemeClr val="tx1"/>
+          </a:fontRef>
+        </p:style>
+      </p:cxnSp>
+      <p:sp>
+        <p:nvSpPr>
+          <p:cNvPr id="25" name="矩形 24">
+            <a:extLst>
+              <a:ext uri="{FF2B5EF4-FFF2-40B4-BE49-F238E27FC236}">
+                <a16:creationId xmlns:a16="http://schemas.microsoft.com/office/drawing/2014/main" id="{3C45C8FB-A28E-4322-8525-22673E40DA94}"/>
+              </a:ext>
+            </a:extLst>
+          </p:cNvPr>
+          <p:cNvSpPr/>
+          <p:nvPr/>
+        </p:nvSpPr>
+        <p:spPr>
+          <a:xfrm>
+            <a:off x="5328257" y="2127441"/>
+            <a:ext cx="2058524" cy="461665"/>
+          </a:xfrm>
+          <a:prstGeom prst="rect">
+            <a:avLst/>
+          </a:prstGeom>
+        </p:spPr>
+        <p:style>
+          <a:lnRef idx="2">
+            <a:schemeClr val="accent1">
+              <a:shade val="50000"/>
+            </a:schemeClr>
+          </a:lnRef>
+          <a:fillRef idx="1">
+            <a:schemeClr val="accent1"/>
+          </a:fillRef>
+          <a:effectRef idx="0">
+            <a:schemeClr val="accent1"/>
+          </a:effectRef>
+          <a:fontRef idx="minor">
+            <a:schemeClr val="lt1"/>
+          </a:fontRef>
+        </p:style>
+        <p:txBody>
+          <a:bodyPr rtlCol="0" anchor="ctr"/>
+          <a:lstStyle/>
+          <a:p>
+            <a:pPr algn="ctr"/>
+            <a:r>
+              <a:rPr lang="en-US" altLang="zh-CN" b="1" dirty="0" err="1">
+                <a:solidFill>
+                  <a:schemeClr val="bg1"/>
+                </a:solidFill>
+                <a:latin typeface="Arial" panose="020B0604020202020204" pitchFamily="34" charset="0"/>
+                <a:cs typeface="Arial" panose="020B0604020202020204" pitchFamily="34" charset="0"/>
+              </a:rPr>
+              <a:t>Valid_mask</a:t>
+            </a:r>
+            <a:r>
+              <a:rPr lang="en-US" altLang="zh-CN" b="1" dirty="0">
+                <a:solidFill>
+                  <a:schemeClr val="bg1"/>
+                </a:solidFill>
+                <a:latin typeface="Arial" panose="020B0604020202020204" pitchFamily="34" charset="0"/>
+                <a:cs typeface="Arial" panose="020B0604020202020204" pitchFamily="34" charset="0"/>
+              </a:rPr>
+              <a:t>(path)</a:t>
+            </a:r>
+            <a:endParaRPr lang="zh-CN" altLang="en-US" b="1" dirty="0">
+              <a:solidFill>
+                <a:schemeClr val="bg1"/>
+              </a:solidFill>
+              <a:latin typeface="Arial" panose="020B0604020202020204" pitchFamily="34" charset="0"/>
+              <a:cs typeface="Arial" panose="020B0604020202020204" pitchFamily="34" charset="0"/>
+            </a:endParaRPr>
+          </a:p>
+        </p:txBody>
+      </p:sp>
+      <p:sp>
+        <p:nvSpPr>
+          <p:cNvPr id="26" name="矩形 25">
+            <a:extLst>
+              <a:ext uri="{FF2B5EF4-FFF2-40B4-BE49-F238E27FC236}">
+                <a16:creationId xmlns:a16="http://schemas.microsoft.com/office/drawing/2014/main" id="{ACB354AD-AD56-4658-AADD-AD761EE0805F}"/>
+              </a:ext>
+            </a:extLst>
+          </p:cNvPr>
+          <p:cNvSpPr/>
+          <p:nvPr/>
+        </p:nvSpPr>
+        <p:spPr>
+          <a:xfrm>
+            <a:off x="7533367" y="2127440"/>
+            <a:ext cx="2404107" cy="461665"/>
+          </a:xfrm>
+          <a:prstGeom prst="rect">
+            <a:avLst/>
+          </a:prstGeom>
+        </p:spPr>
+        <p:style>
+          <a:lnRef idx="2">
+            <a:schemeClr val="accent1">
+              <a:shade val="50000"/>
+            </a:schemeClr>
+          </a:lnRef>
+          <a:fillRef idx="1">
+            <a:schemeClr val="accent1"/>
+          </a:fillRef>
+          <a:effectRef idx="0">
+            <a:schemeClr val="accent1"/>
+          </a:effectRef>
+          <a:fontRef idx="minor">
+            <a:schemeClr val="lt1"/>
+          </a:fontRef>
+        </p:style>
+        <p:txBody>
+          <a:bodyPr rtlCol="0" anchor="ctr"/>
+          <a:lstStyle/>
+          <a:p>
+            <a:pPr algn="ctr"/>
+            <a:r>
+              <a:rPr lang="en-US" altLang="zh-CN" b="1" dirty="0" err="1">
+                <a:solidFill>
+                  <a:schemeClr val="bg1"/>
+                </a:solidFill>
+                <a:latin typeface="Arial" panose="020B0604020202020204" pitchFamily="34" charset="0"/>
+                <a:cs typeface="Arial" panose="020B0604020202020204" pitchFamily="34" charset="0"/>
+              </a:rPr>
+              <a:t>Valid_mask</a:t>
+            </a:r>
+            <a:r>
+              <a:rPr lang="en-US" altLang="zh-CN" b="1" dirty="0">
+                <a:solidFill>
+                  <a:schemeClr val="bg1"/>
+                </a:solidFill>
+                <a:latin typeface="Arial" panose="020B0604020202020204" pitchFamily="34" charset="0"/>
+                <a:cs typeface="Arial" panose="020B0604020202020204" pitchFamily="34" charset="0"/>
+              </a:rPr>
+              <a:t>(w_lanes)</a:t>
+            </a:r>
+            <a:endParaRPr lang="zh-CN" altLang="en-US" b="1" dirty="0">
+              <a:solidFill>
+                <a:schemeClr val="bg1"/>
+              </a:solidFill>
+              <a:latin typeface="Arial" panose="020B0604020202020204" pitchFamily="34" charset="0"/>
+              <a:cs typeface="Arial" panose="020B0604020202020204" pitchFamily="34" charset="0"/>
+            </a:endParaRPr>
+          </a:p>
+        </p:txBody>
+      </p:sp>
+      <p:sp>
+        <p:nvSpPr>
+          <p:cNvPr id="27" name="矩形 26">
+            <a:extLst>
+              <a:ext uri="{FF2B5EF4-FFF2-40B4-BE49-F238E27FC236}">
+                <a16:creationId xmlns:a16="http://schemas.microsoft.com/office/drawing/2014/main" id="{9D70047A-F2B1-4F1F-9EE5-326CFFE64819}"/>
+              </a:ext>
+            </a:extLst>
+          </p:cNvPr>
+          <p:cNvSpPr/>
+          <p:nvPr/>
+        </p:nvSpPr>
+        <p:spPr>
+          <a:xfrm>
+            <a:off x="10053139" y="2122989"/>
+            <a:ext cx="548480" cy="461665"/>
+          </a:xfrm>
+          <a:prstGeom prst="rect">
+            <a:avLst/>
+          </a:prstGeom>
+        </p:spPr>
+        <p:style>
+          <a:lnRef idx="2">
+            <a:schemeClr val="accent1">
+              <a:shade val="50000"/>
+            </a:schemeClr>
+          </a:lnRef>
+          <a:fillRef idx="1">
+            <a:schemeClr val="accent1"/>
+          </a:fillRef>
+          <a:effectRef idx="0">
+            <a:schemeClr val="accent1"/>
+          </a:effectRef>
+          <a:fontRef idx="minor">
+            <a:schemeClr val="lt1"/>
+          </a:fontRef>
+        </p:style>
+        <p:txBody>
+          <a:bodyPr rtlCol="0" anchor="ctr"/>
+          <a:lstStyle/>
+          <a:p>
+            <a:pPr algn="ctr"/>
+            <a:r>
+              <a:rPr lang="en-US" altLang="zh-CN" b="1" dirty="0" err="1">
+                <a:solidFill>
+                  <a:schemeClr val="bg1"/>
+                </a:solidFill>
+                <a:latin typeface="Arial" panose="020B0604020202020204" pitchFamily="34" charset="0"/>
+                <a:cs typeface="Arial" panose="020B0604020202020204" pitchFamily="34" charset="0"/>
+              </a:rPr>
+              <a:t>Δs</a:t>
+            </a:r>
+            <a:endParaRPr lang="zh-CN" altLang="en-US" b="1" dirty="0">
+              <a:solidFill>
+                <a:schemeClr val="bg1"/>
+              </a:solidFill>
+              <a:latin typeface="Arial" panose="020B0604020202020204" pitchFamily="34" charset="0"/>
+              <a:cs typeface="Arial" panose="020B0604020202020204" pitchFamily="34" charset="0"/>
+            </a:endParaRPr>
+          </a:p>
+        </p:txBody>
+      </p:sp>
+      <p:sp>
+        <p:nvSpPr>
+          <p:cNvPr id="28" name="矩形 27">
+            <a:extLst>
+              <a:ext uri="{FF2B5EF4-FFF2-40B4-BE49-F238E27FC236}">
+                <a16:creationId xmlns:a16="http://schemas.microsoft.com/office/drawing/2014/main" id="{92CDAC51-B25D-4E3A-8C93-3FA95B31F167}"/>
+              </a:ext>
+            </a:extLst>
+          </p:cNvPr>
+          <p:cNvSpPr/>
+          <p:nvPr/>
+        </p:nvSpPr>
+        <p:spPr>
+          <a:xfrm>
+            <a:off x="10727271" y="2129521"/>
+            <a:ext cx="1029378" cy="461665"/>
+          </a:xfrm>
+          <a:prstGeom prst="rect">
+            <a:avLst/>
+          </a:prstGeom>
+        </p:spPr>
+        <p:style>
+          <a:lnRef idx="2">
+            <a:schemeClr val="accent1">
+              <a:shade val="50000"/>
+            </a:schemeClr>
+          </a:lnRef>
+          <a:fillRef idx="1">
+            <a:schemeClr val="accent1"/>
+          </a:fillRef>
+          <a:effectRef idx="0">
+            <a:schemeClr val="accent1"/>
+          </a:effectRef>
+          <a:fontRef idx="minor">
+            <a:schemeClr val="lt1"/>
+          </a:fontRef>
+        </p:style>
+        <p:txBody>
+          <a:bodyPr rtlCol="0" anchor="ctr"/>
+          <a:lstStyle/>
+          <a:p>
+            <a:pPr algn="ctr"/>
+            <a:r>
+              <a:rPr lang="en-US" altLang="zh-CN" b="1" strike="sngStrike" dirty="0">
+                <a:solidFill>
+                  <a:schemeClr val="bg1"/>
+                </a:solidFill>
+                <a:latin typeface="Arial" panose="020B0604020202020204" pitchFamily="34" charset="0"/>
+                <a:cs typeface="Arial" panose="020B0604020202020204" pitchFamily="34" charset="0"/>
+              </a:rPr>
+              <a:t>traffic</a:t>
+            </a:r>
+            <a:endParaRPr lang="zh-CN" altLang="en-US" b="1" strike="sngStrike" dirty="0">
+              <a:solidFill>
+                <a:schemeClr val="bg1"/>
+              </a:solidFill>
+              <a:latin typeface="Arial" panose="020B0604020202020204" pitchFamily="34" charset="0"/>
+              <a:cs typeface="Arial" panose="020B0604020202020204" pitchFamily="34" charset="0"/>
+            </a:endParaRPr>
+          </a:p>
+        </p:txBody>
+      </p:sp>
+      <p:cxnSp>
+        <p:nvCxnSpPr>
+          <p:cNvPr id="32" name="直接箭头连接符 31">
+            <a:extLst>
+              <a:ext uri="{FF2B5EF4-FFF2-40B4-BE49-F238E27FC236}">
+                <a16:creationId xmlns:a16="http://schemas.microsoft.com/office/drawing/2014/main" id="{70CB9D72-0108-45A1-98B5-2A016EE6A109}"/>
+              </a:ext>
+            </a:extLst>
+          </p:cNvPr>
+          <p:cNvCxnSpPr>
+            <a:stCxn id="18" idx="2"/>
+          </p:cNvCxnSpPr>
+          <p:nvPr/>
+        </p:nvCxnSpPr>
+        <p:spPr>
+          <a:xfrm flipH="1">
+            <a:off x="5089582" y="748108"/>
+            <a:ext cx="26946" cy="3677951"/>
+          </a:xfrm>
+          <a:prstGeom prst="straightConnector1">
+            <a:avLst/>
+          </a:prstGeom>
+          <a:ln>
+            <a:tailEnd type="triangle"/>
+          </a:ln>
+        </p:spPr>
+        <p:style>
+          <a:lnRef idx="1">
+            <a:schemeClr val="accent1"/>
+          </a:lnRef>
+          <a:fillRef idx="0">
+            <a:schemeClr val="accent1"/>
+          </a:fillRef>
+          <a:effectRef idx="0">
+            <a:schemeClr val="accent1"/>
+          </a:effectRef>
+          <a:fontRef idx="minor">
+            <a:schemeClr val="tx1"/>
+          </a:fontRef>
+        </p:style>
+      </p:cxnSp>
+      <p:sp>
+        <p:nvSpPr>
+          <p:cNvPr id="33" name="文本框 32">
+            <a:extLst>
+              <a:ext uri="{FF2B5EF4-FFF2-40B4-BE49-F238E27FC236}">
+                <a16:creationId xmlns:a16="http://schemas.microsoft.com/office/drawing/2014/main" id="{0A343249-3D4C-4E7D-94E4-268DFBBFB60E}"/>
+              </a:ext>
+            </a:extLst>
+          </p:cNvPr>
+          <p:cNvSpPr txBox="1"/>
+          <p:nvPr/>
+        </p:nvSpPr>
+        <p:spPr>
+          <a:xfrm rot="16200000">
+            <a:off x="3252437" y="2438676"/>
+            <a:ext cx="3276859" cy="400110"/>
+          </a:xfrm>
+          <a:prstGeom prst="rect">
+            <a:avLst/>
+          </a:prstGeom>
+          <a:noFill/>
+        </p:spPr>
+        <p:txBody>
+          <a:bodyPr wrap="none" rtlCol="0">
+            <a:spAutoFit/>
+          </a:bodyPr>
+          <a:lstStyle/>
+          <a:p>
+            <a:r>
+              <a:rPr lang="en-US" altLang="zh-CN" sz="2000" b="1" dirty="0"/>
+              <a:t>Dynamics(</a:t>
+            </a:r>
+            <a:r>
+              <a:rPr lang="en-US" altLang="zh-CN" sz="1200" b="1" dirty="0"/>
+              <a:t>with</a:t>
+            </a:r>
+            <a:r>
+              <a:rPr lang="en-US" altLang="zh-CN" sz="2000" b="1" dirty="0"/>
+              <a:t> </a:t>
+            </a:r>
+            <a:r>
+              <a:rPr lang="en-US" altLang="zh-CN" sz="1200" b="1" dirty="0"/>
+              <a:t>~done_mask&amp;active</a:t>
+            </a:r>
+            <a:r>
+              <a:rPr lang="en-US" altLang="zh-CN" sz="2000" b="1" dirty="0"/>
+              <a:t>)</a:t>
+            </a:r>
+            <a:endParaRPr lang="zh-CN" altLang="en-US" sz="2000" b="1" dirty="0"/>
+          </a:p>
+        </p:txBody>
+      </p:sp>
+      <p:sp>
+        <p:nvSpPr>
+          <p:cNvPr id="34" name="矩形 33">
+            <a:extLst>
+              <a:ext uri="{FF2B5EF4-FFF2-40B4-BE49-F238E27FC236}">
+                <a16:creationId xmlns:a16="http://schemas.microsoft.com/office/drawing/2014/main" id="{BB08BCF0-4A01-4072-9950-CDBB21991FEB}"/>
+              </a:ext>
+            </a:extLst>
+          </p:cNvPr>
+          <p:cNvSpPr/>
+          <p:nvPr/>
+        </p:nvSpPr>
+        <p:spPr>
+          <a:xfrm>
+            <a:off x="4415085" y="4423387"/>
+            <a:ext cx="1375939" cy="461665"/>
+          </a:xfrm>
+          <a:prstGeom prst="rect">
+            <a:avLst/>
+          </a:prstGeom>
+        </p:spPr>
+        <p:style>
+          <a:lnRef idx="2">
+            <a:schemeClr val="accent1">
+              <a:shade val="50000"/>
+            </a:schemeClr>
+          </a:lnRef>
+          <a:fillRef idx="1">
+            <a:schemeClr val="accent1"/>
+          </a:fillRef>
+          <a:effectRef idx="0">
+            <a:schemeClr val="accent1"/>
+          </a:effectRef>
+          <a:fontRef idx="minor">
+            <a:schemeClr val="lt1"/>
+          </a:fontRef>
+        </p:style>
+        <p:txBody>
+          <a:bodyPr rtlCol="0" anchor="ctr"/>
+          <a:lstStyle/>
+          <a:p>
+            <a:pPr algn="ctr"/>
+            <a:r>
+              <a:rPr lang="en-US" altLang="zh-CN" b="1" dirty="0">
+                <a:solidFill>
+                  <a:schemeClr val="bg1"/>
+                </a:solidFill>
+                <a:latin typeface="Arial" panose="020B0604020202020204" pitchFamily="34" charset="0"/>
+                <a:cs typeface="Arial" panose="020B0604020202020204" pitchFamily="34" charset="0"/>
+              </a:rPr>
+              <a:t>State t+1</a:t>
+            </a:r>
+            <a:endParaRPr lang="zh-CN" altLang="en-US" b="1" dirty="0">
+              <a:solidFill>
+                <a:schemeClr val="bg1"/>
+              </a:solidFill>
+              <a:latin typeface="Arial" panose="020B0604020202020204" pitchFamily="34" charset="0"/>
+              <a:cs typeface="Arial" panose="020B0604020202020204" pitchFamily="34" charset="0"/>
+            </a:endParaRPr>
+          </a:p>
+        </p:txBody>
+      </p:sp>
+      <p:sp>
+        <p:nvSpPr>
+          <p:cNvPr id="40" name="矩形 39">
+            <a:extLst>
+              <a:ext uri="{FF2B5EF4-FFF2-40B4-BE49-F238E27FC236}">
+                <a16:creationId xmlns:a16="http://schemas.microsoft.com/office/drawing/2014/main" id="{23DF0639-3FD7-4C22-9032-65F45059D9A1}"/>
+              </a:ext>
+            </a:extLst>
+          </p:cNvPr>
+          <p:cNvSpPr/>
+          <p:nvPr/>
+        </p:nvSpPr>
+        <p:spPr>
+          <a:xfrm>
+            <a:off x="5240076" y="3198324"/>
+            <a:ext cx="978220" cy="914400"/>
+          </a:xfrm>
+          <a:prstGeom prst="rect">
+            <a:avLst/>
+          </a:prstGeom>
+          <a:solidFill>
+            <a:schemeClr val="accent6"/>
+          </a:solidFill>
+        </p:spPr>
+        <p:style>
+          <a:lnRef idx="2">
+            <a:schemeClr val="accent1">
+              <a:shade val="50000"/>
+            </a:schemeClr>
+          </a:lnRef>
+          <a:fillRef idx="1">
+            <a:schemeClr val="accent1"/>
+          </a:fillRef>
+          <a:effectRef idx="0">
+            <a:schemeClr val="accent1"/>
+          </a:effectRef>
+          <a:fontRef idx="minor">
+            <a:schemeClr val="lt1"/>
+          </a:fontRef>
+        </p:style>
+        <p:txBody>
+          <a:bodyPr rtlCol="0" anchor="ctr"/>
+          <a:lstStyle/>
+          <a:p>
+            <a:pPr algn="ctr"/>
+            <a:r>
+              <a:rPr lang="en-US" altLang="zh-CN" dirty="0"/>
+              <a:t>network</a:t>
+            </a:r>
+            <a:endParaRPr lang="zh-CN" altLang="en-US" dirty="0"/>
+          </a:p>
+        </p:txBody>
+      </p:sp>
+      <p:cxnSp>
+        <p:nvCxnSpPr>
+          <p:cNvPr id="42" name="直接箭头连接符 41">
+            <a:extLst>
+              <a:ext uri="{FF2B5EF4-FFF2-40B4-BE49-F238E27FC236}">
+                <a16:creationId xmlns:a16="http://schemas.microsoft.com/office/drawing/2014/main" id="{9E30EB7C-5354-4F92-9A69-AF54B10B452A}"/>
+              </a:ext>
+            </a:extLst>
+          </p:cNvPr>
+          <p:cNvCxnSpPr>
+            <a:stCxn id="40" idx="1"/>
+          </p:cNvCxnSpPr>
+          <p:nvPr/>
+        </p:nvCxnSpPr>
+        <p:spPr>
+          <a:xfrm flipH="1">
+            <a:off x="5089582" y="3655524"/>
+            <a:ext cx="150494" cy="0"/>
+          </a:xfrm>
+          <a:prstGeom prst="straightConnector1">
+            <a:avLst/>
+          </a:prstGeom>
+          <a:ln>
+            <a:tailEnd type="triangle"/>
+          </a:ln>
+        </p:spPr>
+        <p:style>
+          <a:lnRef idx="1">
+            <a:schemeClr val="accent1"/>
+          </a:lnRef>
+          <a:fillRef idx="0">
+            <a:schemeClr val="accent1"/>
+          </a:fillRef>
+          <a:effectRef idx="0">
+            <a:schemeClr val="accent1"/>
+          </a:effectRef>
+          <a:fontRef idx="minor">
+            <a:schemeClr val="tx1"/>
+          </a:fontRef>
+        </p:style>
+      </p:cxnSp>
+      <p:cxnSp>
+        <p:nvCxnSpPr>
+          <p:cNvPr id="44" name="直接箭头连接符 43">
+            <a:extLst>
+              <a:ext uri="{FF2B5EF4-FFF2-40B4-BE49-F238E27FC236}">
+                <a16:creationId xmlns:a16="http://schemas.microsoft.com/office/drawing/2014/main" id="{50DC2DD9-C2B4-4A60-B6F5-419A611F35D1}"/>
+              </a:ext>
+            </a:extLst>
+          </p:cNvPr>
+          <p:cNvCxnSpPr>
+            <a:cxnSpLocks/>
+            <a:endCxn id="40" idx="3"/>
+          </p:cNvCxnSpPr>
+          <p:nvPr/>
+        </p:nvCxnSpPr>
+        <p:spPr>
+          <a:xfrm flipH="1">
+            <a:off x="6218296" y="3655524"/>
+            <a:ext cx="192129" cy="0"/>
+          </a:xfrm>
+          <a:prstGeom prst="straightConnector1">
+            <a:avLst/>
+          </a:prstGeom>
+          <a:ln>
+            <a:tailEnd type="triangle"/>
+          </a:ln>
+        </p:spPr>
+        <p:style>
+          <a:lnRef idx="1">
+            <a:schemeClr val="accent1"/>
+          </a:lnRef>
+          <a:fillRef idx="0">
+            <a:schemeClr val="accent1"/>
+          </a:fillRef>
+          <a:effectRef idx="0">
+            <a:schemeClr val="accent1"/>
+          </a:effectRef>
+          <a:fontRef idx="minor">
+            <a:schemeClr val="tx1"/>
+          </a:fontRef>
+        </p:style>
+      </p:cxnSp>
+      <p:sp>
+        <p:nvSpPr>
+          <p:cNvPr id="45" name="矩形 44">
+            <a:extLst>
+              <a:ext uri="{FF2B5EF4-FFF2-40B4-BE49-F238E27FC236}">
+                <a16:creationId xmlns:a16="http://schemas.microsoft.com/office/drawing/2014/main" id="{C13E9B39-A608-4211-BE6B-9844F0C3140E}"/>
+              </a:ext>
+            </a:extLst>
+          </p:cNvPr>
+          <p:cNvSpPr/>
+          <p:nvPr/>
+        </p:nvSpPr>
+        <p:spPr>
+          <a:xfrm>
+            <a:off x="6495456" y="3198324"/>
+            <a:ext cx="1714894" cy="914397"/>
+          </a:xfrm>
+          <a:prstGeom prst="rect">
+            <a:avLst/>
+          </a:prstGeom>
+        </p:spPr>
+        <p:style>
+          <a:lnRef idx="2">
+            <a:schemeClr val="accent1">
+              <a:shade val="50000"/>
+            </a:schemeClr>
+          </a:lnRef>
+          <a:fillRef idx="1">
+            <a:schemeClr val="accent1"/>
+          </a:fillRef>
+          <a:effectRef idx="0">
+            <a:schemeClr val="accent1"/>
+          </a:effectRef>
+          <a:fontRef idx="minor">
+            <a:schemeClr val="lt1"/>
+          </a:fontRef>
+        </p:style>
+        <p:txBody>
+          <a:bodyPr rtlCol="0" anchor="ctr"/>
+          <a:lstStyle/>
+          <a:p>
+            <a:pPr algn="ctr"/>
+            <a:r>
+              <a:rPr lang="en-US" altLang="zh-CN" b="1" dirty="0" err="1">
+                <a:hlinkClick r:id="rId3" action="ppaction://hlinksldjump"/>
+              </a:rPr>
+              <a:t>Feature_tensor</a:t>
+            </a:r>
+            <a:endParaRPr lang="zh-CN" altLang="en-US" b="1" dirty="0"/>
+          </a:p>
+        </p:txBody>
+      </p:sp>
+      <p:sp>
+        <p:nvSpPr>
+          <p:cNvPr id="46" name="矩形 45">
+            <a:extLst>
+              <a:ext uri="{FF2B5EF4-FFF2-40B4-BE49-F238E27FC236}">
+                <a16:creationId xmlns:a16="http://schemas.microsoft.com/office/drawing/2014/main" id="{50F8201F-A96A-4A62-B4EF-E92D62B9EEC2}"/>
+              </a:ext>
+            </a:extLst>
+          </p:cNvPr>
+          <p:cNvSpPr/>
+          <p:nvPr/>
+        </p:nvSpPr>
+        <p:spPr>
+          <a:xfrm>
+            <a:off x="6070522" y="4423387"/>
+            <a:ext cx="1918759" cy="461665"/>
+          </a:xfrm>
+          <a:prstGeom prst="rect">
+            <a:avLst/>
+          </a:prstGeom>
+        </p:spPr>
+        <p:style>
+          <a:lnRef idx="2">
+            <a:schemeClr val="accent1">
+              <a:shade val="50000"/>
+            </a:schemeClr>
+          </a:lnRef>
+          <a:fillRef idx="1">
+            <a:schemeClr val="accent1"/>
+          </a:fillRef>
+          <a:effectRef idx="0">
+            <a:schemeClr val="accent1"/>
+          </a:effectRef>
+          <a:fontRef idx="minor">
+            <a:schemeClr val="lt1"/>
+          </a:fontRef>
+        </p:style>
+        <p:txBody>
+          <a:bodyPr rtlCol="0" anchor="ctr"/>
+          <a:lstStyle/>
+          <a:p>
+            <a:pPr algn="ctr"/>
+            <a:r>
+              <a:rPr lang="en-US" altLang="zh-CN" b="1" dirty="0" err="1">
+                <a:latin typeface="Arial" panose="020B0604020202020204" pitchFamily="34" charset="0"/>
+                <a:cs typeface="Arial" panose="020B0604020202020204" pitchFamily="34" charset="0"/>
+              </a:rPr>
+              <a:t>offroadchecker</a:t>
+            </a:r>
+            <a:endParaRPr lang="zh-CN" altLang="en-US" b="1" dirty="0">
+              <a:latin typeface="Arial" panose="020B0604020202020204" pitchFamily="34" charset="0"/>
+              <a:cs typeface="Arial" panose="020B0604020202020204" pitchFamily="34" charset="0"/>
+            </a:endParaRPr>
+          </a:p>
+        </p:txBody>
+      </p:sp>
+      <p:sp>
+        <p:nvSpPr>
+          <p:cNvPr id="47" name="矩形 46">
+            <a:extLst>
+              <a:ext uri="{FF2B5EF4-FFF2-40B4-BE49-F238E27FC236}">
+                <a16:creationId xmlns:a16="http://schemas.microsoft.com/office/drawing/2014/main" id="{8FEA2A9B-A1A4-431C-8F51-90FF0B558E8D}"/>
+              </a:ext>
+            </a:extLst>
+          </p:cNvPr>
+          <p:cNvSpPr/>
+          <p:nvPr/>
+        </p:nvSpPr>
+        <p:spPr>
+          <a:xfrm>
+            <a:off x="7980615" y="4423387"/>
+            <a:ext cx="1918759" cy="461665"/>
+          </a:xfrm>
+          <a:prstGeom prst="rect">
+            <a:avLst/>
+          </a:prstGeom>
+        </p:spPr>
+        <p:style>
+          <a:lnRef idx="2">
+            <a:schemeClr val="accent1">
+              <a:shade val="50000"/>
+            </a:schemeClr>
+          </a:lnRef>
+          <a:fillRef idx="1">
+            <a:schemeClr val="accent1"/>
+          </a:fillRef>
+          <a:effectRef idx="0">
+            <a:schemeClr val="accent1"/>
+          </a:effectRef>
+          <a:fontRef idx="minor">
+            <a:schemeClr val="lt1"/>
+          </a:fontRef>
+        </p:style>
+        <p:txBody>
+          <a:bodyPr rtlCol="0" anchor="ctr"/>
+          <a:lstStyle/>
+          <a:p>
+            <a:pPr algn="ctr"/>
+            <a:r>
+              <a:rPr lang="en-US" altLang="zh-CN" b="1" dirty="0" err="1">
+                <a:latin typeface="Arial" panose="020B0604020202020204" pitchFamily="34" charset="0"/>
+                <a:cs typeface="Arial" panose="020B0604020202020204" pitchFamily="34" charset="0"/>
+              </a:rPr>
+              <a:t>Collisioncheck</a:t>
+            </a:r>
+            <a:endParaRPr lang="zh-CN" altLang="en-US" b="1" dirty="0">
+              <a:latin typeface="Arial" panose="020B0604020202020204" pitchFamily="34" charset="0"/>
+              <a:cs typeface="Arial" panose="020B0604020202020204" pitchFamily="34" charset="0"/>
+            </a:endParaRPr>
+          </a:p>
+        </p:txBody>
+      </p:sp>
+      <p:cxnSp>
+        <p:nvCxnSpPr>
+          <p:cNvPr id="48" name="直接箭头连接符 47">
+            <a:extLst>
+              <a:ext uri="{FF2B5EF4-FFF2-40B4-BE49-F238E27FC236}">
+                <a16:creationId xmlns:a16="http://schemas.microsoft.com/office/drawing/2014/main" id="{58FBB7BF-81A0-407C-A26D-46506E901FEF}"/>
+              </a:ext>
+            </a:extLst>
+          </p:cNvPr>
+          <p:cNvCxnSpPr>
+            <a:cxnSpLocks/>
+          </p:cNvCxnSpPr>
+          <p:nvPr/>
+        </p:nvCxnSpPr>
+        <p:spPr>
+          <a:xfrm flipH="1">
+            <a:off x="8280935" y="3655524"/>
+            <a:ext cx="333676" cy="0"/>
+          </a:xfrm>
+          <a:prstGeom prst="straightConnector1">
+            <a:avLst/>
+          </a:prstGeom>
+          <a:ln>
+            <a:tailEnd type="triangle"/>
+          </a:ln>
+        </p:spPr>
+        <p:style>
+          <a:lnRef idx="1">
+            <a:schemeClr val="accent1"/>
+          </a:lnRef>
+          <a:fillRef idx="0">
+            <a:schemeClr val="accent1"/>
+          </a:fillRef>
+          <a:effectRef idx="0">
+            <a:schemeClr val="accent1"/>
+          </a:effectRef>
+          <a:fontRef idx="minor">
+            <a:schemeClr val="tx1"/>
+          </a:fontRef>
+        </p:style>
+      </p:cxnSp>
+      <p:sp>
+        <p:nvSpPr>
+          <p:cNvPr id="53" name="右大括号 52">
+            <a:extLst>
+              <a:ext uri="{FF2B5EF4-FFF2-40B4-BE49-F238E27FC236}">
+                <a16:creationId xmlns:a16="http://schemas.microsoft.com/office/drawing/2014/main" id="{2FE012BA-5548-4BC0-B1E9-52E1F017E76E}"/>
+              </a:ext>
+            </a:extLst>
+          </p:cNvPr>
+          <p:cNvSpPr/>
+          <p:nvPr/>
+        </p:nvSpPr>
+        <p:spPr>
+          <a:xfrm rot="5400000">
+            <a:off x="8497449" y="-328274"/>
+            <a:ext cx="219450" cy="6709077"/>
+          </a:xfrm>
+          <a:prstGeom prst="rightBrace">
+            <a:avLst>
+              <a:gd name="adj1" fmla="val 351862"/>
+              <a:gd name="adj2" fmla="val 29632"/>
+            </a:avLst>
+          </a:prstGeom>
+        </p:spPr>
+        <p:style>
+          <a:lnRef idx="1">
+            <a:schemeClr val="dk1"/>
+          </a:lnRef>
+          <a:fillRef idx="0">
+            <a:schemeClr val="dk1"/>
+          </a:fillRef>
+          <a:effectRef idx="0">
+            <a:schemeClr val="dk1"/>
+          </a:effectRef>
+          <a:fontRef idx="minor">
+            <a:schemeClr val="tx1"/>
+          </a:fontRef>
+        </p:style>
+        <p:txBody>
+          <a:bodyPr rtlCol="0" anchor="ctr"/>
+          <a:lstStyle/>
+          <a:p>
+            <a:pPr algn="ctr"/>
+            <a:endParaRPr lang="zh-CN" altLang="en-US" dirty="0"/>
+          </a:p>
+        </p:txBody>
+      </p:sp>
+      <p:sp>
+        <p:nvSpPr>
+          <p:cNvPr id="54" name="左大括号 53">
+            <a:extLst>
+              <a:ext uri="{FF2B5EF4-FFF2-40B4-BE49-F238E27FC236}">
+                <a16:creationId xmlns:a16="http://schemas.microsoft.com/office/drawing/2014/main" id="{72894132-5039-455A-A574-E22BCF36B282}"/>
+              </a:ext>
+            </a:extLst>
+          </p:cNvPr>
+          <p:cNvSpPr/>
+          <p:nvPr/>
+        </p:nvSpPr>
+        <p:spPr>
+          <a:xfrm>
+            <a:off x="8775316" y="3135989"/>
+            <a:ext cx="306730" cy="1038077"/>
+          </a:xfrm>
+          <a:prstGeom prst="leftBrace">
+            <a:avLst>
+              <a:gd name="adj1" fmla="val 84608"/>
+              <a:gd name="adj2" fmla="val 50000"/>
+            </a:avLst>
+          </a:prstGeom>
+        </p:spPr>
+        <p:style>
+          <a:lnRef idx="1">
+            <a:schemeClr val="accent1"/>
+          </a:lnRef>
+          <a:fillRef idx="0">
+            <a:schemeClr val="accent1"/>
+          </a:fillRef>
+          <a:effectRef idx="0">
+            <a:schemeClr val="accent1"/>
+          </a:effectRef>
+          <a:fontRef idx="minor">
+            <a:schemeClr val="tx1"/>
+          </a:fontRef>
+        </p:style>
+        <p:txBody>
+          <a:bodyPr rtlCol="0" anchor="ctr"/>
+          <a:lstStyle/>
+          <a:p>
+            <a:pPr algn="ctr"/>
+            <a:endParaRPr lang="zh-CN" altLang="en-US"/>
+          </a:p>
+        </p:txBody>
+      </p:sp>
+      <p:sp>
+        <p:nvSpPr>
+          <p:cNvPr id="56" name="矩形 55">
+            <a:extLst>
+              <a:ext uri="{FF2B5EF4-FFF2-40B4-BE49-F238E27FC236}">
+                <a16:creationId xmlns:a16="http://schemas.microsoft.com/office/drawing/2014/main" id="{76184F12-3F43-49D6-898C-86E428CEE16B}"/>
+              </a:ext>
+            </a:extLst>
+          </p:cNvPr>
+          <p:cNvSpPr/>
+          <p:nvPr/>
+        </p:nvSpPr>
+        <p:spPr>
+          <a:xfrm>
+            <a:off x="9147562" y="3175020"/>
+            <a:ext cx="2879337" cy="320005"/>
+          </a:xfrm>
+          <a:prstGeom prst="rect">
+            <a:avLst/>
+          </a:prstGeom>
+        </p:spPr>
+        <p:style>
+          <a:lnRef idx="2">
+            <a:schemeClr val="accent1">
+              <a:shade val="50000"/>
+            </a:schemeClr>
+          </a:lnRef>
+          <a:fillRef idx="1">
+            <a:schemeClr val="accent1"/>
+          </a:fillRef>
+          <a:effectRef idx="0">
+            <a:schemeClr val="accent1"/>
+          </a:effectRef>
+          <a:fontRef idx="minor">
+            <a:schemeClr val="lt1"/>
+          </a:fontRef>
+        </p:style>
+        <p:txBody>
+          <a:bodyPr rtlCol="0" anchor="ctr"/>
+          <a:lstStyle/>
+          <a:p>
+            <a:pPr algn="ctr"/>
+            <a:r>
+              <a:rPr lang="en-US" altLang="zh-CN" b="1" dirty="0"/>
+              <a:t>Observation(with others)</a:t>
+            </a:r>
+            <a:endParaRPr lang="zh-CN" altLang="en-US" b="1" dirty="0"/>
+          </a:p>
+        </p:txBody>
+      </p:sp>
+      <p:sp>
+        <p:nvSpPr>
+          <p:cNvPr id="57" name="矩形 56">
+            <a:extLst>
+              <a:ext uri="{FF2B5EF4-FFF2-40B4-BE49-F238E27FC236}">
+                <a16:creationId xmlns:a16="http://schemas.microsoft.com/office/drawing/2014/main" id="{B7E66309-550F-4D60-88E6-05DFD1F0A7C6}"/>
+              </a:ext>
+            </a:extLst>
+          </p:cNvPr>
+          <p:cNvSpPr/>
+          <p:nvPr/>
+        </p:nvSpPr>
+        <p:spPr>
+          <a:xfrm>
+            <a:off x="9147562" y="3752529"/>
+            <a:ext cx="1351105" cy="320005"/>
+          </a:xfrm>
+          <a:prstGeom prst="rect">
+            <a:avLst/>
+          </a:prstGeom>
+        </p:spPr>
+        <p:style>
+          <a:lnRef idx="2">
+            <a:schemeClr val="accent1">
+              <a:shade val="50000"/>
+            </a:schemeClr>
+          </a:lnRef>
+          <a:fillRef idx="1">
+            <a:schemeClr val="accent1"/>
+          </a:fillRef>
+          <a:effectRef idx="0">
+            <a:schemeClr val="accent1"/>
+          </a:effectRef>
+          <a:fontRef idx="minor">
+            <a:schemeClr val="lt1"/>
+          </a:fontRef>
+        </p:style>
+        <p:txBody>
+          <a:bodyPr rtlCol="0" anchor="ctr"/>
+          <a:lstStyle/>
+          <a:p>
+            <a:pPr algn="ctr"/>
+            <a:r>
+              <a:rPr lang="en-US" altLang="zh-CN" b="1" dirty="0"/>
+              <a:t>conditions</a:t>
+            </a:r>
+            <a:endParaRPr lang="zh-CN" altLang="en-US" b="1" dirty="0"/>
+          </a:p>
+        </p:txBody>
+      </p:sp>
+      <p:cxnSp>
+        <p:nvCxnSpPr>
+          <p:cNvPr id="59" name="直接箭头连接符 58">
+            <a:extLst>
+              <a:ext uri="{FF2B5EF4-FFF2-40B4-BE49-F238E27FC236}">
+                <a16:creationId xmlns:a16="http://schemas.microsoft.com/office/drawing/2014/main" id="{3556BF7D-13ED-4796-AB28-3B96CAC6D1E9}"/>
+              </a:ext>
+            </a:extLst>
+          </p:cNvPr>
+          <p:cNvCxnSpPr>
+            <a:cxnSpLocks/>
+            <a:stCxn id="34" idx="2"/>
+            <a:endCxn id="61" idx="0"/>
+          </p:cNvCxnSpPr>
+          <p:nvPr/>
+        </p:nvCxnSpPr>
+        <p:spPr>
+          <a:xfrm>
+            <a:off x="5103055" y="4885052"/>
+            <a:ext cx="0" cy="413458"/>
+          </a:xfrm>
+          <a:prstGeom prst="straightConnector1">
+            <a:avLst/>
+          </a:prstGeom>
+          <a:ln>
+            <a:tailEnd type="triangle"/>
+          </a:ln>
+        </p:spPr>
+        <p:style>
+          <a:lnRef idx="1">
+            <a:schemeClr val="accent1"/>
+          </a:lnRef>
+          <a:fillRef idx="0">
+            <a:schemeClr val="accent1"/>
+          </a:fillRef>
+          <a:effectRef idx="0">
+            <a:schemeClr val="accent1"/>
+          </a:effectRef>
+          <a:fontRef idx="minor">
+            <a:schemeClr val="tx1"/>
+          </a:fontRef>
+        </p:style>
+      </p:cxnSp>
+      <p:sp>
+        <p:nvSpPr>
+          <p:cNvPr id="61" name="矩形 60">
+            <a:extLst>
+              <a:ext uri="{FF2B5EF4-FFF2-40B4-BE49-F238E27FC236}">
+                <a16:creationId xmlns:a16="http://schemas.microsoft.com/office/drawing/2014/main" id="{2BE32AAF-0A3C-46E6-933E-E54B13B8F8E1}"/>
+              </a:ext>
+            </a:extLst>
+          </p:cNvPr>
+          <p:cNvSpPr/>
+          <p:nvPr/>
+        </p:nvSpPr>
+        <p:spPr>
+          <a:xfrm>
+            <a:off x="4415085" y="5298510"/>
+            <a:ext cx="1375939" cy="461665"/>
+          </a:xfrm>
+          <a:prstGeom prst="rect">
+            <a:avLst/>
+          </a:prstGeom>
+        </p:spPr>
+        <p:style>
+          <a:lnRef idx="2">
+            <a:schemeClr val="accent1">
+              <a:shade val="50000"/>
+            </a:schemeClr>
+          </a:lnRef>
+          <a:fillRef idx="1">
+            <a:schemeClr val="accent1"/>
+          </a:fillRef>
+          <a:effectRef idx="0">
+            <a:schemeClr val="accent1"/>
+          </a:effectRef>
+          <a:fontRef idx="minor">
+            <a:schemeClr val="lt1"/>
+          </a:fontRef>
+        </p:style>
+        <p:txBody>
+          <a:bodyPr rtlCol="0" anchor="ctr"/>
+          <a:lstStyle/>
+          <a:p>
+            <a:pPr algn="ctr"/>
+            <a:r>
+              <a:rPr lang="en-US" altLang="zh-CN" b="1" dirty="0">
+                <a:solidFill>
+                  <a:schemeClr val="bg1"/>
+                </a:solidFill>
+                <a:latin typeface="Arial" panose="020B0604020202020204" pitchFamily="34" charset="0"/>
+                <a:cs typeface="Arial" panose="020B0604020202020204" pitchFamily="34" charset="0"/>
+              </a:rPr>
+              <a:t>Reward t</a:t>
+            </a:r>
+            <a:endParaRPr lang="zh-CN" altLang="en-US" b="1" dirty="0">
+              <a:solidFill>
+                <a:schemeClr val="bg1"/>
+              </a:solidFill>
+              <a:latin typeface="Arial" panose="020B0604020202020204" pitchFamily="34" charset="0"/>
+              <a:cs typeface="Arial" panose="020B0604020202020204" pitchFamily="34" charset="0"/>
+            </a:endParaRPr>
+          </a:p>
+        </p:txBody>
+      </p:sp>
+      <p:cxnSp>
+        <p:nvCxnSpPr>
+          <p:cNvPr id="63" name="直接箭头连接符 62">
+            <a:extLst>
+              <a:ext uri="{FF2B5EF4-FFF2-40B4-BE49-F238E27FC236}">
+                <a16:creationId xmlns:a16="http://schemas.microsoft.com/office/drawing/2014/main" id="{BB78932E-9D4A-4617-BC0C-FA8DCB7BCAB5}"/>
+              </a:ext>
+            </a:extLst>
+          </p:cNvPr>
+          <p:cNvCxnSpPr>
+            <a:cxnSpLocks/>
+          </p:cNvCxnSpPr>
+          <p:nvPr/>
+        </p:nvCxnSpPr>
+        <p:spPr>
+          <a:xfrm>
+            <a:off x="7989281" y="4885052"/>
+            <a:ext cx="0" cy="413458"/>
+          </a:xfrm>
+          <a:prstGeom prst="straightConnector1">
+            <a:avLst/>
+          </a:prstGeom>
+          <a:ln>
+            <a:tailEnd type="triangle"/>
+          </a:ln>
+        </p:spPr>
+        <p:style>
+          <a:lnRef idx="1">
+            <a:schemeClr val="accent1"/>
+          </a:lnRef>
+          <a:fillRef idx="0">
+            <a:schemeClr val="accent1"/>
+          </a:fillRef>
+          <a:effectRef idx="0">
+            <a:schemeClr val="accent1"/>
+          </a:effectRef>
+          <a:fontRef idx="minor">
+            <a:schemeClr val="tx1"/>
+          </a:fontRef>
+        </p:style>
+      </p:cxnSp>
+      <p:sp>
+        <p:nvSpPr>
+          <p:cNvPr id="64" name="矩形 63">
+            <a:extLst>
+              <a:ext uri="{FF2B5EF4-FFF2-40B4-BE49-F238E27FC236}">
+                <a16:creationId xmlns:a16="http://schemas.microsoft.com/office/drawing/2014/main" id="{9D14B2C4-C9A2-475C-92C5-A11483F67659}"/>
+              </a:ext>
+            </a:extLst>
+          </p:cNvPr>
+          <p:cNvSpPr/>
+          <p:nvPr/>
+        </p:nvSpPr>
+        <p:spPr>
+          <a:xfrm>
+            <a:off x="7029901" y="5289647"/>
+            <a:ext cx="1918759" cy="461665"/>
+          </a:xfrm>
+          <a:prstGeom prst="rect">
+            <a:avLst/>
+          </a:prstGeom>
+        </p:spPr>
+        <p:style>
+          <a:lnRef idx="2">
+            <a:schemeClr val="accent1">
+              <a:shade val="50000"/>
+            </a:schemeClr>
+          </a:lnRef>
+          <a:fillRef idx="1">
+            <a:schemeClr val="accent1"/>
+          </a:fillRef>
+          <a:effectRef idx="0">
+            <a:schemeClr val="accent1"/>
+          </a:effectRef>
+          <a:fontRef idx="minor">
+            <a:schemeClr val="lt1"/>
+          </a:fontRef>
+        </p:style>
+        <p:txBody>
+          <a:bodyPr rtlCol="0" anchor="ctr"/>
+          <a:lstStyle/>
+          <a:p>
+            <a:pPr algn="ctr"/>
+            <a:r>
+              <a:rPr lang="en-US" altLang="zh-CN" b="1" dirty="0" err="1">
+                <a:latin typeface="Arial" panose="020B0604020202020204" pitchFamily="34" charset="0"/>
+                <a:cs typeface="Arial" panose="020B0604020202020204" pitchFamily="34" charset="0"/>
+              </a:rPr>
+              <a:t>Done_mask</a:t>
+            </a:r>
+            <a:endParaRPr lang="zh-CN" altLang="en-US" b="1" dirty="0">
+              <a:latin typeface="Arial" panose="020B0604020202020204" pitchFamily="34" charset="0"/>
+              <a:cs typeface="Arial" panose="020B0604020202020204" pitchFamily="34" charset="0"/>
+            </a:endParaRPr>
+          </a:p>
+        </p:txBody>
+      </p:sp>
+    </p:spTree>
+    <p:extLst>
+      <p:ext uri="{BB962C8B-B14F-4D97-AF65-F5344CB8AC3E}">
+        <p14:creationId xmlns:p14="http://schemas.microsoft.com/office/powerpoint/2010/main" val="677233846"/>
+      </p:ext>
+    </p:extLst>
+  </p:cSld>
+  <p:clrMapOvr>
+    <a:masterClrMapping/>
+  </p:clrMapOvr>
+</p:sld>
+</file>
+
+<file path=ppt/slides/slide3.xml><?xml version="1.0" encoding="utf-8"?>
+<p:sld xmlns:a="http://schemas.openxmlformats.org/drawingml/2006/main" xmlns:r="http://schemas.openxmlformats.org/officeDocument/2006/relationships" xmlns:p="http://schemas.openxmlformats.org/presentationml/2006/main">
+  <p:cSld>
+    <p:spTree>
+      <p:nvGrpSpPr>
+        <p:cNvPr id="1" name=""/>
+        <p:cNvGrpSpPr/>
+        <p:nvPr/>
+      </p:nvGrpSpPr>
+      <p:grpSpPr>
+        <a:xfrm>
+          <a:off x="0" y="0"/>
+          <a:ext cx="0" cy="0"/>
+          <a:chOff x="0" y="0"/>
+          <a:chExt cx="0" cy="0"/>
+        </a:xfrm>
+      </p:grpSpPr>
+      <p:pic>
+        <p:nvPicPr>
+          <p:cNvPr id="5" name="图片 4">
+            <a:extLst>
+              <a:ext uri="{FF2B5EF4-FFF2-40B4-BE49-F238E27FC236}">
+                <a16:creationId xmlns:a16="http://schemas.microsoft.com/office/drawing/2014/main" id="{3B7C982E-FC8A-4B8F-8F7C-40AC8F9C9C0B}"/>
+              </a:ext>
+            </a:extLst>
+          </p:cNvPr>
+          <p:cNvPicPr>
+            <a:picLocks noChangeAspect="1"/>
+          </p:cNvPicPr>
+          <p:nvPr/>
+        </p:nvPicPr>
+        <p:blipFill>
+          <a:blip r:embed="rId2"/>
+          <a:stretch>
+            <a:fillRect/>
+          </a:stretch>
+        </p:blipFill>
+        <p:spPr>
+          <a:xfrm>
+            <a:off x="201577" y="87774"/>
+            <a:ext cx="6428571" cy="6514286"/>
+          </a:xfrm>
+          <a:prstGeom prst="rect">
+            <a:avLst/>
+          </a:prstGeom>
+        </p:spPr>
+      </p:pic>
+      <p:pic>
+        <p:nvPicPr>
+          <p:cNvPr id="6" name="图片 5">
+            <a:extLst>
+              <a:ext uri="{FF2B5EF4-FFF2-40B4-BE49-F238E27FC236}">
+                <a16:creationId xmlns:a16="http://schemas.microsoft.com/office/drawing/2014/main" id="{6CFDEB9B-A5C5-46CB-AB16-CF85B0B3FF83}"/>
+              </a:ext>
+            </a:extLst>
+          </p:cNvPr>
+          <p:cNvPicPr>
+            <a:picLocks noChangeAspect="1"/>
+          </p:cNvPicPr>
+          <p:nvPr/>
+        </p:nvPicPr>
+        <p:blipFill>
+          <a:blip r:embed="rId3"/>
+          <a:stretch>
+            <a:fillRect/>
+          </a:stretch>
+        </p:blipFill>
+        <p:spPr>
+          <a:xfrm>
+            <a:off x="6619638" y="42040"/>
+            <a:ext cx="1619048" cy="1800000"/>
+          </a:xfrm>
+          <a:prstGeom prst="rect">
+            <a:avLst/>
+          </a:prstGeom>
+        </p:spPr>
+      </p:pic>
+      <p:sp>
+        <p:nvSpPr>
+          <p:cNvPr id="7" name="椭圆 6">
+            <a:extLst>
+              <a:ext uri="{FF2B5EF4-FFF2-40B4-BE49-F238E27FC236}">
+                <a16:creationId xmlns:a16="http://schemas.microsoft.com/office/drawing/2014/main" id="{47BB7174-B6E1-4F96-BBD3-7AED60D03224}"/>
+              </a:ext>
+            </a:extLst>
+          </p:cNvPr>
+          <p:cNvSpPr/>
+          <p:nvPr/>
+        </p:nvSpPr>
+        <p:spPr>
+          <a:xfrm>
+            <a:off x="6716110" y="2070538"/>
+            <a:ext cx="180000" cy="180000"/>
+          </a:xfrm>
+          <a:prstGeom prst="ellipse">
+            <a:avLst/>
+          </a:prstGeom>
+          <a:solidFill>
+            <a:srgbClr val="A64BA6"/>
+          </a:solidFill>
+        </p:spPr>
+        <p:style>
+          <a:lnRef idx="2">
+            <a:schemeClr val="accent1">
+              <a:shade val="50000"/>
+            </a:schemeClr>
+          </a:lnRef>
+          <a:fillRef idx="1">
+            <a:schemeClr val="accent1"/>
+          </a:fillRef>
+          <a:effectRef idx="0">
+            <a:schemeClr val="accent1"/>
+          </a:effectRef>
+          <a:fontRef idx="minor">
+            <a:schemeClr val="lt1"/>
+          </a:fontRef>
+        </p:style>
+        <p:txBody>
+          <a:bodyPr rtlCol="0" anchor="ctr"/>
+          <a:lstStyle/>
+          <a:p>
+            <a:pPr algn="ctr"/>
+            <a:endParaRPr lang="zh-CN" altLang="en-US"/>
+          </a:p>
+        </p:txBody>
+      </p:sp>
+      <p:sp>
+        <p:nvSpPr>
+          <p:cNvPr id="8" name="文本框 7">
+            <a:extLst>
+              <a:ext uri="{FF2B5EF4-FFF2-40B4-BE49-F238E27FC236}">
+                <a16:creationId xmlns:a16="http://schemas.microsoft.com/office/drawing/2014/main" id="{D0188D1A-A461-40D8-A2E7-1790B2C07FA4}"/>
+              </a:ext>
+            </a:extLst>
+          </p:cNvPr>
+          <p:cNvSpPr txBox="1"/>
+          <p:nvPr/>
+        </p:nvSpPr>
+        <p:spPr>
+          <a:xfrm>
+            <a:off x="6943139" y="1975872"/>
+            <a:ext cx="1295547" cy="369332"/>
+          </a:xfrm>
+          <a:prstGeom prst="rect">
+            <a:avLst/>
+          </a:prstGeom>
+          <a:noFill/>
+        </p:spPr>
+        <p:txBody>
+          <a:bodyPr wrap="none" rtlCol="0">
+            <a:spAutoFit/>
+          </a:bodyPr>
+          <a:lstStyle/>
+          <a:p>
+            <a:r>
+              <a:rPr lang="en-US" altLang="zh-CN" dirty="0"/>
+              <a:t>boundaries</a:t>
+            </a:r>
+            <a:endParaRPr lang="zh-CN" altLang="en-US" dirty="0"/>
+          </a:p>
+        </p:txBody>
+      </p:sp>
+      <p:sp>
+        <p:nvSpPr>
+          <p:cNvPr id="9" name="椭圆 8">
+            <a:extLst>
+              <a:ext uri="{FF2B5EF4-FFF2-40B4-BE49-F238E27FC236}">
+                <a16:creationId xmlns:a16="http://schemas.microsoft.com/office/drawing/2014/main" id="{11B4CDB4-1EC8-4EBD-A895-58AC6ABC082D}"/>
+              </a:ext>
+            </a:extLst>
+          </p:cNvPr>
+          <p:cNvSpPr/>
+          <p:nvPr/>
+        </p:nvSpPr>
+        <p:spPr>
+          <a:xfrm>
+            <a:off x="6716110" y="2469923"/>
+            <a:ext cx="180000" cy="180000"/>
+          </a:xfrm>
+          <a:prstGeom prst="ellipse">
+            <a:avLst/>
+          </a:prstGeom>
+          <a:solidFill>
+            <a:srgbClr val="E42D2D"/>
+          </a:solidFill>
+        </p:spPr>
+        <p:style>
+          <a:lnRef idx="2">
+            <a:schemeClr val="accent1">
+              <a:shade val="50000"/>
+            </a:schemeClr>
+          </a:lnRef>
+          <a:fillRef idx="1">
+            <a:schemeClr val="accent1"/>
+          </a:fillRef>
+          <a:effectRef idx="0">
+            <a:schemeClr val="accent1"/>
+          </a:effectRef>
+          <a:fontRef idx="minor">
+            <a:schemeClr val="lt1"/>
+          </a:fontRef>
+        </p:style>
+        <p:txBody>
+          <a:bodyPr rtlCol="0" anchor="ctr"/>
+          <a:lstStyle/>
+          <a:p>
+            <a:pPr algn="ctr"/>
+            <a:endParaRPr lang="zh-CN" altLang="en-US"/>
+          </a:p>
+        </p:txBody>
+      </p:sp>
+      <p:sp>
+        <p:nvSpPr>
+          <p:cNvPr id="10" name="文本框 9">
+            <a:extLst>
+              <a:ext uri="{FF2B5EF4-FFF2-40B4-BE49-F238E27FC236}">
+                <a16:creationId xmlns:a16="http://schemas.microsoft.com/office/drawing/2014/main" id="{31745D39-7DA7-4A16-9250-872781B1EF4A}"/>
+              </a:ext>
+            </a:extLst>
+          </p:cNvPr>
+          <p:cNvSpPr txBox="1"/>
+          <p:nvPr/>
+        </p:nvSpPr>
+        <p:spPr>
+          <a:xfrm>
+            <a:off x="6943139" y="2345204"/>
+            <a:ext cx="949299" cy="369332"/>
+          </a:xfrm>
+          <a:prstGeom prst="rect">
+            <a:avLst/>
+          </a:prstGeom>
+          <a:noFill/>
+        </p:spPr>
+        <p:txBody>
+          <a:bodyPr wrap="none" rtlCol="0">
+            <a:spAutoFit/>
+          </a:bodyPr>
+          <a:lstStyle/>
+          <a:p>
+            <a:r>
+              <a:rPr lang="en-US" altLang="zh-CN" dirty="0" err="1"/>
+              <a:t>w_lanes</a:t>
+            </a:r>
+            <a:endParaRPr lang="zh-CN" altLang="en-US" dirty="0"/>
+          </a:p>
+        </p:txBody>
+      </p:sp>
+      <p:sp>
+        <p:nvSpPr>
+          <p:cNvPr id="13" name="矩形 12">
+            <a:extLst>
+              <a:ext uri="{FF2B5EF4-FFF2-40B4-BE49-F238E27FC236}">
+                <a16:creationId xmlns:a16="http://schemas.microsoft.com/office/drawing/2014/main" id="{7C40E872-6073-4DCE-9FC8-2B1FBE5890B2}"/>
+              </a:ext>
+            </a:extLst>
+          </p:cNvPr>
+          <p:cNvSpPr/>
+          <p:nvPr/>
+        </p:nvSpPr>
+        <p:spPr>
+          <a:xfrm>
+            <a:off x="6716110" y="2869308"/>
+            <a:ext cx="5412059" cy="2146653"/>
+          </a:xfrm>
+          <a:prstGeom prst="rect">
+            <a:avLst/>
+          </a:prstGeom>
+          <a:noFill/>
+          <a:ln w="25400">
+            <a:solidFill>
+              <a:schemeClr val="tx1"/>
+            </a:solidFill>
+            <a:prstDash val="sysDash"/>
+          </a:ln>
+        </p:spPr>
+        <p:style>
+          <a:lnRef idx="2">
+            <a:schemeClr val="accent1">
+              <a:shade val="50000"/>
+            </a:schemeClr>
+          </a:lnRef>
+          <a:fillRef idx="1">
+            <a:schemeClr val="accent1"/>
+          </a:fillRef>
+          <a:effectRef idx="0">
+            <a:schemeClr val="accent1"/>
+          </a:effectRef>
+          <a:fontRef idx="minor">
+            <a:schemeClr val="lt1"/>
+          </a:fontRef>
+        </p:style>
+        <p:txBody>
+          <a:bodyPr rtlCol="0" anchor="ctr"/>
+          <a:lstStyle/>
+          <a:p>
+            <a:endParaRPr lang="zh-CN" altLang="en-US" dirty="0"/>
+          </a:p>
+        </p:txBody>
+      </p:sp>
+      <p:sp>
+        <p:nvSpPr>
+          <p:cNvPr id="14" name="文本框 13">
+            <a:extLst>
+              <a:ext uri="{FF2B5EF4-FFF2-40B4-BE49-F238E27FC236}">
+                <a16:creationId xmlns:a16="http://schemas.microsoft.com/office/drawing/2014/main" id="{11A5ECFC-7ED0-470F-A18E-7F7BD305EAE3}"/>
+              </a:ext>
+            </a:extLst>
+          </p:cNvPr>
+          <p:cNvSpPr txBox="1"/>
+          <p:nvPr/>
+        </p:nvSpPr>
+        <p:spPr>
+          <a:xfrm>
+            <a:off x="6716110" y="2869308"/>
+            <a:ext cx="1050288" cy="369332"/>
+          </a:xfrm>
+          <a:prstGeom prst="rect">
+            <a:avLst/>
+          </a:prstGeom>
+          <a:noFill/>
+        </p:spPr>
+        <p:txBody>
+          <a:bodyPr wrap="none" rtlCol="0">
+            <a:spAutoFit/>
+          </a:bodyPr>
+          <a:lstStyle/>
+          <a:p>
+            <a:r>
+              <a:rPr lang="en-US" altLang="zh-CN" dirty="0"/>
+              <a:t>variables</a:t>
+            </a:r>
+            <a:endParaRPr lang="zh-CN" altLang="en-US" dirty="0"/>
+          </a:p>
+        </p:txBody>
+      </p:sp>
+      <p:sp>
+        <p:nvSpPr>
+          <p:cNvPr id="15" name="文本框 14">
+            <a:extLst>
+              <a:ext uri="{FF2B5EF4-FFF2-40B4-BE49-F238E27FC236}">
+                <a16:creationId xmlns:a16="http://schemas.microsoft.com/office/drawing/2014/main" id="{A7D02899-9F57-4560-A9C2-15867D93A821}"/>
+              </a:ext>
+            </a:extLst>
+          </p:cNvPr>
+          <p:cNvSpPr txBox="1"/>
+          <p:nvPr/>
+        </p:nvSpPr>
+        <p:spPr>
+          <a:xfrm>
+            <a:off x="6716110" y="3174027"/>
+            <a:ext cx="5412059" cy="2585323"/>
+          </a:xfrm>
+          <a:prstGeom prst="rect">
+            <a:avLst/>
+          </a:prstGeom>
+          <a:noFill/>
+        </p:spPr>
+        <p:txBody>
+          <a:bodyPr wrap="none" rtlCol="0">
+            <a:spAutoFit/>
+          </a:bodyPr>
+          <a:lstStyle/>
+          <a:p>
+            <a:pPr marL="342900" indent="-342900">
+              <a:buFont typeface="+mj-lt"/>
+              <a:buAutoNum type="arabicPeriod"/>
+            </a:pPr>
+            <a:r>
+              <a:rPr lang="en-US" altLang="zh-CN" dirty="0" err="1"/>
+              <a:t>quad_vertices</a:t>
+            </a:r>
+            <a:r>
+              <a:rPr lang="en-US" altLang="zh-CN" dirty="0"/>
+              <a:t>\centers\centerlines\direction\curve</a:t>
+            </a:r>
+          </a:p>
+          <a:p>
+            <a:pPr marL="342900" indent="-342900">
+              <a:buFont typeface="+mj-lt"/>
+              <a:buAutoNum type="arabicPeriod"/>
+            </a:pPr>
+            <a:r>
+              <a:rPr lang="en-US" altLang="zh-CN" dirty="0"/>
+              <a:t>Left\right boundaries</a:t>
+            </a:r>
+          </a:p>
+          <a:p>
+            <a:pPr marL="342900" indent="-342900">
+              <a:buFont typeface="+mj-lt"/>
+              <a:buAutoNum type="arabicPeriod"/>
+            </a:pPr>
+            <a:r>
+              <a:rPr lang="en-US" altLang="zh-CN" dirty="0"/>
+              <a:t>w_lane\</a:t>
+            </a:r>
+            <a:r>
+              <a:rPr lang="en-US" altLang="zh-CN" dirty="0" err="1"/>
+              <a:t>w_boundary</a:t>
+            </a:r>
+            <a:endParaRPr lang="en-US" altLang="zh-CN" dirty="0"/>
+          </a:p>
+          <a:p>
+            <a:pPr marL="342900" indent="-342900">
+              <a:buFont typeface="+mj-lt"/>
+              <a:buAutoNum type="arabicPeriod"/>
+            </a:pPr>
+            <a:endParaRPr lang="en-US" altLang="zh-CN" dirty="0"/>
+          </a:p>
+          <a:p>
+            <a:pPr marL="342900" indent="-342900">
+              <a:buFont typeface="+mj-lt"/>
+              <a:buAutoNum type="arabicPeriod"/>
+            </a:pPr>
+            <a:r>
+              <a:rPr lang="en-US" altLang="zh-CN" dirty="0"/>
+              <a:t>Quad\lane\road\w_lane\</a:t>
+            </a:r>
+            <a:r>
+              <a:rPr lang="en-US" altLang="zh-CN" dirty="0" err="1"/>
+              <a:t>w_boundary</a:t>
+            </a:r>
+            <a:r>
+              <a:rPr lang="en-US" altLang="zh-CN" dirty="0"/>
+              <a:t> </a:t>
+            </a:r>
+            <a:r>
+              <a:rPr lang="en-US" altLang="zh-CN" b="1" dirty="0" err="1"/>
+              <a:t>idx</a:t>
+            </a:r>
+            <a:endParaRPr lang="en-US" altLang="zh-CN" b="1" dirty="0"/>
+          </a:p>
+          <a:p>
+            <a:pPr marL="342900" indent="-342900">
+              <a:buFont typeface="+mj-lt"/>
+              <a:buAutoNum type="arabicPeriod"/>
+            </a:pPr>
+            <a:r>
+              <a:rPr lang="en-US" altLang="zh-CN" dirty="0" err="1"/>
+              <a:t>polyid</a:t>
+            </a:r>
+            <a:r>
+              <a:rPr lang="zh-CN" altLang="en-US" dirty="0"/>
+              <a:t>👉</a:t>
+            </a:r>
+            <a:r>
+              <a:rPr lang="en-US" altLang="zh-CN" dirty="0"/>
+              <a:t>center</a:t>
+            </a:r>
+          </a:p>
+          <a:p>
+            <a:pPr marL="342900" indent="-342900">
+              <a:buFont typeface="+mj-lt"/>
+              <a:buAutoNum type="arabicPeriod"/>
+            </a:pPr>
+            <a:endParaRPr lang="en-US" altLang="zh-CN" dirty="0"/>
+          </a:p>
+          <a:p>
+            <a:pPr marL="342900" indent="-342900">
+              <a:buFont typeface="+mj-lt"/>
+              <a:buAutoNum type="arabicPeriod"/>
+            </a:pPr>
+            <a:endParaRPr lang="en-US" altLang="zh-CN" dirty="0"/>
+          </a:p>
+          <a:p>
+            <a:pPr marL="342900" indent="-342900">
+              <a:buFont typeface="+mj-lt"/>
+              <a:buAutoNum type="arabicPeriod"/>
+            </a:pPr>
+            <a:endParaRPr lang="zh-CN" altLang="en-US" dirty="0"/>
+          </a:p>
+        </p:txBody>
+      </p:sp>
+    </p:spTree>
+    <p:extLst>
+      <p:ext uri="{BB962C8B-B14F-4D97-AF65-F5344CB8AC3E}">
+        <p14:creationId xmlns:p14="http://schemas.microsoft.com/office/powerpoint/2010/main" val="3158855169"/>
+      </p:ext>
+    </p:extLst>
+  </p:cSld>
+  <p:clrMapOvr>
+    <a:masterClrMapping/>
+  </p:clrMapOvr>
+</p:sld>
+</file>
+
+<file path=ppt/slides/slide4.xml><?xml version="1.0" encoding="utf-8"?>
+<p:sld xmlns:a="http://schemas.openxmlformats.org/drawingml/2006/main" xmlns:r="http://schemas.openxmlformats.org/officeDocument/2006/relationships" xmlns:p="http://schemas.openxmlformats.org/presentationml/2006/main">
+  <p:cSld>
+    <p:spTree>
+      <p:nvGrpSpPr>
+        <p:cNvPr id="1" name=""/>
+        <p:cNvGrpSpPr/>
+        <p:nvPr/>
+      </p:nvGrpSpPr>
+      <p:grpSpPr>
+        <a:xfrm>
+          <a:off x="0" y="0"/>
+          <a:ext cx="0" cy="0"/>
+          <a:chOff x="0" y="0"/>
+          <a:chExt cx="0" cy="0"/>
+        </a:xfrm>
+      </p:grpSpPr>
+      <p:sp>
+        <p:nvSpPr>
+          <p:cNvPr id="4" name="文本框 3">
+            <a:extLst>
+              <a:ext uri="{FF2B5EF4-FFF2-40B4-BE49-F238E27FC236}">
+                <a16:creationId xmlns:a16="http://schemas.microsoft.com/office/drawing/2014/main" id="{909D71DE-B432-46C6-828E-8F399D791061}"/>
+              </a:ext>
+            </a:extLst>
+          </p:cNvPr>
+          <p:cNvSpPr txBox="1"/>
+          <p:nvPr/>
+        </p:nvSpPr>
+        <p:spPr>
+          <a:xfrm>
+            <a:off x="0" y="0"/>
+            <a:ext cx="1244251" cy="461665"/>
+          </a:xfrm>
+          <a:prstGeom prst="rect">
+            <a:avLst/>
+          </a:prstGeom>
+          <a:noFill/>
+        </p:spPr>
+        <p:txBody>
+          <a:bodyPr wrap="none" rtlCol="0">
+            <a:spAutoFit/>
+          </a:bodyPr>
+          <a:lstStyle/>
+          <a:p>
+            <a:r>
+              <a:rPr lang="en-US" altLang="zh-CN" sz="2400" b="1" dirty="0" err="1">
+                <a:latin typeface="Arial" panose="020B0604020202020204" pitchFamily="34" charset="0"/>
+                <a:cs typeface="Arial" panose="020B0604020202020204" pitchFamily="34" charset="0"/>
+              </a:rPr>
+              <a:t>offroad</a:t>
+            </a:r>
+            <a:endParaRPr lang="zh-CN" altLang="en-US" sz="2400" b="1" dirty="0">
+              <a:latin typeface="Arial" panose="020B0604020202020204" pitchFamily="34" charset="0"/>
+              <a:cs typeface="Arial" panose="020B0604020202020204" pitchFamily="34" charset="0"/>
+            </a:endParaRPr>
+          </a:p>
+        </p:txBody>
+      </p:sp>
+    </p:spTree>
+    <p:extLst>
+      <p:ext uri="{BB962C8B-B14F-4D97-AF65-F5344CB8AC3E}">
+        <p14:creationId xmlns:p14="http://schemas.microsoft.com/office/powerpoint/2010/main" val="3095453633"/>
+      </p:ext>
+    </p:extLst>
+  </p:cSld>
+  <p:clrMapOvr>
+    <a:masterClrMapping/>
+  </p:clrMapOvr>
+</p:sld>
+</file>
+
+<file path=ppt/slides/slide5.xml><?xml version="1.0" encoding="utf-8"?>
+<p:sld xmlns:a="http://schemas.openxmlformats.org/drawingml/2006/main" xmlns:r="http://schemas.openxmlformats.org/officeDocument/2006/relationships" xmlns:p="http://schemas.openxmlformats.org/presentationml/2006/main">
+  <p:cSld>
+    <p:spTree>
+      <p:nvGrpSpPr>
+        <p:cNvPr id="1" name=""/>
+        <p:cNvGrpSpPr/>
+        <p:nvPr/>
+      </p:nvGrpSpPr>
+      <p:grpSpPr>
+        <a:xfrm>
+          <a:off x="0" y="0"/>
+          <a:ext cx="0" cy="0"/>
+          <a:chOff x="0" y="0"/>
+          <a:chExt cx="0" cy="0"/>
+        </a:xfrm>
+      </p:grpSpPr>
+      <p:sp>
+        <p:nvSpPr>
+          <p:cNvPr id="4" name="文本框 3">
+            <a:extLst>
+              <a:ext uri="{FF2B5EF4-FFF2-40B4-BE49-F238E27FC236}">
+                <a16:creationId xmlns:a16="http://schemas.microsoft.com/office/drawing/2014/main" id="{025AB873-2799-4BE5-8E6C-C5A6127988CE}"/>
+              </a:ext>
+            </a:extLst>
+          </p:cNvPr>
+          <p:cNvSpPr txBox="1"/>
+          <p:nvPr/>
+        </p:nvSpPr>
+        <p:spPr>
+          <a:xfrm>
+            <a:off x="0" y="0"/>
+            <a:ext cx="833883" cy="461665"/>
+          </a:xfrm>
+          <a:prstGeom prst="rect">
+            <a:avLst/>
+          </a:prstGeom>
+          <a:noFill/>
+        </p:spPr>
+        <p:txBody>
+          <a:bodyPr wrap="none" rtlCol="0">
+            <a:spAutoFit/>
+          </a:bodyPr>
+          <a:lstStyle/>
+          <a:p>
+            <a:r>
+              <a:rPr lang="en-US" altLang="zh-CN" sz="2400" b="1" dirty="0">
+                <a:latin typeface="Arial" panose="020B0604020202020204" pitchFamily="34" charset="0"/>
+                <a:cs typeface="Arial" panose="020B0604020202020204" pitchFamily="34" charset="0"/>
+              </a:rPr>
+              <a:t>path</a:t>
+            </a:r>
+            <a:endParaRPr lang="zh-CN" altLang="en-US" sz="2400" b="1" dirty="0">
+              <a:latin typeface="Arial" panose="020B0604020202020204" pitchFamily="34" charset="0"/>
+              <a:cs typeface="Arial" panose="020B0604020202020204" pitchFamily="34" charset="0"/>
+            </a:endParaRPr>
+          </a:p>
+        </p:txBody>
+      </p:sp>
+    </p:spTree>
+    <p:extLst>
+      <p:ext uri="{BB962C8B-B14F-4D97-AF65-F5344CB8AC3E}">
+        <p14:creationId xmlns:p14="http://schemas.microsoft.com/office/powerpoint/2010/main" val="3423393632"/>
+      </p:ext>
+    </p:extLst>
+  </p:cSld>
+  <p:clrMapOvr>
+    <a:masterClrMapping/>
+  </p:clrMapOvr>
+</p:sld>
+</file>
+
+<file path=ppt/slides/slide6.xml><?xml version="1.0" encoding="utf-8"?>
+<p:sld xmlns:a="http://schemas.openxmlformats.org/drawingml/2006/main" xmlns:r="http://schemas.openxmlformats.org/officeDocument/2006/relationships" xmlns:p="http://schemas.openxmlformats.org/presentationml/2006/main">
+  <p:cSld>
+    <p:spTree>
+      <p:nvGrpSpPr>
+        <p:cNvPr id="1" name=""/>
+        <p:cNvGrpSpPr/>
+        <p:nvPr/>
+      </p:nvGrpSpPr>
+      <p:grpSpPr>
+        <a:xfrm>
+          <a:off x="0" y="0"/>
+          <a:ext cx="0" cy="0"/>
+          <a:chOff x="0" y="0"/>
+          <a:chExt cx="0" cy="0"/>
+        </a:xfrm>
+      </p:grpSpPr>
+      <p:sp>
+        <p:nvSpPr>
+          <p:cNvPr id="4" name="文本框 3">
+            <a:extLst>
+              <a:ext uri="{FF2B5EF4-FFF2-40B4-BE49-F238E27FC236}">
                 <a16:creationId xmlns:a16="http://schemas.microsoft.com/office/drawing/2014/main" id="{DD4E300A-2A39-4CC7-9BE0-D55BC33AFB91}"/>
               </a:ext>
             </a:extLst>
@@ -6290,6 +10085,48 @@
               <a:solidFill>
                 <a:srgbClr val="FF0000"/>
               </a:solidFill>
+            </a:endParaRPr>
+          </a:p>
+        </p:txBody>
+      </p:sp>
+      <p:sp>
+        <p:nvSpPr>
+          <p:cNvPr id="62" name="文本框 61">
+            <a:extLst>
+              <a:ext uri="{FF2B5EF4-FFF2-40B4-BE49-F238E27FC236}">
+                <a16:creationId xmlns:a16="http://schemas.microsoft.com/office/drawing/2014/main" id="{21491825-50D9-41EE-B40D-3482D1E2A940}"/>
+              </a:ext>
+            </a:extLst>
+          </p:cNvPr>
+          <p:cNvSpPr txBox="1"/>
+          <p:nvPr/>
+        </p:nvSpPr>
+        <p:spPr>
+          <a:xfrm>
+            <a:off x="-32216" y="-452124"/>
+            <a:ext cx="1212191" cy="461665"/>
+          </a:xfrm>
+          <a:prstGeom prst="rect">
+            <a:avLst/>
+          </a:prstGeom>
+          <a:noFill/>
+        </p:spPr>
+        <p:txBody>
+          <a:bodyPr wrap="none" rtlCol="0">
+            <a:spAutoFit/>
+          </a:bodyPr>
+          <a:lstStyle/>
+          <a:p>
+            <a:r>
+              <a:rPr lang="en-US" altLang="zh-CN" sz="2400" b="1" dirty="0">
+                <a:latin typeface="Arial" panose="020B0604020202020204" pitchFamily="34" charset="0"/>
+                <a:cs typeface="Arial" panose="020B0604020202020204" pitchFamily="34" charset="0"/>
+              </a:rPr>
+              <a:t>feature</a:t>
+            </a:r>
+            <a:endParaRPr lang="zh-CN" altLang="en-US" sz="2400" b="1" dirty="0">
+              <a:latin typeface="Arial" panose="020B0604020202020204" pitchFamily="34" charset="0"/>
+              <a:cs typeface="Arial" panose="020B0604020202020204" pitchFamily="34" charset="0"/>
             </a:endParaRPr>
           </a:p>
         </p:txBody>
@@ -6307,7 +10144,7 @@
 </p:sld>
 </file>
 
-<file path=ppt/slides/slide2.xml><?xml version="1.0" encoding="utf-8"?>
+<file path=ppt/slides/slide7.xml><?xml version="1.0" encoding="utf-8"?>
 <p:sld xmlns:a="http://schemas.openxmlformats.org/drawingml/2006/main" xmlns:r="http://schemas.openxmlformats.org/officeDocument/2006/relationships" xmlns:p="http://schemas.openxmlformats.org/presentationml/2006/main">
   <p:cSld>
     <p:spTree>

--- a/construct.pptx
+++ b/construct.pptx
@@ -203,7 +203,7 @@
           <a:p>
             <a:fld id="{95BED5AB-465E-4E70-8B4C-8410F2278A90}" type="datetimeFigureOut">
               <a:rPr lang="zh-CN" altLang="en-US" smtClean="0"/>
-              <a:t>2025/12/19</a:t>
+              <a:t>2025/12/25</a:t>
             </a:fld>
             <a:endParaRPr lang="zh-CN" altLang="en-US"/>
           </a:p>
@@ -701,7 +701,7 @@
           <a:p>
             <a:fld id="{A69F80EA-AFE6-4570-883F-20D9B728F631}" type="datetimeFigureOut">
               <a:rPr lang="zh-CN" altLang="en-US" smtClean="0"/>
-              <a:t>2025/12/19</a:t>
+              <a:t>2025/12/25</a:t>
             </a:fld>
             <a:endParaRPr lang="zh-CN" altLang="en-US"/>
           </a:p>
@@ -899,7 +899,7 @@
           <a:p>
             <a:fld id="{A69F80EA-AFE6-4570-883F-20D9B728F631}" type="datetimeFigureOut">
               <a:rPr lang="zh-CN" altLang="en-US" smtClean="0"/>
-              <a:t>2025/12/19</a:t>
+              <a:t>2025/12/25</a:t>
             </a:fld>
             <a:endParaRPr lang="zh-CN" altLang="en-US"/>
           </a:p>
@@ -1107,7 +1107,7 @@
           <a:p>
             <a:fld id="{A69F80EA-AFE6-4570-883F-20D9B728F631}" type="datetimeFigureOut">
               <a:rPr lang="zh-CN" altLang="en-US" smtClean="0"/>
-              <a:t>2025/12/19</a:t>
+              <a:t>2025/12/25</a:t>
             </a:fld>
             <a:endParaRPr lang="zh-CN" altLang="en-US"/>
           </a:p>
@@ -1305,7 +1305,7 @@
           <a:p>
             <a:fld id="{A69F80EA-AFE6-4570-883F-20D9B728F631}" type="datetimeFigureOut">
               <a:rPr lang="zh-CN" altLang="en-US" smtClean="0"/>
-              <a:t>2025/12/19</a:t>
+              <a:t>2025/12/25</a:t>
             </a:fld>
             <a:endParaRPr lang="zh-CN" altLang="en-US"/>
           </a:p>
@@ -1580,7 +1580,7 @@
           <a:p>
             <a:fld id="{A69F80EA-AFE6-4570-883F-20D9B728F631}" type="datetimeFigureOut">
               <a:rPr lang="zh-CN" altLang="en-US" smtClean="0"/>
-              <a:t>2025/12/19</a:t>
+              <a:t>2025/12/25</a:t>
             </a:fld>
             <a:endParaRPr lang="zh-CN" altLang="en-US"/>
           </a:p>
@@ -1845,7 +1845,7 @@
           <a:p>
             <a:fld id="{A69F80EA-AFE6-4570-883F-20D9B728F631}" type="datetimeFigureOut">
               <a:rPr lang="zh-CN" altLang="en-US" smtClean="0"/>
-              <a:t>2025/12/19</a:t>
+              <a:t>2025/12/25</a:t>
             </a:fld>
             <a:endParaRPr lang="zh-CN" altLang="en-US"/>
           </a:p>
@@ -2257,7 +2257,7 @@
           <a:p>
             <a:fld id="{A69F80EA-AFE6-4570-883F-20D9B728F631}" type="datetimeFigureOut">
               <a:rPr lang="zh-CN" altLang="en-US" smtClean="0"/>
-              <a:t>2025/12/19</a:t>
+              <a:t>2025/12/25</a:t>
             </a:fld>
             <a:endParaRPr lang="zh-CN" altLang="en-US"/>
           </a:p>
@@ -2398,7 +2398,7 @@
           <a:p>
             <a:fld id="{A69F80EA-AFE6-4570-883F-20D9B728F631}" type="datetimeFigureOut">
               <a:rPr lang="zh-CN" altLang="en-US" smtClean="0"/>
-              <a:t>2025/12/19</a:t>
+              <a:t>2025/12/25</a:t>
             </a:fld>
             <a:endParaRPr lang="zh-CN" altLang="en-US"/>
           </a:p>
@@ -2511,7 +2511,7 @@
           <a:p>
             <a:fld id="{A69F80EA-AFE6-4570-883F-20D9B728F631}" type="datetimeFigureOut">
               <a:rPr lang="zh-CN" altLang="en-US" smtClean="0"/>
-              <a:t>2025/12/19</a:t>
+              <a:t>2025/12/25</a:t>
             </a:fld>
             <a:endParaRPr lang="zh-CN" altLang="en-US"/>
           </a:p>
@@ -2822,7 +2822,7 @@
           <a:p>
             <a:fld id="{A69F80EA-AFE6-4570-883F-20D9B728F631}" type="datetimeFigureOut">
               <a:rPr lang="zh-CN" altLang="en-US" smtClean="0"/>
-              <a:t>2025/12/19</a:t>
+              <a:t>2025/12/25</a:t>
             </a:fld>
             <a:endParaRPr lang="zh-CN" altLang="en-US"/>
           </a:p>
@@ -3110,7 +3110,7 @@
           <a:p>
             <a:fld id="{A69F80EA-AFE6-4570-883F-20D9B728F631}" type="datetimeFigureOut">
               <a:rPr lang="zh-CN" altLang="en-US" smtClean="0"/>
-              <a:t>2025/12/19</a:t>
+              <a:t>2025/12/25</a:t>
             </a:fld>
             <a:endParaRPr lang="zh-CN" altLang="en-US"/>
           </a:p>
@@ -3351,7 +3351,7 @@
           <a:p>
             <a:fld id="{A69F80EA-AFE6-4570-883F-20D9B728F631}" type="datetimeFigureOut">
               <a:rPr lang="zh-CN" altLang="en-US" smtClean="0"/>
-              <a:t>2025/12/19</a:t>
+              <a:t>2025/12/25</a:t>
             </a:fld>
             <a:endParaRPr lang="zh-CN" altLang="en-US"/>
           </a:p>
